--- a/files/kerinci-utama-dashboard.pptx
+++ b/files/kerinci-utama-dashboard.pptx
@@ -1,19 +1,21 @@
 
 <file path=ppt/presentation.xml><?xml version="1.0" encoding="utf-8"?>
-<p:presentation xmlns:p15="http://schemas.microsoft.com/office/powerpoint/2012/main" xmlns:a="http://schemas.openxmlformats.org/drawingml/2006/main" xmlns:r="http://schemas.openxmlformats.org/officeDocument/2006/relationships" xmlns:p="http://schemas.openxmlformats.org/presentationml/2006/main" saveSubsetFonts="1" autoCompressPictures="0">
+<p:presentation xmlns:a="http://schemas.openxmlformats.org/drawingml/2006/main" xmlns:r="http://schemas.openxmlformats.org/officeDocument/2006/relationships" xmlns:p="http://schemas.openxmlformats.org/presentationml/2006/main" saveSubsetFonts="1" autoCompressPictures="0">
   <p:sldMasterIdLst>
     <p:sldMasterId id="2147483660" r:id="rId1"/>
   </p:sldMasterIdLst>
+  <p:notesMasterIdLst>
+    <p:notesMasterId r:id="rId10"/>
+  </p:notesMasterIdLst>
   <p:sldIdLst>
-    <p:sldId id="256" r:id="rId2"/>
-    <p:sldId id="257" r:id="RelId0"/>
-    <p:sldId id="258" r:id="RelId1"/>
-    <p:sldId id="259" r:id="RelId2"/>
-    <p:sldId id="260" r:id="RelId3"/>
-    <p:sldId id="261" r:id="RelId4"/>
-    <p:sldId id="262" r:id="RelId5"/>
-    <p:sldId id="263" r:id="RelId6"/>
-    <p:sldId id="264" r:id="RelId7"/>
+    <p:sldId id="257" r:id="rId2"/>
+    <p:sldId id="258" r:id="rId3"/>
+    <p:sldId id="259" r:id="rId4"/>
+    <p:sldId id="260" r:id="rId5"/>
+    <p:sldId id="261" r:id="rId6"/>
+    <p:sldId id="262" r:id="rId7"/>
+    <p:sldId id="263" r:id="rId8"/>
+    <p:sldId id="264" r:id="rId9"/>
   </p:sldIdLst>
   <p:sldSz cx="12192000" cy="6858000"/>
   <p:notesSz cx="6858000" cy="9144000"/>
@@ -120,8 +122,358 @@
 </p:presentation>
 </file>
 
-<file path=ppt/notesSlides/notesSlide.xml><?xml version="1.0" encoding="utf-8"?>
-<p:notes xmlns:p="http://schemas.openxmlformats.org/presentationml/2006/main">
+<file path=ppt/notesMasters/notesMaster1.xml><?xml version="1.0" encoding="utf-8"?>
+<p:notesMaster xmlns:a="http://schemas.openxmlformats.org/drawingml/2006/main" xmlns:r="http://schemas.openxmlformats.org/officeDocument/2006/relationships" xmlns:p="http://schemas.openxmlformats.org/presentationml/2006/main">
+  <p:cSld>
+    <p:bg>
+      <p:bgRef idx="1001">
+        <a:schemeClr val="bg1"/>
+      </p:bgRef>
+    </p:bg>
+    <p:spTree>
+      <p:nvGrpSpPr>
+        <p:cNvPr id="1" name=""/>
+        <p:cNvGrpSpPr/>
+        <p:nvPr/>
+      </p:nvGrpSpPr>
+      <p:grpSpPr>
+        <a:xfrm>
+          <a:off x="0" y="0"/>
+          <a:ext cx="0" cy="0"/>
+          <a:chOff x="0" y="0"/>
+          <a:chExt cx="0" cy="0"/>
+        </a:xfrm>
+      </p:grpSpPr>
+      <p:sp>
+        <p:nvSpPr>
+          <p:cNvPr id="2" name="Header Placeholder 1"/>
+          <p:cNvSpPr>
+            <a:spLocks noGrp="1"/>
+          </p:cNvSpPr>
+          <p:nvPr>
+            <p:ph type="hdr" sz="quarter"/>
+          </p:nvPr>
+        </p:nvSpPr>
+        <p:spPr>
+          <a:xfrm>
+            <a:off x="0" y="0"/>
+            <a:ext cx="2971800" cy="458788"/>
+          </a:xfrm>
+          <a:prstGeom prst="rect">
+            <a:avLst/>
+          </a:prstGeom>
+        </p:spPr>
+        <p:txBody>
+          <a:bodyPr vert="horz" lIns="91440" tIns="45720" rIns="91440" bIns="45720" rtlCol="0"/>
+          <a:lstStyle>
+            <a:lvl1pPr algn="l">
+              <a:defRPr sz="1200"/>
+            </a:lvl1pPr>
+          </a:lstStyle>
+          <a:p>
+            <a:endParaRPr lang="en-ID"/>
+          </a:p>
+        </p:txBody>
+      </p:sp>
+      <p:sp>
+        <p:nvSpPr>
+          <p:cNvPr id="3" name="Date Placeholder 2"/>
+          <p:cNvSpPr>
+            <a:spLocks noGrp="1"/>
+          </p:cNvSpPr>
+          <p:nvPr>
+            <p:ph type="dt" idx="1"/>
+          </p:nvPr>
+        </p:nvSpPr>
+        <p:spPr>
+          <a:xfrm>
+            <a:off x="3884613" y="0"/>
+            <a:ext cx="2971800" cy="458788"/>
+          </a:xfrm>
+          <a:prstGeom prst="rect">
+            <a:avLst/>
+          </a:prstGeom>
+        </p:spPr>
+        <p:txBody>
+          <a:bodyPr vert="horz" lIns="91440" tIns="45720" rIns="91440" bIns="45720" rtlCol="0"/>
+          <a:lstStyle>
+            <a:lvl1pPr algn="r">
+              <a:defRPr sz="1200"/>
+            </a:lvl1pPr>
+          </a:lstStyle>
+          <a:p>
+            <a:fld id="{4BFEB529-FDD2-490A-95B1-695CB3E06068}" type="datetimeFigureOut">
+              <a:rPr lang="en-ID" smtClean="0"/>
+              <a:t>22/10/2026</a:t>
+            </a:fld>
+            <a:endParaRPr lang="en-ID"/>
+          </a:p>
+        </p:txBody>
+      </p:sp>
+      <p:sp>
+        <p:nvSpPr>
+          <p:cNvPr id="4" name="Slide Image Placeholder 3"/>
+          <p:cNvSpPr>
+            <a:spLocks noGrp="1" noRot="1" noChangeAspect="1"/>
+          </p:cNvSpPr>
+          <p:nvPr>
+            <p:ph type="sldImg" idx="2"/>
+          </p:nvPr>
+        </p:nvSpPr>
+        <p:spPr>
+          <a:xfrm>
+            <a:off x="685800" y="1143000"/>
+            <a:ext cx="5486400" cy="3086100"/>
+          </a:xfrm>
+          <a:prstGeom prst="rect">
+            <a:avLst/>
+          </a:prstGeom>
+          <a:noFill/>
+          <a:ln w="12700">
+            <a:solidFill>
+              <a:prstClr val="black"/>
+            </a:solidFill>
+          </a:ln>
+        </p:spPr>
+        <p:txBody>
+          <a:bodyPr vert="horz" lIns="91440" tIns="45720" rIns="91440" bIns="45720" rtlCol="0" anchor="ctr"/>
+          <a:lstStyle/>
+          <a:p>
+            <a:endParaRPr lang="en-ID"/>
+          </a:p>
+        </p:txBody>
+      </p:sp>
+      <p:sp>
+        <p:nvSpPr>
+          <p:cNvPr id="5" name="Notes Placeholder 4"/>
+          <p:cNvSpPr>
+            <a:spLocks noGrp="1"/>
+          </p:cNvSpPr>
+          <p:nvPr>
+            <p:ph type="body" sz="quarter" idx="3"/>
+          </p:nvPr>
+        </p:nvSpPr>
+        <p:spPr>
+          <a:xfrm>
+            <a:off x="685800" y="4400550"/>
+            <a:ext cx="5486400" cy="3600450"/>
+          </a:xfrm>
+          <a:prstGeom prst="rect">
+            <a:avLst/>
+          </a:prstGeom>
+        </p:spPr>
+        <p:txBody>
+          <a:bodyPr vert="horz" lIns="91440" tIns="45720" rIns="91440" bIns="45720" rtlCol="0"/>
+          <a:lstStyle/>
+          <a:p>
+            <a:pPr lvl="0"/>
+            <a:r>
+              <a:rPr lang="en-US"/>
+              <a:t>Click to edit Master text styles</a:t>
+            </a:r>
+          </a:p>
+          <a:p>
+            <a:pPr lvl="1"/>
+            <a:r>
+              <a:rPr lang="en-US"/>
+              <a:t>Second level</a:t>
+            </a:r>
+          </a:p>
+          <a:p>
+            <a:pPr lvl="2"/>
+            <a:r>
+              <a:rPr lang="en-US"/>
+              <a:t>Third level</a:t>
+            </a:r>
+          </a:p>
+          <a:p>
+            <a:pPr lvl="3"/>
+            <a:r>
+              <a:rPr lang="en-US"/>
+              <a:t>Fourth level</a:t>
+            </a:r>
+          </a:p>
+          <a:p>
+            <a:pPr lvl="4"/>
+            <a:r>
+              <a:rPr lang="en-US"/>
+              <a:t>Fifth level</a:t>
+            </a:r>
+            <a:endParaRPr lang="en-ID"/>
+          </a:p>
+        </p:txBody>
+      </p:sp>
+      <p:sp>
+        <p:nvSpPr>
+          <p:cNvPr id="6" name="Footer Placeholder 5"/>
+          <p:cNvSpPr>
+            <a:spLocks noGrp="1"/>
+          </p:cNvSpPr>
+          <p:nvPr>
+            <p:ph type="ftr" sz="quarter" idx="4"/>
+          </p:nvPr>
+        </p:nvSpPr>
+        <p:spPr>
+          <a:xfrm>
+            <a:off x="0" y="8685213"/>
+            <a:ext cx="2971800" cy="458787"/>
+          </a:xfrm>
+          <a:prstGeom prst="rect">
+            <a:avLst/>
+          </a:prstGeom>
+        </p:spPr>
+        <p:txBody>
+          <a:bodyPr vert="horz" lIns="91440" tIns="45720" rIns="91440" bIns="45720" rtlCol="0" anchor="b"/>
+          <a:lstStyle>
+            <a:lvl1pPr algn="l">
+              <a:defRPr sz="1200"/>
+            </a:lvl1pPr>
+          </a:lstStyle>
+          <a:p>
+            <a:endParaRPr lang="en-ID"/>
+          </a:p>
+        </p:txBody>
+      </p:sp>
+      <p:sp>
+        <p:nvSpPr>
+          <p:cNvPr id="7" name="Slide Number Placeholder 6"/>
+          <p:cNvSpPr>
+            <a:spLocks noGrp="1"/>
+          </p:cNvSpPr>
+          <p:nvPr>
+            <p:ph type="sldNum" sz="quarter" idx="5"/>
+          </p:nvPr>
+        </p:nvSpPr>
+        <p:spPr>
+          <a:xfrm>
+            <a:off x="3884613" y="8685213"/>
+            <a:ext cx="2971800" cy="458787"/>
+          </a:xfrm>
+          <a:prstGeom prst="rect">
+            <a:avLst/>
+          </a:prstGeom>
+        </p:spPr>
+        <p:txBody>
+          <a:bodyPr vert="horz" lIns="91440" tIns="45720" rIns="91440" bIns="45720" rtlCol="0" anchor="b"/>
+          <a:lstStyle>
+            <a:lvl1pPr algn="r">
+              <a:defRPr sz="1200"/>
+            </a:lvl1pPr>
+          </a:lstStyle>
+          <a:p>
+            <a:fld id="{5BCC799E-F400-40B1-8EC7-28FF03ECE075}" type="slidenum">
+              <a:rPr lang="en-ID" smtClean="0"/>
+              <a:t>‹#›</a:t>
+            </a:fld>
+            <a:endParaRPr lang="en-ID"/>
+          </a:p>
+        </p:txBody>
+      </p:sp>
+    </p:spTree>
+    <p:extLst>
+      <p:ext uri="{BB962C8B-B14F-4D97-AF65-F5344CB8AC3E}">
+        <p14:creationId xmlns:p14="http://schemas.microsoft.com/office/powerpoint/2010/main" val="755892286"/>
+      </p:ext>
+    </p:extLst>
+  </p:cSld>
+  <p:clrMap bg1="lt1" tx1="dk1" bg2="lt2" tx2="dk2" accent1="accent1" accent2="accent2" accent3="accent3" accent4="accent4" accent5="accent5" accent6="accent6" hlink="hlink" folHlink="folHlink"/>
+  <p:notesStyle>
+    <a:lvl1pPr marL="0" algn="l" defTabSz="914400" rtl="0" eaLnBrk="1" latinLnBrk="0" hangingPunct="1">
+      <a:defRPr sz="1200" kern="1200">
+        <a:solidFill>
+          <a:schemeClr val="tx1"/>
+        </a:solidFill>
+        <a:latin typeface="+mn-lt"/>
+        <a:ea typeface="+mn-ea"/>
+        <a:cs typeface="+mn-cs"/>
+      </a:defRPr>
+    </a:lvl1pPr>
+    <a:lvl2pPr marL="457200" algn="l" defTabSz="914400" rtl="0" eaLnBrk="1" latinLnBrk="0" hangingPunct="1">
+      <a:defRPr sz="1200" kern="1200">
+        <a:solidFill>
+          <a:schemeClr val="tx1"/>
+        </a:solidFill>
+        <a:latin typeface="+mn-lt"/>
+        <a:ea typeface="+mn-ea"/>
+        <a:cs typeface="+mn-cs"/>
+      </a:defRPr>
+    </a:lvl2pPr>
+    <a:lvl3pPr marL="914400" algn="l" defTabSz="914400" rtl="0" eaLnBrk="1" latinLnBrk="0" hangingPunct="1">
+      <a:defRPr sz="1200" kern="1200">
+        <a:solidFill>
+          <a:schemeClr val="tx1"/>
+        </a:solidFill>
+        <a:latin typeface="+mn-lt"/>
+        <a:ea typeface="+mn-ea"/>
+        <a:cs typeface="+mn-cs"/>
+      </a:defRPr>
+    </a:lvl3pPr>
+    <a:lvl4pPr marL="1371600" algn="l" defTabSz="914400" rtl="0" eaLnBrk="1" latinLnBrk="0" hangingPunct="1">
+      <a:defRPr sz="1200" kern="1200">
+        <a:solidFill>
+          <a:schemeClr val="tx1"/>
+        </a:solidFill>
+        <a:latin typeface="+mn-lt"/>
+        <a:ea typeface="+mn-ea"/>
+        <a:cs typeface="+mn-cs"/>
+      </a:defRPr>
+    </a:lvl4pPr>
+    <a:lvl5pPr marL="1828800" algn="l" defTabSz="914400" rtl="0" eaLnBrk="1" latinLnBrk="0" hangingPunct="1">
+      <a:defRPr sz="1200" kern="1200">
+        <a:solidFill>
+          <a:schemeClr val="tx1"/>
+        </a:solidFill>
+        <a:latin typeface="+mn-lt"/>
+        <a:ea typeface="+mn-ea"/>
+        <a:cs typeface="+mn-cs"/>
+      </a:defRPr>
+    </a:lvl5pPr>
+    <a:lvl6pPr marL="2286000" algn="l" defTabSz="914400" rtl="0" eaLnBrk="1" latinLnBrk="0" hangingPunct="1">
+      <a:defRPr sz="1200" kern="1200">
+        <a:solidFill>
+          <a:schemeClr val="tx1"/>
+        </a:solidFill>
+        <a:latin typeface="+mn-lt"/>
+        <a:ea typeface="+mn-ea"/>
+        <a:cs typeface="+mn-cs"/>
+      </a:defRPr>
+    </a:lvl6pPr>
+    <a:lvl7pPr marL="2743200" algn="l" defTabSz="914400" rtl="0" eaLnBrk="1" latinLnBrk="0" hangingPunct="1">
+      <a:defRPr sz="1200" kern="1200">
+        <a:solidFill>
+          <a:schemeClr val="tx1"/>
+        </a:solidFill>
+        <a:latin typeface="+mn-lt"/>
+        <a:ea typeface="+mn-ea"/>
+        <a:cs typeface="+mn-cs"/>
+      </a:defRPr>
+    </a:lvl7pPr>
+    <a:lvl8pPr marL="3200400" algn="l" defTabSz="914400" rtl="0" eaLnBrk="1" latinLnBrk="0" hangingPunct="1">
+      <a:defRPr sz="1200" kern="1200">
+        <a:solidFill>
+          <a:schemeClr val="tx1"/>
+        </a:solidFill>
+        <a:latin typeface="+mn-lt"/>
+        <a:ea typeface="+mn-ea"/>
+        <a:cs typeface="+mn-cs"/>
+      </a:defRPr>
+    </a:lvl8pPr>
+    <a:lvl9pPr marL="3657600" algn="l" defTabSz="914400" rtl="0" eaLnBrk="1" latinLnBrk="0" hangingPunct="1">
+      <a:defRPr sz="1200" kern="1200">
+        <a:solidFill>
+          <a:schemeClr val="tx1"/>
+        </a:solidFill>
+        <a:latin typeface="+mn-lt"/>
+        <a:ea typeface="+mn-ea"/>
+        <a:cs typeface="+mn-cs"/>
+      </a:defRPr>
+    </a:lvl9pPr>
+  </p:notesStyle>
+</p:notesMaster>
+</file>
+
+<file path=ppt/notesSlides/notesSlide1.xml><?xml version="1.0" encoding="utf-8"?>
+<p:notes xmlns:a="http://schemas.openxmlformats.org/drawingml/2006/main" xmlns:r="http://schemas.openxmlformats.org/officeDocument/2006/relationships" xmlns:p="http://schemas.openxmlformats.org/presentationml/2006/main">
   <p:cSld>
     <p:spTree>
       <p:nvGrpSpPr>
@@ -129,12 +481,19 @@
         <p:cNvGrpSpPr/>
         <p:nvPr/>
       </p:nvGrpSpPr>
-      <p:grpSpPr/>
+      <p:grpSpPr>
+        <a:xfrm>
+          <a:off x="0" y="0"/>
+          <a:ext cx="0" cy="0"/>
+          <a:chOff x="0" y="0"/>
+          <a:chExt cx="0" cy="0"/>
+        </a:xfrm>
+      </p:grpSpPr>
       <p:sp>
         <p:nvSpPr>
           <p:cNvPr id="2" name="Slide Text"/>
           <p:cNvSpPr>
-            <a:spLocks xmlns:a="http://schemas.openxmlformats.org/drawingml/2006/main" noGrp="1"/>
+            <a:spLocks noGrp="1"/>
           </p:cNvSpPr>
           <p:nvPr>
             <p:ph type="body" idx="1"/>
@@ -142,272 +501,224 @@
         </p:nvSpPr>
         <p:spPr/>
         <p:txBody>
-          <a:bodyPr xmlns:a="http://schemas.openxmlformats.org/drawingml/2006/main"/>
-          <a:lstStyle xmlns:a="http://schemas.openxmlformats.org/drawingml/2006/main"/>
-          <a:p xmlns:a="http://schemas.openxmlformats.org/drawingml/2006/main">
+          <a:bodyPr/>
+          <a:lstStyle/>
+          <a:p>
             <a:r>
               <a:rPr b="1" dirty="0"/>
               <a:t>Customer Aktif</a:t>
             </a:r>
             <a:endParaRPr dirty="0"/>
           </a:p>
-          <a:p xmlns:a="http://schemas.openxmlformats.org/drawingml/2006/main">
-            <a:r>
-              <a:rPr b="0" dirty="0"/>
-              <a:t>No alt text provided</a:t>
-            </a:r>
-            <a:endParaRPr dirty="0"/>
-          </a:p>
-          <a:p xmlns:a="http://schemas.openxmlformats.org/drawingml/2006/main">
-            <a:r>
-              <a:rPr b="0" dirty="0"/>
-              <a:t/>
-            </a:r>
-            <a:endParaRPr dirty="0"/>
-          </a:p>
-          <a:p xmlns:a="http://schemas.openxmlformats.org/drawingml/2006/main">
+          <a:p>
+            <a:r>
+              <a:rPr b="0" dirty="0"/>
+              <a:t>No alt text provided</a:t>
+            </a:r>
+            <a:endParaRPr dirty="0"/>
+          </a:p>
+          <a:p>
+            <a:endParaRPr dirty="0"/>
+          </a:p>
+          <a:p>
             <a:r>
               <a:rPr b="1" dirty="0"/>
               <a:t>Total Revenue</a:t>
             </a:r>
             <a:endParaRPr dirty="0"/>
           </a:p>
-          <a:p xmlns:a="http://schemas.openxmlformats.org/drawingml/2006/main">
-            <a:r>
-              <a:rPr b="0" dirty="0"/>
-              <a:t>No alt text provided</a:t>
-            </a:r>
-            <a:endParaRPr dirty="0"/>
-          </a:p>
-          <a:p xmlns:a="http://schemas.openxmlformats.org/drawingml/2006/main">
-            <a:r>
-              <a:rPr b="0" dirty="0"/>
-              <a:t/>
-            </a:r>
-            <a:endParaRPr dirty="0"/>
-          </a:p>
-          <a:p xmlns:a="http://schemas.openxmlformats.org/drawingml/2006/main">
+          <a:p>
+            <a:r>
+              <a:rPr b="0" dirty="0"/>
+              <a:t>No alt text provided</a:t>
+            </a:r>
+            <a:endParaRPr dirty="0"/>
+          </a:p>
+          <a:p>
+            <a:endParaRPr dirty="0"/>
+          </a:p>
+          <a:p>
             <a:r>
               <a:rPr b="1" dirty="0"/>
               <a:t>Gross Margin</a:t>
             </a:r>
             <a:endParaRPr dirty="0"/>
           </a:p>
-          <a:p xmlns:a="http://schemas.openxmlformats.org/drawingml/2006/main">
-            <a:r>
-              <a:rPr b="0" dirty="0"/>
-              <a:t>No alt text provided</a:t>
-            </a:r>
-            <a:endParaRPr dirty="0"/>
-          </a:p>
-          <a:p xmlns:a="http://schemas.openxmlformats.org/drawingml/2006/main">
-            <a:r>
-              <a:rPr b="0" dirty="0"/>
-              <a:t/>
-            </a:r>
-            <a:endParaRPr dirty="0"/>
-          </a:p>
-          <a:p xmlns:a="http://schemas.openxmlformats.org/drawingml/2006/main">
+          <a:p>
+            <a:r>
+              <a:rPr b="0" dirty="0"/>
+              <a:t>No alt text provided</a:t>
+            </a:r>
+            <a:endParaRPr dirty="0"/>
+          </a:p>
+          <a:p>
+            <a:endParaRPr dirty="0"/>
+          </a:p>
+          <a:p>
             <a:r>
               <a:rPr b="1" dirty="0"/>
               <a:t>textbox</a:t>
             </a:r>
             <a:endParaRPr dirty="0"/>
           </a:p>
-          <a:p xmlns:a="http://schemas.openxmlformats.org/drawingml/2006/main">
-            <a:r>
-              <a:rPr b="0" dirty="0"/>
-              <a:t>No alt text provided</a:t>
-            </a:r>
-            <a:endParaRPr dirty="0"/>
-          </a:p>
-          <a:p xmlns:a="http://schemas.openxmlformats.org/drawingml/2006/main">
-            <a:r>
-              <a:rPr b="0" dirty="0"/>
-              <a:t/>
-            </a:r>
-            <a:endParaRPr dirty="0"/>
-          </a:p>
-          <a:p xmlns:a="http://schemas.openxmlformats.org/drawingml/2006/main">
+          <a:p>
+            <a:r>
+              <a:rPr b="0" dirty="0"/>
+              <a:t>No alt text provided</a:t>
+            </a:r>
+            <a:endParaRPr dirty="0"/>
+          </a:p>
+          <a:p>
+            <a:endParaRPr dirty="0"/>
+          </a:p>
+          <a:p>
             <a:r>
               <a:rPr b="1" dirty="0"/>
               <a:t>Pencapaian Target</a:t>
             </a:r>
             <a:endParaRPr dirty="0"/>
           </a:p>
-          <a:p xmlns:a="http://schemas.openxmlformats.org/drawingml/2006/main">
-            <a:r>
-              <a:rPr b="0" dirty="0"/>
-              <a:t>No alt text provided</a:t>
-            </a:r>
-            <a:endParaRPr dirty="0"/>
-          </a:p>
-          <a:p xmlns:a="http://schemas.openxmlformats.org/drawingml/2006/main">
-            <a:r>
-              <a:rPr b="0" dirty="0"/>
-              <a:t/>
-            </a:r>
-            <a:endParaRPr dirty="0"/>
-          </a:p>
-          <a:p xmlns:a="http://schemas.openxmlformats.org/drawingml/2006/main">
+          <a:p>
+            <a:r>
+              <a:rPr b="0" dirty="0"/>
+              <a:t>No alt text provided</a:t>
+            </a:r>
+            <a:endParaRPr dirty="0"/>
+          </a:p>
+          <a:p>
+            <a:endParaRPr dirty="0"/>
+          </a:p>
+          <a:p>
             <a:r>
               <a:rPr b="1" dirty="0"/>
               <a:t>advancedSlicerVisual</a:t>
             </a:r>
             <a:endParaRPr dirty="0"/>
           </a:p>
-          <a:p xmlns:a="http://schemas.openxmlformats.org/drawingml/2006/main">
-            <a:r>
-              <a:rPr b="0" dirty="0"/>
-              <a:t>No alt text provided</a:t>
-            </a:r>
-            <a:endParaRPr dirty="0"/>
-          </a:p>
-          <a:p xmlns:a="http://schemas.openxmlformats.org/drawingml/2006/main">
-            <a:r>
-              <a:rPr b="0" dirty="0"/>
-              <a:t/>
-            </a:r>
-            <a:endParaRPr dirty="0"/>
-          </a:p>
-          <a:p xmlns:a="http://schemas.openxmlformats.org/drawingml/2006/main">
+          <a:p>
+            <a:r>
+              <a:rPr b="0" dirty="0"/>
+              <a:t>No alt text provided</a:t>
+            </a:r>
+            <a:endParaRPr dirty="0"/>
+          </a:p>
+          <a:p>
+            <a:endParaRPr dirty="0"/>
+          </a:p>
+          <a:p>
             <a:r>
               <a:rPr b="1" dirty="0"/>
               <a:t>pageNavigator</a:t>
             </a:r>
             <a:endParaRPr dirty="0"/>
           </a:p>
-          <a:p xmlns:a="http://schemas.openxmlformats.org/drawingml/2006/main">
-            <a:r>
-              <a:rPr b="0" dirty="0"/>
-              <a:t>No alt text provided</a:t>
-            </a:r>
-            <a:endParaRPr dirty="0"/>
-          </a:p>
-          <a:p xmlns:a="http://schemas.openxmlformats.org/drawingml/2006/main">
-            <a:r>
-              <a:rPr b="0" dirty="0"/>
-              <a:t/>
-            </a:r>
-            <a:endParaRPr dirty="0"/>
-          </a:p>
-          <a:p xmlns:a="http://schemas.openxmlformats.org/drawingml/2006/main">
+          <a:p>
+            <a:r>
+              <a:rPr b="0" dirty="0"/>
+              <a:t>No alt text provided</a:t>
+            </a:r>
+            <a:endParaRPr dirty="0"/>
+          </a:p>
+          <a:p>
+            <a:endParaRPr dirty="0"/>
+          </a:p>
+          <a:p>
             <a:r>
               <a:rPr b="1" dirty="0"/>
               <a:t>Top 10 Customer</a:t>
             </a:r>
             <a:endParaRPr dirty="0"/>
           </a:p>
-          <a:p xmlns:a="http://schemas.openxmlformats.org/drawingml/2006/main">
-            <a:r>
-              <a:rPr b="0" dirty="0"/>
-              <a:t>No alt text provided</a:t>
-            </a:r>
-            <a:endParaRPr dirty="0"/>
-          </a:p>
-          <a:p xmlns:a="http://schemas.openxmlformats.org/drawingml/2006/main">
-            <a:r>
-              <a:rPr b="0" dirty="0"/>
-              <a:t/>
-            </a:r>
-            <a:endParaRPr dirty="0"/>
-          </a:p>
-          <a:p xmlns:a="http://schemas.openxmlformats.org/drawingml/2006/main">
+          <a:p>
+            <a:r>
+              <a:rPr b="0" dirty="0"/>
+              <a:t>No alt text provided</a:t>
+            </a:r>
+            <a:endParaRPr dirty="0"/>
+          </a:p>
+          <a:p>
+            <a:endParaRPr dirty="0"/>
+          </a:p>
+          <a:p>
             <a:r>
               <a:rPr b="1" dirty="0"/>
               <a:t>Aktual vs Target per Tahun</a:t>
             </a:r>
             <a:endParaRPr dirty="0"/>
           </a:p>
-          <a:p xmlns:a="http://schemas.openxmlformats.org/drawingml/2006/main">
-            <a:r>
-              <a:rPr b="0" dirty="0"/>
-              <a:t>No alt text provided</a:t>
-            </a:r>
-            <a:endParaRPr dirty="0"/>
-          </a:p>
-          <a:p xmlns:a="http://schemas.openxmlformats.org/drawingml/2006/main">
-            <a:r>
-              <a:rPr b="0" dirty="0"/>
-              <a:t/>
-            </a:r>
-            <a:endParaRPr dirty="0"/>
-          </a:p>
-          <a:p xmlns:a="http://schemas.openxmlformats.org/drawingml/2006/main">
+          <a:p>
+            <a:r>
+              <a:rPr b="0" dirty="0"/>
+              <a:t>No alt text provided</a:t>
+            </a:r>
+            <a:endParaRPr dirty="0"/>
+          </a:p>
+          <a:p>
+            <a:endParaRPr dirty="0"/>
+          </a:p>
+          <a:p>
             <a:r>
               <a:rPr b="1" dirty="0"/>
               <a:t>Tren Revenue &amp; Order</a:t>
             </a:r>
             <a:endParaRPr dirty="0"/>
           </a:p>
-          <a:p xmlns:a="http://schemas.openxmlformats.org/drawingml/2006/main">
-            <a:r>
-              <a:rPr b="0" dirty="0"/>
-              <a:t>No alt text provided</a:t>
-            </a:r>
-            <a:endParaRPr dirty="0"/>
-          </a:p>
-          <a:p xmlns:a="http://schemas.openxmlformats.org/drawingml/2006/main">
-            <a:r>
-              <a:rPr b="0" dirty="0"/>
-              <a:t/>
-            </a:r>
-            <a:endParaRPr dirty="0"/>
-          </a:p>
-          <a:p xmlns:a="http://schemas.openxmlformats.org/drawingml/2006/main">
+          <a:p>
+            <a:r>
+              <a:rPr b="0" dirty="0"/>
+              <a:t>No alt text provided</a:t>
+            </a:r>
+            <a:endParaRPr dirty="0"/>
+          </a:p>
+          <a:p>
+            <a:endParaRPr dirty="0"/>
+          </a:p>
+          <a:p>
             <a:r>
               <a:rPr b="1" dirty="0"/>
               <a:t>Kontribusi Revenue Per Region</a:t>
             </a:r>
             <a:endParaRPr dirty="0"/>
           </a:p>
-          <a:p xmlns:a="http://schemas.openxmlformats.org/drawingml/2006/main">
-            <a:r>
-              <a:rPr b="0" dirty="0"/>
-              <a:t>No alt text provided</a:t>
-            </a:r>
-            <a:endParaRPr dirty="0"/>
-          </a:p>
-          <a:p xmlns:a="http://schemas.openxmlformats.org/drawingml/2006/main">
-            <a:r>
-              <a:rPr b="0" dirty="0"/>
-              <a:t/>
-            </a:r>
-            <a:endParaRPr dirty="0"/>
-          </a:p>
-          <a:p xmlns:a="http://schemas.openxmlformats.org/drawingml/2006/main">
+          <a:p>
+            <a:r>
+              <a:rPr b="0" dirty="0"/>
+              <a:t>No alt text provided</a:t>
+            </a:r>
+            <a:endParaRPr dirty="0"/>
+          </a:p>
+          <a:p>
+            <a:endParaRPr dirty="0"/>
+          </a:p>
+          <a:p>
             <a:r>
               <a:rPr b="1" dirty="0"/>
               <a:t>Revenue Per Material</a:t>
             </a:r>
             <a:endParaRPr dirty="0"/>
           </a:p>
-          <a:p xmlns:a="http://schemas.openxmlformats.org/drawingml/2006/main">
-            <a:r>
-              <a:rPr b="0" dirty="0"/>
-              <a:t>No alt text provided</a:t>
-            </a:r>
-            <a:endParaRPr dirty="0"/>
-          </a:p>
-          <a:p xmlns:a="http://schemas.openxmlformats.org/drawingml/2006/main">
-            <a:r>
-              <a:rPr b="0" dirty="0"/>
-              <a:t/>
-            </a:r>
+          <a:p>
+            <a:r>
+              <a:rPr b="0" dirty="0"/>
+              <a:t>No alt text provided</a:t>
+            </a:r>
+            <a:endParaRPr dirty="0"/>
+          </a:p>
+          <a:p>
             <a:endParaRPr dirty="0"/>
           </a:p>
         </p:txBody>
       </p:sp>
     </p:spTree>
-    <p:clrMapOvr>
-      <a:masterClrMapping xmlns:a="http://schemas.openxmlformats.org/drawingml/2006/main"/>
-    </p:clrMapOvr>
   </p:cSld>
+  <p:clrMapOvr>
+    <a:masterClrMapping/>
+  </p:clrMapOvr>
 </p:notes>
 </file>
 
 <file path=ppt/notesSlides/notesSlide2.xml><?xml version="1.0" encoding="utf-8"?>
-<p:notes xmlns:p="http://schemas.openxmlformats.org/presentationml/2006/main">
+<p:notes xmlns:a="http://schemas.openxmlformats.org/drawingml/2006/main" xmlns:r="http://schemas.openxmlformats.org/officeDocument/2006/relationships" xmlns:p="http://schemas.openxmlformats.org/presentationml/2006/main">
   <p:cSld>
     <p:spTree>
       <p:nvGrpSpPr>
@@ -415,12 +726,19 @@
         <p:cNvGrpSpPr/>
         <p:nvPr/>
       </p:nvGrpSpPr>
-      <p:grpSpPr/>
+      <p:grpSpPr>
+        <a:xfrm>
+          <a:off x="0" y="0"/>
+          <a:ext cx="0" cy="0"/>
+          <a:chOff x="0" y="0"/>
+          <a:chExt cx="0" cy="0"/>
+        </a:xfrm>
+      </p:grpSpPr>
       <p:sp>
         <p:nvSpPr>
           <p:cNvPr id="2" name="Slide Text"/>
           <p:cNvSpPr>
-            <a:spLocks xmlns:a="http://schemas.openxmlformats.org/drawingml/2006/main" noGrp="1"/>
+            <a:spLocks noGrp="1"/>
           </p:cNvSpPr>
           <p:nvPr>
             <p:ph type="body" idx="1"/>
@@ -428,209 +746,173 @@
         </p:nvSpPr>
         <p:spPr/>
         <p:txBody>
-          <a:bodyPr xmlns:a="http://schemas.openxmlformats.org/drawingml/2006/main"/>
-          <a:lstStyle xmlns:a="http://schemas.openxmlformats.org/drawingml/2006/main"/>
-          <a:p xmlns:a="http://schemas.openxmlformats.org/drawingml/2006/main">
+          <a:bodyPr/>
+          <a:lstStyle/>
+          <a:p>
             <a:r>
               <a:rPr b="1" dirty="0"/>
               <a:t>textbox</a:t>
             </a:r>
             <a:endParaRPr dirty="0"/>
           </a:p>
-          <a:p xmlns:a="http://schemas.openxmlformats.org/drawingml/2006/main">
-            <a:r>
-              <a:rPr b="0" dirty="0"/>
-              <a:t>No alt text provided</a:t>
-            </a:r>
-            <a:endParaRPr dirty="0"/>
-          </a:p>
-          <a:p xmlns:a="http://schemas.openxmlformats.org/drawingml/2006/main">
-            <a:r>
-              <a:rPr b="0" dirty="0"/>
-              <a:t/>
-            </a:r>
-            <a:endParaRPr dirty="0"/>
-          </a:p>
-          <a:p xmlns:a="http://schemas.openxmlformats.org/drawingml/2006/main">
+          <a:p>
+            <a:r>
+              <a:rPr b="0" dirty="0"/>
+              <a:t>No alt text provided</a:t>
+            </a:r>
+            <a:endParaRPr dirty="0"/>
+          </a:p>
+          <a:p>
+            <a:endParaRPr dirty="0"/>
+          </a:p>
+          <a:p>
             <a:r>
               <a:rPr b="1" dirty="0"/>
               <a:t>Province Slicer</a:t>
             </a:r>
             <a:endParaRPr dirty="0"/>
           </a:p>
-          <a:p xmlns:a="http://schemas.openxmlformats.org/drawingml/2006/main">
-            <a:r>
-              <a:rPr b="0" dirty="0"/>
-              <a:t>No alt text provided</a:t>
-            </a:r>
-            <a:endParaRPr dirty="0"/>
-          </a:p>
-          <a:p xmlns:a="http://schemas.openxmlformats.org/drawingml/2006/main">
-            <a:r>
-              <a:rPr b="0" dirty="0"/>
-              <a:t/>
-            </a:r>
-            <a:endParaRPr dirty="0"/>
-          </a:p>
-          <a:p xmlns:a="http://schemas.openxmlformats.org/drawingml/2006/main">
+          <a:p>
+            <a:r>
+              <a:rPr b="0" dirty="0"/>
+              <a:t>No alt text provided</a:t>
+            </a:r>
+            <a:endParaRPr dirty="0"/>
+          </a:p>
+          <a:p>
+            <a:endParaRPr dirty="0"/>
+          </a:p>
+          <a:p>
             <a:r>
               <a:rPr b="1" dirty="0"/>
               <a:t>shapeMap</a:t>
             </a:r>
             <a:endParaRPr dirty="0"/>
           </a:p>
-          <a:p xmlns:a="http://schemas.openxmlformats.org/drawingml/2006/main">
-            <a:r>
-              <a:rPr b="0" dirty="0"/>
-              <a:t>No alt text provided</a:t>
-            </a:r>
-            <a:endParaRPr dirty="0"/>
-          </a:p>
-          <a:p xmlns:a="http://schemas.openxmlformats.org/drawingml/2006/main">
-            <a:r>
-              <a:rPr b="0" dirty="0"/>
-              <a:t/>
-            </a:r>
-            <a:endParaRPr dirty="0"/>
-          </a:p>
-          <a:p xmlns:a="http://schemas.openxmlformats.org/drawingml/2006/main">
+          <a:p>
+            <a:r>
+              <a:rPr b="0" dirty="0"/>
+              <a:t>No alt text provided</a:t>
+            </a:r>
+            <a:endParaRPr dirty="0"/>
+          </a:p>
+          <a:p>
+            <a:endParaRPr dirty="0"/>
+          </a:p>
+          <a:p>
             <a:r>
               <a:rPr b="1" dirty="0"/>
               <a:t>pageNavigator</a:t>
             </a:r>
             <a:endParaRPr dirty="0"/>
           </a:p>
-          <a:p xmlns:a="http://schemas.openxmlformats.org/drawingml/2006/main">
-            <a:r>
-              <a:rPr b="0" dirty="0"/>
-              <a:t>No alt text provided</a:t>
-            </a:r>
-            <a:endParaRPr dirty="0"/>
-          </a:p>
-          <a:p xmlns:a="http://schemas.openxmlformats.org/drawingml/2006/main">
-            <a:r>
-              <a:rPr b="0" dirty="0"/>
-              <a:t/>
-            </a:r>
-            <a:endParaRPr dirty="0"/>
-          </a:p>
-          <a:p xmlns:a="http://schemas.openxmlformats.org/drawingml/2006/main">
+          <a:p>
+            <a:r>
+              <a:rPr b="0" dirty="0"/>
+              <a:t>No alt text provided</a:t>
+            </a:r>
+            <a:endParaRPr dirty="0"/>
+          </a:p>
+          <a:p>
+            <a:endParaRPr dirty="0"/>
+          </a:p>
+          <a:p>
             <a:r>
               <a:rPr b="1" dirty="0"/>
               <a:t>level_nav</a:t>
             </a:r>
             <a:endParaRPr dirty="0"/>
           </a:p>
-          <a:p xmlns:a="http://schemas.openxmlformats.org/drawingml/2006/main">
-            <a:r>
-              <a:rPr b="0" dirty="0"/>
-              <a:t>No alt text provided</a:t>
-            </a:r>
-            <a:endParaRPr dirty="0"/>
-          </a:p>
-          <a:p xmlns:a="http://schemas.openxmlformats.org/drawingml/2006/main">
-            <a:r>
-              <a:rPr b="0" dirty="0"/>
-              <a:t/>
-            </a:r>
-            <a:endParaRPr dirty="0"/>
-          </a:p>
-          <a:p xmlns:a="http://schemas.openxmlformats.org/drawingml/2006/main">
+          <a:p>
+            <a:r>
+              <a:rPr b="0" dirty="0"/>
+              <a:t>No alt text provided</a:t>
+            </a:r>
+            <a:endParaRPr dirty="0"/>
+          </a:p>
+          <a:p>
+            <a:endParaRPr dirty="0"/>
+          </a:p>
+          <a:p>
             <a:r>
               <a:rPr b="1" dirty="0"/>
               <a:t>slicer</a:t>
             </a:r>
             <a:endParaRPr dirty="0"/>
           </a:p>
-          <a:p xmlns:a="http://schemas.openxmlformats.org/drawingml/2006/main">
-            <a:r>
-              <a:rPr b="0" dirty="0"/>
-              <a:t>No alt text provided</a:t>
-            </a:r>
-            <a:endParaRPr dirty="0"/>
-          </a:p>
-          <a:p xmlns:a="http://schemas.openxmlformats.org/drawingml/2006/main">
-            <a:r>
-              <a:rPr b="0" dirty="0"/>
-              <a:t/>
-            </a:r>
-            <a:endParaRPr dirty="0"/>
-          </a:p>
-          <a:p xmlns:a="http://schemas.openxmlformats.org/drawingml/2006/main">
+          <a:p>
+            <a:r>
+              <a:rPr b="0" dirty="0"/>
+              <a:t>No alt text provided</a:t>
+            </a:r>
+            <a:endParaRPr dirty="0"/>
+          </a:p>
+          <a:p>
+            <a:endParaRPr dirty="0"/>
+          </a:p>
+          <a:p>
             <a:r>
               <a:rPr b="1" dirty="0"/>
               <a:t>year_slicer</a:t>
             </a:r>
             <a:endParaRPr dirty="0"/>
           </a:p>
-          <a:p xmlns:a="http://schemas.openxmlformats.org/drawingml/2006/main">
-            <a:r>
-              <a:rPr b="0" dirty="0"/>
-              <a:t>No alt text provided</a:t>
-            </a:r>
-            <a:endParaRPr dirty="0"/>
-          </a:p>
-          <a:p xmlns:a="http://schemas.openxmlformats.org/drawingml/2006/main">
-            <a:r>
-              <a:rPr b="0" dirty="0"/>
-              <a:t/>
-            </a:r>
-            <a:endParaRPr dirty="0"/>
-          </a:p>
-          <a:p xmlns:a="http://schemas.openxmlformats.org/drawingml/2006/main">
+          <a:p>
+            <a:r>
+              <a:rPr b="0" dirty="0"/>
+              <a:t>No alt text provided</a:t>
+            </a:r>
+            <a:endParaRPr dirty="0"/>
+          </a:p>
+          <a:p>
+            <a:endParaRPr dirty="0"/>
+          </a:p>
+          <a:p>
             <a:r>
               <a:rPr b="1" dirty="0"/>
               <a:t>Sebaran Penjualan Provinsi</a:t>
             </a:r>
             <a:endParaRPr dirty="0"/>
           </a:p>
-          <a:p xmlns:a="http://schemas.openxmlformats.org/drawingml/2006/main">
-            <a:r>
-              <a:rPr b="0" dirty="0"/>
-              <a:t>No alt text provided</a:t>
-            </a:r>
-            <a:endParaRPr dirty="0"/>
-          </a:p>
-          <a:p xmlns:a="http://schemas.openxmlformats.org/drawingml/2006/main">
-            <a:r>
-              <a:rPr b="0" dirty="0"/>
-              <a:t/>
-            </a:r>
-            <a:endParaRPr dirty="0"/>
-          </a:p>
-          <a:p xmlns:a="http://schemas.openxmlformats.org/drawingml/2006/main">
+          <a:p>
+            <a:r>
+              <a:rPr b="0" dirty="0"/>
+              <a:t>No alt text provided</a:t>
+            </a:r>
+            <a:endParaRPr dirty="0"/>
+          </a:p>
+          <a:p>
+            <a:endParaRPr dirty="0"/>
+          </a:p>
+          <a:p>
             <a:r>
               <a:rPr b="1" dirty="0"/>
               <a:t>Layer</a:t>
             </a:r>
             <a:endParaRPr dirty="0"/>
           </a:p>
-          <a:p xmlns:a="http://schemas.openxmlformats.org/drawingml/2006/main">
-            <a:r>
-              <a:rPr b="0" dirty="0"/>
-              <a:t>No alt text provided</a:t>
-            </a:r>
-            <a:endParaRPr dirty="0"/>
-          </a:p>
-          <a:p xmlns:a="http://schemas.openxmlformats.org/drawingml/2006/main">
-            <a:r>
-              <a:rPr b="0" dirty="0"/>
-              <a:t/>
-            </a:r>
+          <a:p>
+            <a:r>
+              <a:rPr b="0" dirty="0"/>
+              <a:t>No alt text provided</a:t>
+            </a:r>
+            <a:endParaRPr dirty="0"/>
+          </a:p>
+          <a:p>
             <a:endParaRPr dirty="0"/>
           </a:p>
         </p:txBody>
       </p:sp>
     </p:spTree>
-    <p:clrMapOvr>
-      <a:masterClrMapping xmlns:a="http://schemas.openxmlformats.org/drawingml/2006/main"/>
-    </p:clrMapOvr>
   </p:cSld>
+  <p:clrMapOvr>
+    <a:masterClrMapping/>
+  </p:clrMapOvr>
 </p:notes>
 </file>
 
 <file path=ppt/notesSlides/notesSlide3.xml><?xml version="1.0" encoding="utf-8"?>
-<p:notes xmlns:p="http://schemas.openxmlformats.org/presentationml/2006/main">
+<p:notes xmlns:a="http://schemas.openxmlformats.org/drawingml/2006/main" xmlns:r="http://schemas.openxmlformats.org/officeDocument/2006/relationships" xmlns:p="http://schemas.openxmlformats.org/presentationml/2006/main">
   <p:cSld>
     <p:spTree>
       <p:nvGrpSpPr>
@@ -638,12 +920,19 @@
         <p:cNvGrpSpPr/>
         <p:nvPr/>
       </p:nvGrpSpPr>
-      <p:grpSpPr/>
+      <p:grpSpPr>
+        <a:xfrm>
+          <a:off x="0" y="0"/>
+          <a:ext cx="0" cy="0"/>
+          <a:chOff x="0" y="0"/>
+          <a:chExt cx="0" cy="0"/>
+        </a:xfrm>
+      </p:grpSpPr>
       <p:sp>
         <p:nvSpPr>
           <p:cNvPr id="2" name="Slide Text"/>
           <p:cNvSpPr>
-            <a:spLocks xmlns:a="http://schemas.openxmlformats.org/drawingml/2006/main" noGrp="1"/>
+            <a:spLocks noGrp="1"/>
           </p:cNvSpPr>
           <p:nvPr>
             <p:ph type="body" idx="1"/>
@@ -651,167 +940,139 @@
         </p:nvSpPr>
         <p:spPr/>
         <p:txBody>
-          <a:bodyPr xmlns:a="http://schemas.openxmlformats.org/drawingml/2006/main"/>
-          <a:lstStyle xmlns:a="http://schemas.openxmlformats.org/drawingml/2006/main"/>
-          <a:p xmlns:a="http://schemas.openxmlformats.org/drawingml/2006/main">
+          <a:bodyPr/>
+          <a:lstStyle/>
+          <a:p>
             <a:r>
               <a:rPr b="1" dirty="0"/>
               <a:t>Revenue per Provinsi</a:t>
             </a:r>
             <a:endParaRPr dirty="0"/>
           </a:p>
-          <a:p xmlns:a="http://schemas.openxmlformats.org/drawingml/2006/main">
-            <a:r>
-              <a:rPr b="0" dirty="0"/>
-              <a:t>No alt text provided</a:t>
-            </a:r>
-            <a:endParaRPr dirty="0"/>
-          </a:p>
-          <a:p xmlns:a="http://schemas.openxmlformats.org/drawingml/2006/main">
-            <a:r>
-              <a:rPr b="0" dirty="0"/>
-              <a:t/>
-            </a:r>
-            <a:endParaRPr dirty="0"/>
-          </a:p>
-          <a:p xmlns:a="http://schemas.openxmlformats.org/drawingml/2006/main">
+          <a:p>
+            <a:r>
+              <a:rPr b="0" dirty="0"/>
+              <a:t>No alt text provided</a:t>
+            </a:r>
+            <a:endParaRPr dirty="0"/>
+          </a:p>
+          <a:p>
+            <a:endParaRPr dirty="0"/>
+          </a:p>
+          <a:p>
             <a:r>
               <a:rPr b="1" dirty="0"/>
               <a:t>Dimensions slicer</a:t>
             </a:r>
             <a:endParaRPr dirty="0"/>
           </a:p>
-          <a:p xmlns:a="http://schemas.openxmlformats.org/drawingml/2006/main">
-            <a:r>
-              <a:rPr b="0" dirty="0"/>
-              <a:t>No alt text provided</a:t>
-            </a:r>
-            <a:endParaRPr dirty="0"/>
-          </a:p>
-          <a:p xmlns:a="http://schemas.openxmlformats.org/drawingml/2006/main">
-            <a:r>
-              <a:rPr b="0" dirty="0"/>
-              <a:t/>
-            </a:r>
-            <a:endParaRPr dirty="0"/>
-          </a:p>
-          <a:p xmlns:a="http://schemas.openxmlformats.org/drawingml/2006/main">
+          <a:p>
+            <a:r>
+              <a:rPr b="0" dirty="0"/>
+              <a:t>No alt text provided</a:t>
+            </a:r>
+            <a:endParaRPr dirty="0"/>
+          </a:p>
+          <a:p>
+            <a:endParaRPr dirty="0"/>
+          </a:p>
+          <a:p>
             <a:r>
               <a:rPr b="1" dirty="0"/>
               <a:t>year_slicer</a:t>
             </a:r>
             <a:endParaRPr dirty="0"/>
           </a:p>
-          <a:p xmlns:a="http://schemas.openxmlformats.org/drawingml/2006/main">
-            <a:r>
-              <a:rPr b="0" dirty="0"/>
-              <a:t>No alt text provided</a:t>
-            </a:r>
-            <a:endParaRPr dirty="0"/>
-          </a:p>
-          <a:p xmlns:a="http://schemas.openxmlformats.org/drawingml/2006/main">
-            <a:r>
-              <a:rPr b="0" dirty="0"/>
-              <a:t/>
-            </a:r>
-            <a:endParaRPr dirty="0"/>
-          </a:p>
-          <a:p xmlns:a="http://schemas.openxmlformats.org/drawingml/2006/main">
+          <a:p>
+            <a:r>
+              <a:rPr b="0" dirty="0"/>
+              <a:t>No alt text provided</a:t>
+            </a:r>
+            <a:endParaRPr dirty="0"/>
+          </a:p>
+          <a:p>
+            <a:endParaRPr dirty="0"/>
+          </a:p>
+          <a:p>
             <a:r>
               <a:rPr b="1" dirty="0"/>
               <a:t>pageNavigator</a:t>
             </a:r>
             <a:endParaRPr dirty="0"/>
           </a:p>
-          <a:p xmlns:a="http://schemas.openxmlformats.org/drawingml/2006/main">
-            <a:r>
-              <a:rPr b="0" dirty="0"/>
-              <a:t>No alt text provided</a:t>
-            </a:r>
-            <a:endParaRPr dirty="0"/>
-          </a:p>
-          <a:p xmlns:a="http://schemas.openxmlformats.org/drawingml/2006/main">
-            <a:r>
-              <a:rPr b="0" dirty="0"/>
-              <a:t/>
-            </a:r>
-            <a:endParaRPr dirty="0"/>
-          </a:p>
-          <a:p xmlns:a="http://schemas.openxmlformats.org/drawingml/2006/main">
+          <a:p>
+            <a:r>
+              <a:rPr b="0" dirty="0"/>
+              <a:t>No alt text provided</a:t>
+            </a:r>
+            <a:endParaRPr dirty="0"/>
+          </a:p>
+          <a:p>
+            <a:endParaRPr dirty="0"/>
+          </a:p>
+          <a:p>
             <a:r>
               <a:rPr b="1" dirty="0"/>
               <a:t>Revenue vs Margin</a:t>
             </a:r>
             <a:endParaRPr dirty="0"/>
           </a:p>
-          <a:p xmlns:a="http://schemas.openxmlformats.org/drawingml/2006/main">
-            <a:r>
-              <a:rPr b="0" dirty="0"/>
-              <a:t>No alt text provided</a:t>
-            </a:r>
-            <a:endParaRPr dirty="0"/>
-          </a:p>
-          <a:p xmlns:a="http://schemas.openxmlformats.org/drawingml/2006/main">
-            <a:r>
-              <a:rPr b="0" dirty="0"/>
-              <a:t/>
-            </a:r>
-            <a:endParaRPr dirty="0"/>
-          </a:p>
-          <a:p xmlns:a="http://schemas.openxmlformats.org/drawingml/2006/main">
+          <a:p>
+            <a:r>
+              <a:rPr b="0" dirty="0"/>
+              <a:t>No alt text provided</a:t>
+            </a:r>
+            <a:endParaRPr dirty="0"/>
+          </a:p>
+          <a:p>
+            <a:endParaRPr dirty="0"/>
+          </a:p>
+          <a:p>
             <a:r>
               <a:rPr b="1" dirty="0"/>
               <a:t>textbox</a:t>
             </a:r>
             <a:endParaRPr dirty="0"/>
           </a:p>
-          <a:p xmlns:a="http://schemas.openxmlformats.org/drawingml/2006/main">
-            <a:r>
-              <a:rPr b="0" dirty="0"/>
-              <a:t>No alt text provided</a:t>
-            </a:r>
-            <a:endParaRPr dirty="0"/>
-          </a:p>
-          <a:p xmlns:a="http://schemas.openxmlformats.org/drawingml/2006/main">
-            <a:r>
-              <a:rPr b="0" dirty="0"/>
-              <a:t/>
-            </a:r>
-            <a:endParaRPr dirty="0"/>
-          </a:p>
-          <a:p xmlns:a="http://schemas.openxmlformats.org/drawingml/2006/main">
+          <a:p>
+            <a:r>
+              <a:rPr b="0" dirty="0"/>
+              <a:t>No alt text provided</a:t>
+            </a:r>
+            <a:endParaRPr dirty="0"/>
+          </a:p>
+          <a:p>
+            <a:endParaRPr dirty="0"/>
+          </a:p>
+          <a:p>
             <a:r>
               <a:rPr b="1" dirty="0"/>
               <a:t>pivotTable</a:t>
             </a:r>
             <a:endParaRPr dirty="0"/>
           </a:p>
-          <a:p xmlns:a="http://schemas.openxmlformats.org/drawingml/2006/main">
-            <a:r>
-              <a:rPr b="0" dirty="0"/>
-              <a:t>No alt text provided</a:t>
-            </a:r>
-            <a:endParaRPr dirty="0"/>
-          </a:p>
-          <a:p xmlns:a="http://schemas.openxmlformats.org/drawingml/2006/main">
-            <a:r>
-              <a:rPr b="0" dirty="0"/>
-              <a:t/>
-            </a:r>
+          <a:p>
+            <a:r>
+              <a:rPr b="0" dirty="0"/>
+              <a:t>No alt text provided</a:t>
+            </a:r>
+            <a:endParaRPr dirty="0"/>
+          </a:p>
+          <a:p>
             <a:endParaRPr dirty="0"/>
           </a:p>
         </p:txBody>
       </p:sp>
     </p:spTree>
-    <p:clrMapOvr>
-      <a:masterClrMapping xmlns:a="http://schemas.openxmlformats.org/drawingml/2006/main"/>
-    </p:clrMapOvr>
   </p:cSld>
+  <p:clrMapOvr>
+    <a:masterClrMapping/>
+  </p:clrMapOvr>
 </p:notes>
 </file>
 
 <file path=ppt/notesSlides/notesSlide4.xml><?xml version="1.0" encoding="utf-8"?>
-<p:notes xmlns:p="http://schemas.openxmlformats.org/presentationml/2006/main">
+<p:notes xmlns:a="http://schemas.openxmlformats.org/drawingml/2006/main" xmlns:r="http://schemas.openxmlformats.org/officeDocument/2006/relationships" xmlns:p="http://schemas.openxmlformats.org/presentationml/2006/main">
   <p:cSld>
     <p:spTree>
       <p:nvGrpSpPr>
@@ -819,12 +1080,19 @@
         <p:cNvGrpSpPr/>
         <p:nvPr/>
       </p:nvGrpSpPr>
-      <p:grpSpPr/>
+      <p:grpSpPr>
+        <a:xfrm>
+          <a:off x="0" y="0"/>
+          <a:ext cx="0" cy="0"/>
+          <a:chOff x="0" y="0"/>
+          <a:chExt cx="0" cy="0"/>
+        </a:xfrm>
+      </p:grpSpPr>
       <p:sp>
         <p:nvSpPr>
           <p:cNvPr id="2" name="Slide Text"/>
           <p:cNvSpPr>
-            <a:spLocks xmlns:a="http://schemas.openxmlformats.org/drawingml/2006/main" noGrp="1"/>
+            <a:spLocks noGrp="1"/>
           </p:cNvSpPr>
           <p:nvPr>
             <p:ph type="body" idx="1"/>
@@ -832,251 +1100,207 @@
         </p:nvSpPr>
         <p:spPr/>
         <p:txBody>
-          <a:bodyPr xmlns:a="http://schemas.openxmlformats.org/drawingml/2006/main"/>
-          <a:lstStyle xmlns:a="http://schemas.openxmlformats.org/drawingml/2006/main"/>
-          <a:p xmlns:a="http://schemas.openxmlformats.org/drawingml/2006/main">
+          <a:bodyPr/>
+          <a:lstStyle/>
+          <a:p>
             <a:r>
               <a:rPr b="1" dirty="0"/>
               <a:t>cardVisual</a:t>
             </a:r>
             <a:endParaRPr dirty="0"/>
           </a:p>
-          <a:p xmlns:a="http://schemas.openxmlformats.org/drawingml/2006/main">
-            <a:r>
-              <a:rPr b="0" dirty="0"/>
-              <a:t>No alt text provided</a:t>
-            </a:r>
-            <a:endParaRPr dirty="0"/>
-          </a:p>
-          <a:p xmlns:a="http://schemas.openxmlformats.org/drawingml/2006/main">
-            <a:r>
-              <a:rPr b="0" dirty="0"/>
-              <a:t/>
-            </a:r>
-            <a:endParaRPr dirty="0"/>
-          </a:p>
-          <a:p xmlns:a="http://schemas.openxmlformats.org/drawingml/2006/main">
+          <a:p>
+            <a:r>
+              <a:rPr b="0" dirty="0"/>
+              <a:t>No alt text provided</a:t>
+            </a:r>
+            <a:endParaRPr dirty="0"/>
+          </a:p>
+          <a:p>
+            <a:endParaRPr dirty="0"/>
+          </a:p>
+          <a:p>
             <a:r>
               <a:rPr b="1" dirty="0"/>
               <a:t>year_slicer</a:t>
             </a:r>
             <a:endParaRPr dirty="0"/>
           </a:p>
-          <a:p xmlns:a="http://schemas.openxmlformats.org/drawingml/2006/main">
-            <a:r>
-              <a:rPr b="0" dirty="0"/>
-              <a:t>No alt text provided</a:t>
-            </a:r>
-            <a:endParaRPr dirty="0"/>
-          </a:p>
-          <a:p xmlns:a="http://schemas.openxmlformats.org/drawingml/2006/main">
-            <a:r>
-              <a:rPr b="0" dirty="0"/>
-              <a:t/>
-            </a:r>
-            <a:endParaRPr dirty="0"/>
-          </a:p>
-          <a:p xmlns:a="http://schemas.openxmlformats.org/drawingml/2006/main">
+          <a:p>
+            <a:r>
+              <a:rPr b="0" dirty="0"/>
+              <a:t>No alt text provided</a:t>
+            </a:r>
+            <a:endParaRPr dirty="0"/>
+          </a:p>
+          <a:p>
+            <a:endParaRPr dirty="0"/>
+          </a:p>
+          <a:p>
             <a:r>
               <a:rPr b="1" dirty="0"/>
               <a:t>textbox</a:t>
             </a:r>
             <a:endParaRPr dirty="0"/>
           </a:p>
-          <a:p xmlns:a="http://schemas.openxmlformats.org/drawingml/2006/main">
-            <a:r>
-              <a:rPr b="0" dirty="0"/>
-              <a:t>No alt text provided</a:t>
-            </a:r>
-            <a:endParaRPr dirty="0"/>
-          </a:p>
-          <a:p xmlns:a="http://schemas.openxmlformats.org/drawingml/2006/main">
-            <a:r>
-              <a:rPr b="0" dirty="0"/>
-              <a:t/>
-            </a:r>
-            <a:endParaRPr dirty="0"/>
-          </a:p>
-          <a:p xmlns:a="http://schemas.openxmlformats.org/drawingml/2006/main">
+          <a:p>
+            <a:r>
+              <a:rPr b="0" dirty="0"/>
+              <a:t>No alt text provided</a:t>
+            </a:r>
+            <a:endParaRPr dirty="0"/>
+          </a:p>
+          <a:p>
+            <a:endParaRPr dirty="0"/>
+          </a:p>
+          <a:p>
             <a:r>
               <a:rPr b="1" dirty="0"/>
               <a:t>Selisih Terhadap Target</a:t>
             </a:r>
             <a:endParaRPr dirty="0"/>
           </a:p>
-          <a:p xmlns:a="http://schemas.openxmlformats.org/drawingml/2006/main">
-            <a:r>
-              <a:rPr b="0" dirty="0"/>
-              <a:t>No alt text provided</a:t>
-            </a:r>
-            <a:endParaRPr dirty="0"/>
-          </a:p>
-          <a:p xmlns:a="http://schemas.openxmlformats.org/drawingml/2006/main">
-            <a:r>
-              <a:rPr b="0" dirty="0"/>
-              <a:t/>
-            </a:r>
-            <a:endParaRPr dirty="0"/>
-          </a:p>
-          <a:p xmlns:a="http://schemas.openxmlformats.org/drawingml/2006/main">
+          <a:p>
+            <a:r>
+              <a:rPr b="0" dirty="0"/>
+              <a:t>No alt text provided</a:t>
+            </a:r>
+            <a:endParaRPr dirty="0"/>
+          </a:p>
+          <a:p>
+            <a:endParaRPr dirty="0"/>
+          </a:p>
+          <a:p>
             <a:r>
               <a:rPr b="1" dirty="0"/>
               <a:t>cardVisual</a:t>
             </a:r>
             <a:endParaRPr dirty="0"/>
           </a:p>
-          <a:p xmlns:a="http://schemas.openxmlformats.org/drawingml/2006/main">
-            <a:r>
-              <a:rPr b="0" dirty="0"/>
-              <a:t>No alt text provided</a:t>
-            </a:r>
-            <a:endParaRPr dirty="0"/>
-          </a:p>
-          <a:p xmlns:a="http://schemas.openxmlformats.org/drawingml/2006/main">
-            <a:r>
-              <a:rPr b="0" dirty="0"/>
-              <a:t/>
-            </a:r>
-            <a:endParaRPr dirty="0"/>
-          </a:p>
-          <a:p xmlns:a="http://schemas.openxmlformats.org/drawingml/2006/main">
+          <a:p>
+            <a:r>
+              <a:rPr b="0" dirty="0"/>
+              <a:t>No alt text provided</a:t>
+            </a:r>
+            <a:endParaRPr dirty="0"/>
+          </a:p>
+          <a:p>
+            <a:endParaRPr dirty="0"/>
+          </a:p>
+          <a:p>
             <a:r>
               <a:rPr b="1" dirty="0"/>
               <a:t>Jembatan Revenue: Tahun Lalu ke Tahun Ini</a:t>
             </a:r>
             <a:endParaRPr dirty="0"/>
           </a:p>
-          <a:p xmlns:a="http://schemas.openxmlformats.org/drawingml/2006/main">
-            <a:r>
-              <a:rPr b="0" dirty="0"/>
-              <a:t>No alt text provided</a:t>
-            </a:r>
-            <a:endParaRPr dirty="0"/>
-          </a:p>
-          <a:p xmlns:a="http://schemas.openxmlformats.org/drawingml/2006/main">
-            <a:r>
-              <a:rPr b="0" dirty="0"/>
-              <a:t/>
-            </a:r>
-            <a:endParaRPr dirty="0"/>
-          </a:p>
-          <a:p xmlns:a="http://schemas.openxmlformats.org/drawingml/2006/main">
+          <a:p>
+            <a:r>
+              <a:rPr b="0" dirty="0"/>
+              <a:t>No alt text provided</a:t>
+            </a:r>
+            <a:endParaRPr dirty="0"/>
+          </a:p>
+          <a:p>
+            <a:endParaRPr dirty="0"/>
+          </a:p>
+          <a:p>
             <a:r>
               <a:rPr b="1" dirty="0"/>
               <a:t>cardVisual</a:t>
             </a:r>
             <a:endParaRPr dirty="0"/>
           </a:p>
-          <a:p xmlns:a="http://schemas.openxmlformats.org/drawingml/2006/main">
-            <a:r>
-              <a:rPr b="0" dirty="0"/>
-              <a:t>No alt text provided</a:t>
-            </a:r>
-            <a:endParaRPr dirty="0"/>
-          </a:p>
-          <a:p xmlns:a="http://schemas.openxmlformats.org/drawingml/2006/main">
-            <a:r>
-              <a:rPr b="0" dirty="0"/>
-              <a:t/>
-            </a:r>
-            <a:endParaRPr dirty="0"/>
-          </a:p>
-          <a:p xmlns:a="http://schemas.openxmlformats.org/drawingml/2006/main">
+          <a:p>
+            <a:r>
+              <a:rPr b="0" dirty="0"/>
+              <a:t>No alt text provided</a:t>
+            </a:r>
+            <a:endParaRPr dirty="0"/>
+          </a:p>
+          <a:p>
+            <a:endParaRPr dirty="0"/>
+          </a:p>
+          <a:p>
             <a:r>
               <a:rPr b="1" dirty="0"/>
               <a:t>cardVisual</a:t>
             </a:r>
             <a:endParaRPr dirty="0"/>
           </a:p>
-          <a:p xmlns:a="http://schemas.openxmlformats.org/drawingml/2006/main">
-            <a:r>
-              <a:rPr b="0" dirty="0"/>
-              <a:t>No alt text provided</a:t>
-            </a:r>
-            <a:endParaRPr dirty="0"/>
-          </a:p>
-          <a:p xmlns:a="http://schemas.openxmlformats.org/drawingml/2006/main">
-            <a:r>
-              <a:rPr b="0" dirty="0"/>
-              <a:t/>
-            </a:r>
-            <a:endParaRPr dirty="0"/>
-          </a:p>
-          <a:p xmlns:a="http://schemas.openxmlformats.org/drawingml/2006/main">
+          <a:p>
+            <a:r>
+              <a:rPr b="0" dirty="0"/>
+              <a:t>No alt text provided</a:t>
+            </a:r>
+            <a:endParaRPr dirty="0"/>
+          </a:p>
+          <a:p>
+            <a:endParaRPr dirty="0"/>
+          </a:p>
+          <a:p>
             <a:r>
               <a:rPr b="1" dirty="0"/>
               <a:t>Aktual vs Target per Material</a:t>
             </a:r>
             <a:endParaRPr dirty="0"/>
           </a:p>
-          <a:p xmlns:a="http://schemas.openxmlformats.org/drawingml/2006/main">
-            <a:r>
-              <a:rPr b="0" dirty="0"/>
-              <a:t>No alt text provided</a:t>
-            </a:r>
-            <a:endParaRPr dirty="0"/>
-          </a:p>
-          <a:p xmlns:a="http://schemas.openxmlformats.org/drawingml/2006/main">
-            <a:r>
-              <a:rPr b="0" dirty="0"/>
-              <a:t/>
-            </a:r>
-            <a:endParaRPr dirty="0"/>
-          </a:p>
-          <a:p xmlns:a="http://schemas.openxmlformats.org/drawingml/2006/main">
+          <a:p>
+            <a:r>
+              <a:rPr b="0" dirty="0"/>
+              <a:t>No alt text provided</a:t>
+            </a:r>
+            <a:endParaRPr dirty="0"/>
+          </a:p>
+          <a:p>
+            <a:endParaRPr dirty="0"/>
+          </a:p>
+          <a:p>
             <a:r>
               <a:rPr b="1" dirty="0"/>
               <a:t>pageNavigator</a:t>
             </a:r>
             <a:endParaRPr dirty="0"/>
           </a:p>
-          <a:p xmlns:a="http://schemas.openxmlformats.org/drawingml/2006/main">
-            <a:r>
-              <a:rPr b="0" dirty="0"/>
-              <a:t>No alt text provided</a:t>
-            </a:r>
-            <a:endParaRPr dirty="0"/>
-          </a:p>
-          <a:p xmlns:a="http://schemas.openxmlformats.org/drawingml/2006/main">
-            <a:r>
-              <a:rPr b="0" dirty="0"/>
-              <a:t/>
-            </a:r>
-            <a:endParaRPr dirty="0"/>
-          </a:p>
-          <a:p xmlns:a="http://schemas.openxmlformats.org/drawingml/2006/main">
+          <a:p>
+            <a:r>
+              <a:rPr b="0" dirty="0"/>
+              <a:t>No alt text provided</a:t>
+            </a:r>
+            <a:endParaRPr dirty="0"/>
+          </a:p>
+          <a:p>
+            <a:endParaRPr dirty="0"/>
+          </a:p>
+          <a:p>
             <a:r>
               <a:rPr b="1" dirty="0"/>
               <a:t>Penyebab Perubahan Revenue</a:t>
             </a:r>
             <a:endParaRPr dirty="0"/>
           </a:p>
-          <a:p xmlns:a="http://schemas.openxmlformats.org/drawingml/2006/main">
-            <a:r>
-              <a:rPr b="0" dirty="0"/>
-              <a:t>No alt text provided</a:t>
-            </a:r>
-            <a:endParaRPr dirty="0"/>
-          </a:p>
-          <a:p xmlns:a="http://schemas.openxmlformats.org/drawingml/2006/main">
-            <a:r>
-              <a:rPr b="0" dirty="0"/>
-              <a:t/>
-            </a:r>
+          <a:p>
+            <a:r>
+              <a:rPr b="0" dirty="0"/>
+              <a:t>No alt text provided</a:t>
+            </a:r>
+            <a:endParaRPr dirty="0"/>
+          </a:p>
+          <a:p>
             <a:endParaRPr dirty="0"/>
           </a:p>
         </p:txBody>
       </p:sp>
     </p:spTree>
-    <p:clrMapOvr>
-      <a:masterClrMapping xmlns:a="http://schemas.openxmlformats.org/drawingml/2006/main"/>
-    </p:clrMapOvr>
   </p:cSld>
+  <p:clrMapOvr>
+    <a:masterClrMapping/>
+  </p:clrMapOvr>
 </p:notes>
 </file>
 
 <file path=ppt/notesSlides/notesSlide5.xml><?xml version="1.0" encoding="utf-8"?>
-<p:notes xmlns:p="http://schemas.openxmlformats.org/presentationml/2006/main">
+<p:notes xmlns:a="http://schemas.openxmlformats.org/drawingml/2006/main" xmlns:r="http://schemas.openxmlformats.org/officeDocument/2006/relationships" xmlns:p="http://schemas.openxmlformats.org/presentationml/2006/main">
   <p:cSld>
     <p:spTree>
       <p:nvGrpSpPr>
@@ -1084,12 +1308,19 @@
         <p:cNvGrpSpPr/>
         <p:nvPr/>
       </p:nvGrpSpPr>
-      <p:grpSpPr/>
+      <p:grpSpPr>
+        <a:xfrm>
+          <a:off x="0" y="0"/>
+          <a:ext cx="0" cy="0"/>
+          <a:chOff x="0" y="0"/>
+          <a:chExt cx="0" cy="0"/>
+        </a:xfrm>
+      </p:grpSpPr>
       <p:sp>
         <p:nvSpPr>
           <p:cNvPr id="2" name="Slide Text"/>
           <p:cNvSpPr>
-            <a:spLocks xmlns:a="http://schemas.openxmlformats.org/drawingml/2006/main" noGrp="1"/>
+            <a:spLocks noGrp="1"/>
           </p:cNvSpPr>
           <p:nvPr>
             <p:ph type="body" idx="1"/>
@@ -1097,293 +1328,241 @@
         </p:nvSpPr>
         <p:spPr/>
         <p:txBody>
-          <a:bodyPr xmlns:a="http://schemas.openxmlformats.org/drawingml/2006/main"/>
-          <a:lstStyle xmlns:a="http://schemas.openxmlformats.org/drawingml/2006/main"/>
-          <a:p xmlns:a="http://schemas.openxmlformats.org/drawingml/2006/main">
+          <a:bodyPr/>
+          <a:lstStyle/>
+          <a:p>
             <a:r>
               <a:rPr b="1" dirty="0"/>
               <a:t>cardVisual</a:t>
             </a:r>
             <a:endParaRPr dirty="0"/>
           </a:p>
-          <a:p xmlns:a="http://schemas.openxmlformats.org/drawingml/2006/main">
-            <a:r>
-              <a:rPr b="0" dirty="0"/>
-              <a:t>No alt text provided</a:t>
-            </a:r>
-            <a:endParaRPr dirty="0"/>
-          </a:p>
-          <a:p xmlns:a="http://schemas.openxmlformats.org/drawingml/2006/main">
-            <a:r>
-              <a:rPr b="0" dirty="0"/>
-              <a:t/>
-            </a:r>
-            <a:endParaRPr dirty="0"/>
-          </a:p>
-          <a:p xmlns:a="http://schemas.openxmlformats.org/drawingml/2006/main">
+          <a:p>
+            <a:r>
+              <a:rPr b="0" dirty="0"/>
+              <a:t>No alt text provided</a:t>
+            </a:r>
+            <a:endParaRPr dirty="0"/>
+          </a:p>
+          <a:p>
+            <a:endParaRPr dirty="0"/>
+          </a:p>
+          <a:p>
             <a:r>
               <a:rPr b="1" dirty="0"/>
               <a:t>pageNavigator</a:t>
             </a:r>
             <a:endParaRPr dirty="0"/>
           </a:p>
-          <a:p xmlns:a="http://schemas.openxmlformats.org/drawingml/2006/main">
-            <a:r>
-              <a:rPr b="0" dirty="0"/>
-              <a:t>No alt text provided</a:t>
-            </a:r>
-            <a:endParaRPr dirty="0"/>
-          </a:p>
-          <a:p xmlns:a="http://schemas.openxmlformats.org/drawingml/2006/main">
-            <a:r>
-              <a:rPr b="0" dirty="0"/>
-              <a:t/>
-            </a:r>
-            <a:endParaRPr dirty="0"/>
-          </a:p>
-          <a:p xmlns:a="http://schemas.openxmlformats.org/drawingml/2006/main">
+          <a:p>
+            <a:r>
+              <a:rPr b="0" dirty="0"/>
+              <a:t>No alt text provided</a:t>
+            </a:r>
+            <a:endParaRPr dirty="0"/>
+          </a:p>
+          <a:p>
+            <a:endParaRPr dirty="0"/>
+          </a:p>
+          <a:p>
             <a:r>
               <a:rPr b="1" dirty="0"/>
               <a:t>cardVisual</a:t>
             </a:r>
             <a:endParaRPr dirty="0"/>
           </a:p>
-          <a:p xmlns:a="http://schemas.openxmlformats.org/drawingml/2006/main">
-            <a:r>
-              <a:rPr b="0" dirty="0"/>
-              <a:t>No alt text provided</a:t>
-            </a:r>
-            <a:endParaRPr dirty="0"/>
-          </a:p>
-          <a:p xmlns:a="http://schemas.openxmlformats.org/drawingml/2006/main">
-            <a:r>
-              <a:rPr b="0" dirty="0"/>
-              <a:t/>
-            </a:r>
-            <a:endParaRPr dirty="0"/>
-          </a:p>
-          <a:p xmlns:a="http://schemas.openxmlformats.org/drawingml/2006/main">
+          <a:p>
+            <a:r>
+              <a:rPr b="0" dirty="0"/>
+              <a:t>No alt text provided</a:t>
+            </a:r>
+            <a:endParaRPr dirty="0"/>
+          </a:p>
+          <a:p>
+            <a:endParaRPr dirty="0"/>
+          </a:p>
+          <a:p>
             <a:r>
               <a:rPr b="1" dirty="0"/>
               <a:t>Peta Customer: Recency vs Nilai Belanja</a:t>
             </a:r>
             <a:endParaRPr dirty="0"/>
           </a:p>
-          <a:p xmlns:a="http://schemas.openxmlformats.org/drawingml/2006/main">
-            <a:r>
-              <a:rPr b="0" dirty="0"/>
-              <a:t>No alt text provided</a:t>
-            </a:r>
-            <a:endParaRPr dirty="0"/>
-          </a:p>
-          <a:p xmlns:a="http://schemas.openxmlformats.org/drawingml/2006/main">
-            <a:r>
-              <a:rPr b="0" dirty="0"/>
-              <a:t/>
-            </a:r>
-            <a:endParaRPr dirty="0"/>
-          </a:p>
-          <a:p xmlns:a="http://schemas.openxmlformats.org/drawingml/2006/main">
+          <a:p>
+            <a:r>
+              <a:rPr b="0" dirty="0"/>
+              <a:t>No alt text provided</a:t>
+            </a:r>
+            <a:endParaRPr dirty="0"/>
+          </a:p>
+          <a:p>
+            <a:endParaRPr dirty="0"/>
+          </a:p>
+          <a:p>
             <a:r>
               <a:rPr b="1" dirty="0"/>
               <a:t>Tabel Ringkasan</a:t>
             </a:r>
             <a:endParaRPr dirty="0"/>
           </a:p>
-          <a:p xmlns:a="http://schemas.openxmlformats.org/drawingml/2006/main">
-            <a:r>
-              <a:rPr b="0" dirty="0"/>
-              <a:t>No alt text provided</a:t>
-            </a:r>
-            <a:endParaRPr dirty="0"/>
-          </a:p>
-          <a:p xmlns:a="http://schemas.openxmlformats.org/drawingml/2006/main">
-            <a:r>
-              <a:rPr b="0" dirty="0"/>
-              <a:t/>
-            </a:r>
-            <a:endParaRPr dirty="0"/>
-          </a:p>
-          <a:p xmlns:a="http://schemas.openxmlformats.org/drawingml/2006/main">
+          <a:p>
+            <a:r>
+              <a:rPr b="0" dirty="0"/>
+              <a:t>No alt text provided</a:t>
+            </a:r>
+            <a:endParaRPr dirty="0"/>
+          </a:p>
+          <a:p>
+            <a:endParaRPr dirty="0"/>
+          </a:p>
+          <a:p>
             <a:r>
               <a:rPr b="1" dirty="0"/>
               <a:t>year_slicer</a:t>
             </a:r>
             <a:endParaRPr dirty="0"/>
           </a:p>
-          <a:p xmlns:a="http://schemas.openxmlformats.org/drawingml/2006/main">
-            <a:r>
-              <a:rPr b="0" dirty="0"/>
-              <a:t>No alt text provided</a:t>
-            </a:r>
-            <a:endParaRPr dirty="0"/>
-          </a:p>
-          <a:p xmlns:a="http://schemas.openxmlformats.org/drawingml/2006/main">
-            <a:r>
-              <a:rPr b="0" dirty="0"/>
-              <a:t/>
-            </a:r>
-            <a:endParaRPr dirty="0"/>
-          </a:p>
-          <a:p xmlns:a="http://schemas.openxmlformats.org/drawingml/2006/main">
+          <a:p>
+            <a:r>
+              <a:rPr b="0" dirty="0"/>
+              <a:t>No alt text provided</a:t>
+            </a:r>
+            <a:endParaRPr dirty="0"/>
+          </a:p>
+          <a:p>
+            <a:endParaRPr dirty="0"/>
+          </a:p>
+          <a:p>
             <a:r>
               <a:rPr b="1" dirty="0"/>
               <a:t>Jumlah Customer per Segmen</a:t>
             </a:r>
             <a:endParaRPr dirty="0"/>
           </a:p>
-          <a:p xmlns:a="http://schemas.openxmlformats.org/drawingml/2006/main">
-            <a:r>
-              <a:rPr b="0" dirty="0"/>
-              <a:t>No alt text provided</a:t>
-            </a:r>
-            <a:endParaRPr dirty="0"/>
-          </a:p>
-          <a:p xmlns:a="http://schemas.openxmlformats.org/drawingml/2006/main">
-            <a:r>
-              <a:rPr b="0" dirty="0"/>
-              <a:t/>
-            </a:r>
-            <a:endParaRPr dirty="0"/>
-          </a:p>
-          <a:p xmlns:a="http://schemas.openxmlformats.org/drawingml/2006/main">
+          <a:p>
+            <a:r>
+              <a:rPr b="0" dirty="0"/>
+              <a:t>No alt text provided</a:t>
+            </a:r>
+            <a:endParaRPr dirty="0"/>
+          </a:p>
+          <a:p>
+            <a:endParaRPr dirty="0"/>
+          </a:p>
+          <a:p>
             <a:r>
               <a:rPr b="1" dirty="0"/>
               <a:t>textbox</a:t>
             </a:r>
             <a:endParaRPr dirty="0"/>
           </a:p>
-          <a:p xmlns:a="http://schemas.openxmlformats.org/drawingml/2006/main">
-            <a:r>
-              <a:rPr b="0" dirty="0"/>
-              <a:t>No alt text provided</a:t>
-            </a:r>
-            <a:endParaRPr dirty="0"/>
-          </a:p>
-          <a:p xmlns:a="http://schemas.openxmlformats.org/drawingml/2006/main">
-            <a:r>
-              <a:rPr b="0" dirty="0"/>
-              <a:t/>
-            </a:r>
-            <a:endParaRPr dirty="0"/>
-          </a:p>
-          <a:p xmlns:a="http://schemas.openxmlformats.org/drawingml/2006/main">
+          <a:p>
+            <a:r>
+              <a:rPr b="0" dirty="0"/>
+              <a:t>No alt text provided</a:t>
+            </a:r>
+            <a:endParaRPr dirty="0"/>
+          </a:p>
+          <a:p>
+            <a:endParaRPr dirty="0"/>
+          </a:p>
+          <a:p>
             <a:r>
               <a:rPr b="1" dirty="0"/>
               <a:t>cardVisual</a:t>
             </a:r>
             <a:endParaRPr dirty="0"/>
           </a:p>
-          <a:p xmlns:a="http://schemas.openxmlformats.org/drawingml/2006/main">
-            <a:r>
-              <a:rPr b="0" dirty="0"/>
-              <a:t>No alt text provided</a:t>
-            </a:r>
-            <a:endParaRPr dirty="0"/>
-          </a:p>
-          <a:p xmlns:a="http://schemas.openxmlformats.org/drawingml/2006/main">
-            <a:r>
-              <a:rPr b="0" dirty="0"/>
-              <a:t/>
-            </a:r>
-            <a:endParaRPr dirty="0"/>
-          </a:p>
-          <a:p xmlns:a="http://schemas.openxmlformats.org/drawingml/2006/main">
+          <a:p>
+            <a:r>
+              <a:rPr b="0" dirty="0"/>
+              <a:t>No alt text provided</a:t>
+            </a:r>
+            <a:endParaRPr dirty="0"/>
+          </a:p>
+          <a:p>
+            <a:endParaRPr dirty="0"/>
+          </a:p>
+          <a:p>
             <a:r>
               <a:rPr b="1" dirty="0"/>
               <a:t>advancedSlicerVisual</a:t>
             </a:r>
             <a:endParaRPr dirty="0"/>
           </a:p>
-          <a:p xmlns:a="http://schemas.openxmlformats.org/drawingml/2006/main">
-            <a:r>
-              <a:rPr b="0" dirty="0"/>
-              <a:t>No alt text provided</a:t>
-            </a:r>
-            <a:endParaRPr dirty="0"/>
-          </a:p>
-          <a:p xmlns:a="http://schemas.openxmlformats.org/drawingml/2006/main">
-            <a:r>
-              <a:rPr b="0" dirty="0"/>
-              <a:t/>
-            </a:r>
-            <a:endParaRPr dirty="0"/>
-          </a:p>
-          <a:p xmlns:a="http://schemas.openxmlformats.org/drawingml/2006/main">
+          <a:p>
+            <a:r>
+              <a:rPr b="0" dirty="0"/>
+              <a:t>No alt text provided</a:t>
+            </a:r>
+            <a:endParaRPr dirty="0"/>
+          </a:p>
+          <a:p>
+            <a:endParaRPr dirty="0"/>
+          </a:p>
+          <a:p>
             <a:r>
               <a:rPr b="1" dirty="0"/>
               <a:t>20 Costumer Beresiko Dengan Nilai Tertinggi</a:t>
             </a:r>
             <a:endParaRPr dirty="0"/>
           </a:p>
-          <a:p xmlns:a="http://schemas.openxmlformats.org/drawingml/2006/main">
-            <a:r>
-              <a:rPr b="0" dirty="0"/>
-              <a:t>No alt text provided</a:t>
-            </a:r>
-            <a:endParaRPr dirty="0"/>
-          </a:p>
-          <a:p xmlns:a="http://schemas.openxmlformats.org/drawingml/2006/main">
-            <a:r>
-              <a:rPr b="0" dirty="0"/>
-              <a:t/>
-            </a:r>
-            <a:endParaRPr dirty="0"/>
-          </a:p>
-          <a:p xmlns:a="http://schemas.openxmlformats.org/drawingml/2006/main">
+          <a:p>
+            <a:r>
+              <a:rPr b="0" dirty="0"/>
+              <a:t>No alt text provided</a:t>
+            </a:r>
+            <a:endParaRPr dirty="0"/>
+          </a:p>
+          <a:p>
+            <a:endParaRPr dirty="0"/>
+          </a:p>
+          <a:p>
             <a:r>
               <a:rPr b="1" dirty="0"/>
               <a:t>Revenue per Segmen</a:t>
             </a:r>
             <a:endParaRPr dirty="0"/>
           </a:p>
-          <a:p xmlns:a="http://schemas.openxmlformats.org/drawingml/2006/main">
-            <a:r>
-              <a:rPr b="0" dirty="0"/>
-              <a:t>No alt text provided</a:t>
-            </a:r>
-            <a:endParaRPr dirty="0"/>
-          </a:p>
-          <a:p xmlns:a="http://schemas.openxmlformats.org/drawingml/2006/main">
-            <a:r>
-              <a:rPr b="0" dirty="0"/>
-              <a:t/>
-            </a:r>
-            <a:endParaRPr dirty="0"/>
-          </a:p>
-          <a:p xmlns:a="http://schemas.openxmlformats.org/drawingml/2006/main">
+          <a:p>
+            <a:r>
+              <a:rPr b="0" dirty="0"/>
+              <a:t>No alt text provided</a:t>
+            </a:r>
+            <a:endParaRPr dirty="0"/>
+          </a:p>
+          <a:p>
+            <a:endParaRPr dirty="0"/>
+          </a:p>
+          <a:p>
             <a:r>
               <a:rPr b="1" dirty="0"/>
               <a:t>cardVisual</a:t>
             </a:r>
             <a:endParaRPr dirty="0"/>
           </a:p>
-          <a:p xmlns:a="http://schemas.openxmlformats.org/drawingml/2006/main">
-            <a:r>
-              <a:rPr b="0" dirty="0"/>
-              <a:t>No alt text provided</a:t>
-            </a:r>
-            <a:endParaRPr dirty="0"/>
-          </a:p>
-          <a:p xmlns:a="http://schemas.openxmlformats.org/drawingml/2006/main">
-            <a:r>
-              <a:rPr b="0" dirty="0"/>
-              <a:t/>
-            </a:r>
+          <a:p>
+            <a:r>
+              <a:rPr b="0" dirty="0"/>
+              <a:t>No alt text provided</a:t>
+            </a:r>
+            <a:endParaRPr dirty="0"/>
+          </a:p>
+          <a:p>
             <a:endParaRPr dirty="0"/>
           </a:p>
         </p:txBody>
       </p:sp>
     </p:spTree>
-    <p:clrMapOvr>
-      <a:masterClrMapping xmlns:a="http://schemas.openxmlformats.org/drawingml/2006/main"/>
-    </p:clrMapOvr>
   </p:cSld>
+  <p:clrMapOvr>
+    <a:masterClrMapping/>
+  </p:clrMapOvr>
 </p:notes>
 </file>
 
 <file path=ppt/notesSlides/notesSlide6.xml><?xml version="1.0" encoding="utf-8"?>
-<p:notes xmlns:p="http://schemas.openxmlformats.org/presentationml/2006/main">
+<p:notes xmlns:a="http://schemas.openxmlformats.org/drawingml/2006/main" xmlns:r="http://schemas.openxmlformats.org/officeDocument/2006/relationships" xmlns:p="http://schemas.openxmlformats.org/presentationml/2006/main">
   <p:cSld>
     <p:spTree>
       <p:nvGrpSpPr>
@@ -1391,12 +1570,19 @@
         <p:cNvGrpSpPr/>
         <p:nvPr/>
       </p:nvGrpSpPr>
-      <p:grpSpPr/>
+      <p:grpSpPr>
+        <a:xfrm>
+          <a:off x="0" y="0"/>
+          <a:ext cx="0" cy="0"/>
+          <a:chOff x="0" y="0"/>
+          <a:chExt cx="0" cy="0"/>
+        </a:xfrm>
+      </p:grpSpPr>
       <p:sp>
         <p:nvSpPr>
           <p:cNvPr id="2" name="Slide Text"/>
           <p:cNvSpPr>
-            <a:spLocks xmlns:a="http://schemas.openxmlformats.org/drawingml/2006/main" noGrp="1"/>
+            <a:spLocks noGrp="1"/>
           </p:cNvSpPr>
           <p:nvPr>
             <p:ph type="body" idx="1"/>
@@ -1404,272 +1590,224 @@
         </p:nvSpPr>
         <p:spPr/>
         <p:txBody>
-          <a:bodyPr xmlns:a="http://schemas.openxmlformats.org/drawingml/2006/main"/>
-          <a:lstStyle xmlns:a="http://schemas.openxmlformats.org/drawingml/2006/main"/>
-          <a:p xmlns:a="http://schemas.openxmlformats.org/drawingml/2006/main">
+          <a:bodyPr/>
+          <a:lstStyle/>
+          <a:p>
             <a:r>
               <a:rPr b="1" dirty="0"/>
               <a:t>pageNavigator</a:t>
             </a:r>
             <a:endParaRPr dirty="0"/>
           </a:p>
-          <a:p xmlns:a="http://schemas.openxmlformats.org/drawingml/2006/main">
-            <a:r>
-              <a:rPr b="0" dirty="0"/>
-              <a:t>No alt text provided</a:t>
-            </a:r>
-            <a:endParaRPr dirty="0"/>
-          </a:p>
-          <a:p xmlns:a="http://schemas.openxmlformats.org/drawingml/2006/main">
-            <a:r>
-              <a:rPr b="0" dirty="0"/>
-              <a:t/>
-            </a:r>
-            <a:endParaRPr dirty="0"/>
-          </a:p>
-          <a:p xmlns:a="http://schemas.openxmlformats.org/drawingml/2006/main">
+          <a:p>
+            <a:r>
+              <a:rPr b="0" dirty="0"/>
+              <a:t>No alt text provided</a:t>
+            </a:r>
+            <a:endParaRPr dirty="0"/>
+          </a:p>
+          <a:p>
+            <a:endParaRPr dirty="0"/>
+          </a:p>
+          <a:p>
             <a:r>
               <a:rPr b="1" dirty="0"/>
               <a:t>Retensi Customer per Cohort</a:t>
             </a:r>
             <a:endParaRPr dirty="0"/>
           </a:p>
-          <a:p xmlns:a="http://schemas.openxmlformats.org/drawingml/2006/main">
-            <a:r>
-              <a:rPr b="0" dirty="0"/>
-              <a:t>No alt text provided</a:t>
-            </a:r>
-            <a:endParaRPr dirty="0"/>
-          </a:p>
-          <a:p xmlns:a="http://schemas.openxmlformats.org/drawingml/2006/main">
-            <a:r>
-              <a:rPr b="0" dirty="0"/>
-              <a:t/>
-            </a:r>
-            <a:endParaRPr dirty="0"/>
-          </a:p>
-          <a:p xmlns:a="http://schemas.openxmlformats.org/drawingml/2006/main">
+          <a:p>
+            <a:r>
+              <a:rPr b="0" dirty="0"/>
+              <a:t>No alt text provided</a:t>
+            </a:r>
+            <a:endParaRPr dirty="0"/>
+          </a:p>
+          <a:p>
+            <a:endParaRPr dirty="0"/>
+          </a:p>
+          <a:p>
             <a:r>
               <a:rPr b="1" dirty="0"/>
               <a:t>cardVisual</a:t>
             </a:r>
             <a:endParaRPr dirty="0"/>
           </a:p>
-          <a:p xmlns:a="http://schemas.openxmlformats.org/drawingml/2006/main">
-            <a:r>
-              <a:rPr b="0" dirty="0"/>
-              <a:t>No alt text provided</a:t>
-            </a:r>
-            <a:endParaRPr dirty="0"/>
-          </a:p>
-          <a:p xmlns:a="http://schemas.openxmlformats.org/drawingml/2006/main">
-            <a:r>
-              <a:rPr b="0" dirty="0"/>
-              <a:t/>
-            </a:r>
-            <a:endParaRPr dirty="0"/>
-          </a:p>
-          <a:p xmlns:a="http://schemas.openxmlformats.org/drawingml/2006/main">
+          <a:p>
+            <a:r>
+              <a:rPr b="0" dirty="0"/>
+              <a:t>No alt text provided</a:t>
+            </a:r>
+            <a:endParaRPr dirty="0"/>
+          </a:p>
+          <a:p>
+            <a:endParaRPr dirty="0"/>
+          </a:p>
+          <a:p>
             <a:r>
               <a:rPr b="1" dirty="0"/>
               <a:t>textbox</a:t>
             </a:r>
             <a:endParaRPr dirty="0"/>
           </a:p>
-          <a:p xmlns:a="http://schemas.openxmlformats.org/drawingml/2006/main">
-            <a:r>
-              <a:rPr b="0" dirty="0"/>
-              <a:t>No alt text provided</a:t>
-            </a:r>
-            <a:endParaRPr dirty="0"/>
-          </a:p>
-          <a:p xmlns:a="http://schemas.openxmlformats.org/drawingml/2006/main">
-            <a:r>
-              <a:rPr b="0" dirty="0"/>
-              <a:t/>
-            </a:r>
-            <a:endParaRPr dirty="0"/>
-          </a:p>
-          <a:p xmlns:a="http://schemas.openxmlformats.org/drawingml/2006/main">
+          <a:p>
+            <a:r>
+              <a:rPr b="0" dirty="0"/>
+              <a:t>No alt text provided</a:t>
+            </a:r>
+            <a:endParaRPr dirty="0"/>
+          </a:p>
+          <a:p>
+            <a:endParaRPr dirty="0"/>
+          </a:p>
+          <a:p>
             <a:r>
               <a:rPr b="1" dirty="0"/>
               <a:t>Ringkasan cohort</a:t>
             </a:r>
             <a:endParaRPr dirty="0"/>
           </a:p>
-          <a:p xmlns:a="http://schemas.openxmlformats.org/drawingml/2006/main">
-            <a:r>
-              <a:rPr b="0" dirty="0"/>
-              <a:t>No alt text provided</a:t>
-            </a:r>
-            <a:endParaRPr dirty="0"/>
-          </a:p>
-          <a:p xmlns:a="http://schemas.openxmlformats.org/drawingml/2006/main">
-            <a:r>
-              <a:rPr b="0" dirty="0"/>
-              <a:t/>
-            </a:r>
-            <a:endParaRPr dirty="0"/>
-          </a:p>
-          <a:p xmlns:a="http://schemas.openxmlformats.org/drawingml/2006/main">
+          <a:p>
+            <a:r>
+              <a:rPr b="0" dirty="0"/>
+              <a:t>No alt text provided</a:t>
+            </a:r>
+            <a:endParaRPr dirty="0"/>
+          </a:p>
+          <a:p>
+            <a:endParaRPr dirty="0"/>
+          </a:p>
+          <a:p>
             <a:r>
               <a:rPr b="1" dirty="0"/>
               <a:t>Customer Baru per Tahun</a:t>
             </a:r>
             <a:endParaRPr dirty="0"/>
           </a:p>
-          <a:p xmlns:a="http://schemas.openxmlformats.org/drawingml/2006/main">
-            <a:r>
-              <a:rPr b="0" dirty="0"/>
-              <a:t>No alt text provided</a:t>
-            </a:r>
-            <a:endParaRPr dirty="0"/>
-          </a:p>
-          <a:p xmlns:a="http://schemas.openxmlformats.org/drawingml/2006/main">
-            <a:r>
-              <a:rPr b="0" dirty="0"/>
-              <a:t/>
-            </a:r>
-            <a:endParaRPr dirty="0"/>
-          </a:p>
-          <a:p xmlns:a="http://schemas.openxmlformats.org/drawingml/2006/main">
+          <a:p>
+            <a:r>
+              <a:rPr b="0" dirty="0"/>
+              <a:t>No alt text provided</a:t>
+            </a:r>
+            <a:endParaRPr dirty="0"/>
+          </a:p>
+          <a:p>
+            <a:endParaRPr dirty="0"/>
+          </a:p>
+          <a:p>
             <a:r>
               <a:rPr b="1" dirty="0"/>
               <a:t>cardVisual</a:t>
             </a:r>
             <a:endParaRPr dirty="0"/>
           </a:p>
-          <a:p xmlns:a="http://schemas.openxmlformats.org/drawingml/2006/main">
-            <a:r>
-              <a:rPr b="0" dirty="0"/>
-              <a:t>No alt text provided</a:t>
-            </a:r>
-            <a:endParaRPr dirty="0"/>
-          </a:p>
-          <a:p xmlns:a="http://schemas.openxmlformats.org/drawingml/2006/main">
-            <a:r>
-              <a:rPr b="0" dirty="0"/>
-              <a:t/>
-            </a:r>
-            <a:endParaRPr dirty="0"/>
-          </a:p>
-          <a:p xmlns:a="http://schemas.openxmlformats.org/drawingml/2006/main">
+          <a:p>
+            <a:r>
+              <a:rPr b="0" dirty="0"/>
+              <a:t>No alt text provided</a:t>
+            </a:r>
+            <a:endParaRPr dirty="0"/>
+          </a:p>
+          <a:p>
+            <a:endParaRPr dirty="0"/>
+          </a:p>
+          <a:p>
             <a:r>
               <a:rPr b="1" dirty="0"/>
               <a:t>Kurva Retensi per Cohort</a:t>
             </a:r>
             <a:endParaRPr dirty="0"/>
           </a:p>
-          <a:p xmlns:a="http://schemas.openxmlformats.org/drawingml/2006/main">
-            <a:r>
-              <a:rPr b="0" dirty="0"/>
-              <a:t>No alt text provided</a:t>
-            </a:r>
-            <a:endParaRPr dirty="0"/>
-          </a:p>
-          <a:p xmlns:a="http://schemas.openxmlformats.org/drawingml/2006/main">
-            <a:r>
-              <a:rPr b="0" dirty="0"/>
-              <a:t/>
-            </a:r>
-            <a:endParaRPr dirty="0"/>
-          </a:p>
-          <a:p xmlns:a="http://schemas.openxmlformats.org/drawingml/2006/main">
+          <a:p>
+            <a:r>
+              <a:rPr b="0" dirty="0"/>
+              <a:t>No alt text provided</a:t>
+            </a:r>
+            <a:endParaRPr dirty="0"/>
+          </a:p>
+          <a:p>
+            <a:endParaRPr dirty="0"/>
+          </a:p>
+          <a:p>
             <a:r>
               <a:rPr b="1" dirty="0"/>
               <a:t>textbox</a:t>
             </a:r>
             <a:endParaRPr dirty="0"/>
           </a:p>
-          <a:p xmlns:a="http://schemas.openxmlformats.org/drawingml/2006/main">
-            <a:r>
-              <a:rPr b="0" dirty="0"/>
-              <a:t>No alt text provided</a:t>
-            </a:r>
-            <a:endParaRPr dirty="0"/>
-          </a:p>
-          <a:p xmlns:a="http://schemas.openxmlformats.org/drawingml/2006/main">
-            <a:r>
-              <a:rPr b="0" dirty="0"/>
-              <a:t/>
-            </a:r>
-            <a:endParaRPr dirty="0"/>
-          </a:p>
-          <a:p xmlns:a="http://schemas.openxmlformats.org/drawingml/2006/main">
+          <a:p>
+            <a:r>
+              <a:rPr b="0" dirty="0"/>
+              <a:t>No alt text provided</a:t>
+            </a:r>
+            <a:endParaRPr dirty="0"/>
+          </a:p>
+          <a:p>
+            <a:endParaRPr dirty="0"/>
+          </a:p>
+          <a:p>
             <a:r>
               <a:rPr b="1" dirty="0"/>
               <a:t>cardVisual</a:t>
             </a:r>
             <a:endParaRPr dirty="0"/>
           </a:p>
-          <a:p xmlns:a="http://schemas.openxmlformats.org/drawingml/2006/main">
-            <a:r>
-              <a:rPr b="0" dirty="0"/>
-              <a:t>No alt text provided</a:t>
-            </a:r>
-            <a:endParaRPr dirty="0"/>
-          </a:p>
-          <a:p xmlns:a="http://schemas.openxmlformats.org/drawingml/2006/main">
-            <a:r>
-              <a:rPr b="0" dirty="0"/>
-              <a:t/>
-            </a:r>
-            <a:endParaRPr dirty="0"/>
-          </a:p>
-          <a:p xmlns:a="http://schemas.openxmlformats.org/drawingml/2006/main">
+          <a:p>
+            <a:r>
+              <a:rPr b="0" dirty="0"/>
+              <a:t>No alt text provided</a:t>
+            </a:r>
+            <a:endParaRPr dirty="0"/>
+          </a:p>
+          <a:p>
+            <a:endParaRPr dirty="0"/>
+          </a:p>
+          <a:p>
             <a:r>
               <a:rPr b="1" dirty="0"/>
               <a:t>cardVisual</a:t>
             </a:r>
             <a:endParaRPr dirty="0"/>
           </a:p>
-          <a:p xmlns:a="http://schemas.openxmlformats.org/drawingml/2006/main">
-            <a:r>
-              <a:rPr b="0" dirty="0"/>
-              <a:t>No alt text provided</a:t>
-            </a:r>
-            <a:endParaRPr dirty="0"/>
-          </a:p>
-          <a:p xmlns:a="http://schemas.openxmlformats.org/drawingml/2006/main">
-            <a:r>
-              <a:rPr b="0" dirty="0"/>
-              <a:t/>
-            </a:r>
-            <a:endParaRPr dirty="0"/>
-          </a:p>
-          <a:p xmlns:a="http://schemas.openxmlformats.org/drawingml/2006/main">
+          <a:p>
+            <a:r>
+              <a:rPr b="0" dirty="0"/>
+              <a:t>No alt text provided</a:t>
+            </a:r>
+            <a:endParaRPr dirty="0"/>
+          </a:p>
+          <a:p>
+            <a:endParaRPr dirty="0"/>
+          </a:p>
+          <a:p>
             <a:r>
               <a:rPr b="1" dirty="0"/>
               <a:t>Revenue per Cohort per Tahun</a:t>
             </a:r>
             <a:endParaRPr dirty="0"/>
           </a:p>
-          <a:p xmlns:a="http://schemas.openxmlformats.org/drawingml/2006/main">
-            <a:r>
-              <a:rPr b="0" dirty="0"/>
-              <a:t>No alt text provided</a:t>
-            </a:r>
-            <a:endParaRPr dirty="0"/>
-          </a:p>
-          <a:p xmlns:a="http://schemas.openxmlformats.org/drawingml/2006/main">
-            <a:r>
-              <a:rPr b="0" dirty="0"/>
-              <a:t/>
-            </a:r>
+          <a:p>
+            <a:r>
+              <a:rPr b="0" dirty="0"/>
+              <a:t>No alt text provided</a:t>
+            </a:r>
+            <a:endParaRPr dirty="0"/>
+          </a:p>
+          <a:p>
             <a:endParaRPr dirty="0"/>
           </a:p>
         </p:txBody>
       </p:sp>
     </p:spTree>
-    <p:clrMapOvr>
-      <a:masterClrMapping xmlns:a="http://schemas.openxmlformats.org/drawingml/2006/main"/>
-    </p:clrMapOvr>
   </p:cSld>
+  <p:clrMapOvr>
+    <a:masterClrMapping/>
+  </p:clrMapOvr>
 </p:notes>
 </file>
 
 <file path=ppt/notesSlides/notesSlide7.xml><?xml version="1.0" encoding="utf-8"?>
-<p:notes xmlns:p="http://schemas.openxmlformats.org/presentationml/2006/main">
+<p:notes xmlns:a="http://schemas.openxmlformats.org/drawingml/2006/main" xmlns:r="http://schemas.openxmlformats.org/officeDocument/2006/relationships" xmlns:p="http://schemas.openxmlformats.org/presentationml/2006/main">
   <p:cSld>
     <p:spTree>
       <p:nvGrpSpPr>
@@ -1677,12 +1815,19 @@
         <p:cNvGrpSpPr/>
         <p:nvPr/>
       </p:nvGrpSpPr>
-      <p:grpSpPr/>
+      <p:grpSpPr>
+        <a:xfrm>
+          <a:off x="0" y="0"/>
+          <a:ext cx="0" cy="0"/>
+          <a:chOff x="0" y="0"/>
+          <a:chExt cx="0" cy="0"/>
+        </a:xfrm>
+      </p:grpSpPr>
       <p:sp>
         <p:nvSpPr>
           <p:cNvPr id="2" name="Slide Text"/>
           <p:cNvSpPr>
-            <a:spLocks xmlns:a="http://schemas.openxmlformats.org/drawingml/2006/main" noGrp="1"/>
+            <a:spLocks noGrp="1"/>
           </p:cNvSpPr>
           <p:nvPr>
             <p:ph type="body" idx="1"/>
@@ -1690,251 +1835,207 @@
         </p:nvSpPr>
         <p:spPr/>
         <p:txBody>
-          <a:bodyPr xmlns:a="http://schemas.openxmlformats.org/drawingml/2006/main"/>
-          <a:lstStyle xmlns:a="http://schemas.openxmlformats.org/drawingml/2006/main"/>
-          <a:p xmlns:a="http://schemas.openxmlformats.org/drawingml/2006/main">
+          <a:bodyPr/>
+          <a:lstStyle/>
+          <a:p>
             <a:r>
               <a:rPr b="1" dirty="0"/>
               <a:t>Proyeksi 2020 vs Target</a:t>
             </a:r>
             <a:endParaRPr dirty="0"/>
           </a:p>
-          <a:p xmlns:a="http://schemas.openxmlformats.org/drawingml/2006/main">
-            <a:r>
-              <a:rPr b="0" dirty="0"/>
-              <a:t>No alt text provided</a:t>
-            </a:r>
-            <a:endParaRPr dirty="0"/>
-          </a:p>
-          <a:p xmlns:a="http://schemas.openxmlformats.org/drawingml/2006/main">
-            <a:r>
-              <a:rPr b="0" dirty="0"/>
-              <a:t/>
-            </a:r>
-            <a:endParaRPr dirty="0"/>
-          </a:p>
-          <a:p xmlns:a="http://schemas.openxmlformats.org/drawingml/2006/main">
+          <a:p>
+            <a:r>
+              <a:rPr b="0" dirty="0"/>
+              <a:t>No alt text provided</a:t>
+            </a:r>
+            <a:endParaRPr dirty="0"/>
+          </a:p>
+          <a:p>
+            <a:endParaRPr dirty="0"/>
+          </a:p>
+          <a:p>
             <a:r>
               <a:rPr b="1" dirty="0"/>
               <a:t>textbox</a:t>
             </a:r>
             <a:endParaRPr dirty="0"/>
           </a:p>
-          <a:p xmlns:a="http://schemas.openxmlformats.org/drawingml/2006/main">
-            <a:r>
-              <a:rPr b="0" dirty="0"/>
-              <a:t>No alt text provided</a:t>
-            </a:r>
-            <a:endParaRPr dirty="0"/>
-          </a:p>
-          <a:p xmlns:a="http://schemas.openxmlformats.org/drawingml/2006/main">
-            <a:r>
-              <a:rPr b="0" dirty="0"/>
-              <a:t/>
-            </a:r>
-            <a:endParaRPr dirty="0"/>
-          </a:p>
-          <a:p xmlns:a="http://schemas.openxmlformats.org/drawingml/2006/main">
+          <a:p>
+            <a:r>
+              <a:rPr b="0" dirty="0"/>
+              <a:t>No alt text provided</a:t>
+            </a:r>
+            <a:endParaRPr dirty="0"/>
+          </a:p>
+          <a:p>
+            <a:endParaRPr dirty="0"/>
+          </a:p>
+          <a:p>
             <a:r>
               <a:rPr b="1" dirty="0"/>
               <a:t>cardVisual</a:t>
             </a:r>
             <a:endParaRPr dirty="0"/>
           </a:p>
-          <a:p xmlns:a="http://schemas.openxmlformats.org/drawingml/2006/main">
-            <a:r>
-              <a:rPr b="0" dirty="0"/>
-              <a:t>No alt text provided</a:t>
-            </a:r>
-            <a:endParaRPr dirty="0"/>
-          </a:p>
-          <a:p xmlns:a="http://schemas.openxmlformats.org/drawingml/2006/main">
-            <a:r>
-              <a:rPr b="0" dirty="0"/>
-              <a:t/>
-            </a:r>
-            <a:endParaRPr dirty="0"/>
-          </a:p>
-          <a:p xmlns:a="http://schemas.openxmlformats.org/drawingml/2006/main">
+          <a:p>
+            <a:r>
+              <a:rPr b="0" dirty="0"/>
+              <a:t>No alt text provided</a:t>
+            </a:r>
+            <a:endParaRPr dirty="0"/>
+          </a:p>
+          <a:p>
+            <a:endParaRPr dirty="0"/>
+          </a:p>
+          <a:p>
             <a:r>
               <a:rPr b="1" dirty="0"/>
               <a:t>cardVisual</a:t>
             </a:r>
             <a:endParaRPr dirty="0"/>
           </a:p>
-          <a:p xmlns:a="http://schemas.openxmlformats.org/drawingml/2006/main">
-            <a:r>
-              <a:rPr b="0" dirty="0"/>
-              <a:t>No alt text provided</a:t>
-            </a:r>
-            <a:endParaRPr dirty="0"/>
-          </a:p>
-          <a:p xmlns:a="http://schemas.openxmlformats.org/drawingml/2006/main">
-            <a:r>
-              <a:rPr b="0" dirty="0"/>
-              <a:t/>
-            </a:r>
-            <a:endParaRPr dirty="0"/>
-          </a:p>
-          <a:p xmlns:a="http://schemas.openxmlformats.org/drawingml/2006/main">
+          <a:p>
+            <a:r>
+              <a:rPr b="0" dirty="0"/>
+              <a:t>No alt text provided</a:t>
+            </a:r>
+            <a:endParaRPr dirty="0"/>
+          </a:p>
+          <a:p>
+            <a:endParaRPr dirty="0"/>
+          </a:p>
+          <a:p>
             <a:r>
               <a:rPr b="1" dirty="0"/>
               <a:t>Pembanding: Forecast Bawaan Power BI</a:t>
             </a:r>
             <a:endParaRPr dirty="0"/>
           </a:p>
-          <a:p xmlns:a="http://schemas.openxmlformats.org/drawingml/2006/main">
-            <a:r>
-              <a:rPr b="0" dirty="0"/>
-              <a:t>No alt text provided</a:t>
-            </a:r>
-            <a:endParaRPr dirty="0"/>
-          </a:p>
-          <a:p xmlns:a="http://schemas.openxmlformats.org/drawingml/2006/main">
-            <a:r>
-              <a:rPr b="0" dirty="0"/>
-              <a:t/>
-            </a:r>
-            <a:endParaRPr dirty="0"/>
-          </a:p>
-          <a:p xmlns:a="http://schemas.openxmlformats.org/drawingml/2006/main">
+          <a:p>
+            <a:r>
+              <a:rPr b="0" dirty="0"/>
+              <a:t>No alt text provided</a:t>
+            </a:r>
+            <a:endParaRPr dirty="0"/>
+          </a:p>
+          <a:p>
+            <a:endParaRPr dirty="0"/>
+          </a:p>
+          <a:p>
             <a:r>
               <a:rPr b="1" dirty="0"/>
               <a:t>Revenue Bulanan dan Proyeksi Sampai Des 2020 (rentang 80%)</a:t>
             </a:r>
             <a:endParaRPr dirty="0"/>
           </a:p>
-          <a:p xmlns:a="http://schemas.openxmlformats.org/drawingml/2006/main">
-            <a:r>
-              <a:rPr b="0" dirty="0"/>
-              <a:t>No alt text provided</a:t>
-            </a:r>
-            <a:endParaRPr dirty="0"/>
-          </a:p>
-          <a:p xmlns:a="http://schemas.openxmlformats.org/drawingml/2006/main">
-            <a:r>
-              <a:rPr b="0" dirty="0"/>
-              <a:t/>
-            </a:r>
-            <a:endParaRPr dirty="0"/>
-          </a:p>
-          <a:p xmlns:a="http://schemas.openxmlformats.org/drawingml/2006/main">
+          <a:p>
+            <a:r>
+              <a:rPr b="0" dirty="0"/>
+              <a:t>No alt text provided</a:t>
+            </a:r>
+            <a:endParaRPr dirty="0"/>
+          </a:p>
+          <a:p>
+            <a:endParaRPr dirty="0"/>
+          </a:p>
+          <a:p>
             <a:r>
               <a:rPr b="1" dirty="0"/>
               <a:t>Catatan Metode</a:t>
             </a:r>
             <a:endParaRPr dirty="0"/>
           </a:p>
-          <a:p xmlns:a="http://schemas.openxmlformats.org/drawingml/2006/main">
-            <a:r>
-              <a:rPr b="0" dirty="0"/>
-              <a:t>No alt text provided</a:t>
-            </a:r>
-            <a:endParaRPr dirty="0"/>
-          </a:p>
-          <a:p xmlns:a="http://schemas.openxmlformats.org/drawingml/2006/main">
-            <a:r>
-              <a:rPr b="0" dirty="0"/>
-              <a:t/>
-            </a:r>
-            <a:endParaRPr dirty="0"/>
-          </a:p>
-          <a:p xmlns:a="http://schemas.openxmlformats.org/drawingml/2006/main">
+          <a:p>
+            <a:r>
+              <a:rPr b="0" dirty="0"/>
+              <a:t>No alt text provided</a:t>
+            </a:r>
+            <a:endParaRPr dirty="0"/>
+          </a:p>
+          <a:p>
+            <a:endParaRPr dirty="0"/>
+          </a:p>
+          <a:p>
             <a:r>
               <a:rPr b="1" dirty="0"/>
               <a:t>cardVisual</a:t>
             </a:r>
             <a:endParaRPr dirty="0"/>
           </a:p>
-          <a:p xmlns:a="http://schemas.openxmlformats.org/drawingml/2006/main">
-            <a:r>
-              <a:rPr b="0" dirty="0"/>
-              <a:t>No alt text provided</a:t>
-            </a:r>
-            <a:endParaRPr dirty="0"/>
-          </a:p>
-          <a:p xmlns:a="http://schemas.openxmlformats.org/drawingml/2006/main">
-            <a:r>
-              <a:rPr b="0" dirty="0"/>
-              <a:t/>
-            </a:r>
-            <a:endParaRPr dirty="0"/>
-          </a:p>
-          <a:p xmlns:a="http://schemas.openxmlformats.org/drawingml/2006/main">
+          <a:p>
+            <a:r>
+              <a:rPr b="0" dirty="0"/>
+              <a:t>No alt text provided</a:t>
+            </a:r>
+            <a:endParaRPr dirty="0"/>
+          </a:p>
+          <a:p>
+            <a:endParaRPr dirty="0"/>
+          </a:p>
+          <a:p>
             <a:r>
               <a:rPr b="1" dirty="0"/>
               <a:t>cardVisual</a:t>
             </a:r>
             <a:endParaRPr dirty="0"/>
           </a:p>
-          <a:p xmlns:a="http://schemas.openxmlformats.org/drawingml/2006/main">
-            <a:r>
-              <a:rPr b="0" dirty="0"/>
-              <a:t>No alt text provided</a:t>
-            </a:r>
-            <a:endParaRPr dirty="0"/>
-          </a:p>
-          <a:p xmlns:a="http://schemas.openxmlformats.org/drawingml/2006/main">
-            <a:r>
-              <a:rPr b="0" dirty="0"/>
-              <a:t/>
-            </a:r>
-            <a:endParaRPr dirty="0"/>
-          </a:p>
-          <a:p xmlns:a="http://schemas.openxmlformats.org/drawingml/2006/main">
+          <a:p>
+            <a:r>
+              <a:rPr b="0" dirty="0"/>
+              <a:t>No alt text provided</a:t>
+            </a:r>
+            <a:endParaRPr dirty="0"/>
+          </a:p>
+          <a:p>
+            <a:endParaRPr dirty="0"/>
+          </a:p>
+          <a:p>
             <a:r>
               <a:rPr b="1" dirty="0"/>
               <a:t>Proyeksi Bulanan Mar-Des 2020</a:t>
             </a:r>
             <a:endParaRPr dirty="0"/>
           </a:p>
-          <a:p xmlns:a="http://schemas.openxmlformats.org/drawingml/2006/main">
-            <a:r>
-              <a:rPr b="0" dirty="0"/>
-              <a:t>No alt text provided</a:t>
-            </a:r>
-            <a:endParaRPr dirty="0"/>
-          </a:p>
-          <a:p xmlns:a="http://schemas.openxmlformats.org/drawingml/2006/main">
-            <a:r>
-              <a:rPr b="0" dirty="0"/>
-              <a:t/>
-            </a:r>
-            <a:endParaRPr dirty="0"/>
-          </a:p>
-          <a:p xmlns:a="http://schemas.openxmlformats.org/drawingml/2006/main">
+          <a:p>
+            <a:r>
+              <a:rPr b="0" dirty="0"/>
+              <a:t>No alt text provided</a:t>
+            </a:r>
+            <a:endParaRPr dirty="0"/>
+          </a:p>
+          <a:p>
+            <a:endParaRPr dirty="0"/>
+          </a:p>
+          <a:p>
             <a:r>
               <a:rPr b="1" dirty="0"/>
               <a:t>pageNavigator</a:t>
             </a:r>
             <a:endParaRPr dirty="0"/>
           </a:p>
-          <a:p xmlns:a="http://schemas.openxmlformats.org/drawingml/2006/main">
-            <a:r>
-              <a:rPr b="0" dirty="0"/>
-              <a:t>No alt text provided</a:t>
-            </a:r>
-            <a:endParaRPr dirty="0"/>
-          </a:p>
-          <a:p xmlns:a="http://schemas.openxmlformats.org/drawingml/2006/main">
-            <a:r>
-              <a:rPr b="0" dirty="0"/>
-              <a:t/>
-            </a:r>
+          <a:p>
+            <a:r>
+              <a:rPr b="0" dirty="0"/>
+              <a:t>No alt text provided</a:t>
+            </a:r>
+            <a:endParaRPr dirty="0"/>
+          </a:p>
+          <a:p>
             <a:endParaRPr dirty="0"/>
           </a:p>
         </p:txBody>
       </p:sp>
     </p:spTree>
-    <p:clrMapOvr>
-      <a:masterClrMapping xmlns:a="http://schemas.openxmlformats.org/drawingml/2006/main"/>
-    </p:clrMapOvr>
   </p:cSld>
+  <p:clrMapOvr>
+    <a:masterClrMapping/>
+  </p:clrMapOvr>
 </p:notes>
 </file>
 
 <file path=ppt/notesSlides/notesSlide8.xml><?xml version="1.0" encoding="utf-8"?>
-<p:notes xmlns:p="http://schemas.openxmlformats.org/presentationml/2006/main">
+<p:notes xmlns:a="http://schemas.openxmlformats.org/drawingml/2006/main" xmlns:r="http://schemas.openxmlformats.org/officeDocument/2006/relationships" xmlns:p="http://schemas.openxmlformats.org/presentationml/2006/main">
   <p:cSld>
     <p:spTree>
       <p:nvGrpSpPr>
@@ -1942,12 +2043,19 @@
         <p:cNvGrpSpPr/>
         <p:nvPr/>
       </p:nvGrpSpPr>
-      <p:grpSpPr/>
+      <p:grpSpPr>
+        <a:xfrm>
+          <a:off x="0" y="0"/>
+          <a:ext cx="0" cy="0"/>
+          <a:chOff x="0" y="0"/>
+          <a:chExt cx="0" cy="0"/>
+        </a:xfrm>
+      </p:grpSpPr>
       <p:sp>
         <p:nvSpPr>
           <p:cNvPr id="2" name="Slide Text"/>
           <p:cNvSpPr>
-            <a:spLocks xmlns:a="http://schemas.openxmlformats.org/drawingml/2006/main" noGrp="1"/>
+            <a:spLocks noGrp="1"/>
           </p:cNvSpPr>
           <p:nvPr>
             <p:ph type="body" idx="1"/>
@@ -1955,435 +2063,355 @@
         </p:nvSpPr>
         <p:spPr/>
         <p:txBody>
-          <a:bodyPr xmlns:a="http://schemas.openxmlformats.org/drawingml/2006/main"/>
-          <a:lstStyle xmlns:a="http://schemas.openxmlformats.org/drawingml/2006/main"/>
-          <a:p xmlns:a="http://schemas.openxmlformats.org/drawingml/2006/main">
+          <a:bodyPr/>
+          <a:lstStyle/>
+          <a:p>
             <a:r>
               <a:rPr b="1" dirty="0"/>
               <a:t>cardVisual</a:t>
             </a:r>
             <a:endParaRPr dirty="0"/>
           </a:p>
-          <a:p xmlns:a="http://schemas.openxmlformats.org/drawingml/2006/main">
-            <a:r>
-              <a:rPr b="0" dirty="0"/>
-              <a:t>No alt text provided</a:t>
-            </a:r>
-            <a:endParaRPr dirty="0"/>
-          </a:p>
-          <a:p xmlns:a="http://schemas.openxmlformats.org/drawingml/2006/main">
-            <a:r>
-              <a:rPr b="0" dirty="0"/>
-              <a:t/>
-            </a:r>
-            <a:endParaRPr dirty="0"/>
-          </a:p>
-          <a:p xmlns:a="http://schemas.openxmlformats.org/drawingml/2006/main">
+          <a:p>
+            <a:r>
+              <a:rPr b="0" dirty="0"/>
+              <a:t>No alt text provided</a:t>
+            </a:r>
+            <a:endParaRPr dirty="0"/>
+          </a:p>
+          <a:p>
+            <a:endParaRPr dirty="0"/>
+          </a:p>
+          <a:p>
             <a:r>
               <a:rPr b="1" dirty="0"/>
               <a:t>Baseline Sisa Tahun</a:t>
             </a:r>
             <a:endParaRPr dirty="0"/>
           </a:p>
-          <a:p xmlns:a="http://schemas.openxmlformats.org/drawingml/2006/main">
-            <a:r>
-              <a:rPr b="0" dirty="0"/>
-              <a:t>No alt text provided</a:t>
-            </a:r>
-            <a:endParaRPr dirty="0"/>
-          </a:p>
-          <a:p xmlns:a="http://schemas.openxmlformats.org/drawingml/2006/main">
-            <a:r>
-              <a:rPr b="0" dirty="0"/>
-              <a:t/>
-            </a:r>
-            <a:endParaRPr dirty="0"/>
-          </a:p>
-          <a:p xmlns:a="http://schemas.openxmlformats.org/drawingml/2006/main">
+          <a:p>
+            <a:r>
+              <a:rPr b="0" dirty="0"/>
+              <a:t>No alt text provided</a:t>
+            </a:r>
+            <a:endParaRPr dirty="0"/>
+          </a:p>
+          <a:p>
+            <a:endParaRPr dirty="0"/>
+          </a:p>
+          <a:p>
             <a:r>
               <a:rPr b="1" dirty="0"/>
               <a:t>slicer</a:t>
             </a:r>
             <a:endParaRPr dirty="0"/>
           </a:p>
-          <a:p xmlns:a="http://schemas.openxmlformats.org/drawingml/2006/main">
-            <a:r>
-              <a:rPr b="0" dirty="0"/>
-              <a:t>No alt text provided</a:t>
-            </a:r>
-            <a:endParaRPr dirty="0"/>
-          </a:p>
-          <a:p xmlns:a="http://schemas.openxmlformats.org/drawingml/2006/main">
-            <a:r>
-              <a:rPr b="0" dirty="0"/>
-              <a:t/>
-            </a:r>
-            <a:endParaRPr dirty="0"/>
-          </a:p>
-          <a:p xmlns:a="http://schemas.openxmlformats.org/drawingml/2006/main">
+          <a:p>
+            <a:r>
+              <a:rPr b="0" dirty="0"/>
+              <a:t>No alt text provided</a:t>
+            </a:r>
+            <a:endParaRPr dirty="0"/>
+          </a:p>
+          <a:p>
+            <a:endParaRPr dirty="0"/>
+          </a:p>
+          <a:p>
             <a:r>
               <a:rPr b="1" dirty="0"/>
               <a:t>Dampak Tiap Tuas (Revenue Tambahan)</a:t>
             </a:r>
             <a:endParaRPr dirty="0"/>
           </a:p>
-          <a:p xmlns:a="http://schemas.openxmlformats.org/drawingml/2006/main">
-            <a:r>
-              <a:rPr b="0" dirty="0"/>
-              <a:t>No alt text provided</a:t>
-            </a:r>
-            <a:endParaRPr dirty="0"/>
-          </a:p>
-          <a:p xmlns:a="http://schemas.openxmlformats.org/drawingml/2006/main">
-            <a:r>
-              <a:rPr b="0" dirty="0"/>
-              <a:t/>
-            </a:r>
-            <a:endParaRPr dirty="0"/>
-          </a:p>
-          <a:p xmlns:a="http://schemas.openxmlformats.org/drawingml/2006/main">
+          <a:p>
+            <a:r>
+              <a:rPr b="0" dirty="0"/>
+              <a:t>No alt text provided</a:t>
+            </a:r>
+            <a:endParaRPr dirty="0"/>
+          </a:p>
+          <a:p>
+            <a:endParaRPr dirty="0"/>
+          </a:p>
+          <a:p>
             <a:r>
               <a:rPr b="1" dirty="0"/>
               <a:t>cardVisual</a:t>
             </a:r>
             <a:endParaRPr dirty="0"/>
           </a:p>
-          <a:p xmlns:a="http://schemas.openxmlformats.org/drawingml/2006/main">
-            <a:r>
-              <a:rPr b="0" dirty="0"/>
-              <a:t>No alt text provided</a:t>
-            </a:r>
-            <a:endParaRPr dirty="0"/>
-          </a:p>
-          <a:p xmlns:a="http://schemas.openxmlformats.org/drawingml/2006/main">
-            <a:r>
-              <a:rPr b="0" dirty="0"/>
-              <a:t/>
-            </a:r>
-            <a:endParaRPr dirty="0"/>
-          </a:p>
-          <a:p xmlns:a="http://schemas.openxmlformats.org/drawingml/2006/main">
+          <a:p>
+            <a:r>
+              <a:rPr b="0" dirty="0"/>
+              <a:t>No alt text provided</a:t>
+            </a:r>
+            <a:endParaRPr dirty="0"/>
+          </a:p>
+          <a:p>
+            <a:endParaRPr dirty="0"/>
+          </a:p>
+          <a:p>
             <a:r>
               <a:rPr b="1" dirty="0"/>
               <a:t>Jembatan Skenario Revenue 2020</a:t>
             </a:r>
             <a:endParaRPr dirty="0"/>
           </a:p>
-          <a:p xmlns:a="http://schemas.openxmlformats.org/drawingml/2006/main">
-            <a:r>
-              <a:rPr b="0" dirty="0"/>
-              <a:t>No alt text provided</a:t>
-            </a:r>
-            <a:endParaRPr dirty="0"/>
-          </a:p>
-          <a:p xmlns:a="http://schemas.openxmlformats.org/drawingml/2006/main">
-            <a:r>
-              <a:rPr b="0" dirty="0"/>
-              <a:t/>
-            </a:r>
-            <a:endParaRPr dirty="0"/>
-          </a:p>
-          <a:p xmlns:a="http://schemas.openxmlformats.org/drawingml/2006/main">
+          <a:p>
+            <a:r>
+              <a:rPr b="0" dirty="0"/>
+              <a:t>No alt text provided</a:t>
+            </a:r>
+            <a:endParaRPr dirty="0"/>
+          </a:p>
+          <a:p>
+            <a:endParaRPr dirty="0"/>
+          </a:p>
+          <a:p>
             <a:r>
               <a:rPr b="1" dirty="0"/>
               <a:t>slicer</a:t>
             </a:r>
             <a:endParaRPr dirty="0"/>
           </a:p>
-          <a:p xmlns:a="http://schemas.openxmlformats.org/drawingml/2006/main">
-            <a:r>
-              <a:rPr b="0" dirty="0"/>
-              <a:t>No alt text provided</a:t>
-            </a:r>
-            <a:endParaRPr dirty="0"/>
-          </a:p>
-          <a:p xmlns:a="http://schemas.openxmlformats.org/drawingml/2006/main">
-            <a:r>
-              <a:rPr b="0" dirty="0"/>
-              <a:t/>
-            </a:r>
-            <a:endParaRPr dirty="0"/>
-          </a:p>
-          <a:p xmlns:a="http://schemas.openxmlformats.org/drawingml/2006/main">
+          <a:p>
+            <a:r>
+              <a:rPr b="0" dirty="0"/>
+              <a:t>No alt text provided</a:t>
+            </a:r>
+            <a:endParaRPr dirty="0"/>
+          </a:p>
+          <a:p>
+            <a:endParaRPr dirty="0"/>
+          </a:p>
+          <a:p>
             <a:r>
               <a:rPr b="1" dirty="0"/>
               <a:t>Rekomendasi per Segmen</a:t>
             </a:r>
             <a:endParaRPr dirty="0"/>
           </a:p>
-          <a:p xmlns:a="http://schemas.openxmlformats.org/drawingml/2006/main">
-            <a:r>
-              <a:rPr b="0" dirty="0"/>
-              <a:t>No alt text provided</a:t>
-            </a:r>
-            <a:endParaRPr dirty="0"/>
-          </a:p>
-          <a:p xmlns:a="http://schemas.openxmlformats.org/drawingml/2006/main">
-            <a:r>
-              <a:rPr b="0" dirty="0"/>
-              <a:t/>
-            </a:r>
-            <a:endParaRPr dirty="0"/>
-          </a:p>
-          <a:p xmlns:a="http://schemas.openxmlformats.org/drawingml/2006/main">
+          <a:p>
+            <a:r>
+              <a:rPr b="0" dirty="0"/>
+              <a:t>No alt text provided</a:t>
+            </a:r>
+            <a:endParaRPr dirty="0"/>
+          </a:p>
+          <a:p>
+            <a:endParaRPr dirty="0"/>
+          </a:p>
+          <a:p>
             <a:r>
               <a:rPr b="1" dirty="0"/>
               <a:t>cardVisual</a:t>
             </a:r>
             <a:endParaRPr dirty="0"/>
           </a:p>
-          <a:p xmlns:a="http://schemas.openxmlformats.org/drawingml/2006/main">
-            <a:r>
-              <a:rPr b="0" dirty="0"/>
-              <a:t>No alt text provided</a:t>
-            </a:r>
-            <a:endParaRPr dirty="0"/>
-          </a:p>
-          <a:p xmlns:a="http://schemas.openxmlformats.org/drawingml/2006/main">
-            <a:r>
-              <a:rPr b="0" dirty="0"/>
-              <a:t/>
-            </a:r>
-            <a:endParaRPr dirty="0"/>
-          </a:p>
-          <a:p xmlns:a="http://schemas.openxmlformats.org/drawingml/2006/main">
+          <a:p>
+            <a:r>
+              <a:rPr b="0" dirty="0"/>
+              <a:t>No alt text provided</a:t>
+            </a:r>
+            <a:endParaRPr dirty="0"/>
+          </a:p>
+          <a:p>
+            <a:endParaRPr dirty="0"/>
+          </a:p>
+          <a:p>
             <a:r>
               <a:rPr b="1" dirty="0"/>
               <a:t>slicer</a:t>
             </a:r>
             <a:endParaRPr dirty="0"/>
           </a:p>
-          <a:p xmlns:a="http://schemas.openxmlformats.org/drawingml/2006/main">
-            <a:r>
-              <a:rPr b="0" dirty="0"/>
-              <a:t>No alt text provided</a:t>
-            </a:r>
-            <a:endParaRPr dirty="0"/>
-          </a:p>
-          <a:p xmlns:a="http://schemas.openxmlformats.org/drawingml/2006/main">
-            <a:r>
-              <a:rPr b="0" dirty="0"/>
-              <a:t/>
-            </a:r>
-            <a:endParaRPr dirty="0"/>
-          </a:p>
-          <a:p xmlns:a="http://schemas.openxmlformats.org/drawingml/2006/main">
+          <a:p>
+            <a:r>
+              <a:rPr b="0" dirty="0"/>
+              <a:t>No alt text provided</a:t>
+            </a:r>
+            <a:endParaRPr dirty="0"/>
+          </a:p>
+          <a:p>
+            <a:endParaRPr dirty="0"/>
+          </a:p>
+          <a:p>
             <a:r>
               <a:rPr b="1" dirty="0"/>
               <a:t>textbox</a:t>
             </a:r>
             <a:endParaRPr dirty="0"/>
           </a:p>
-          <a:p xmlns:a="http://schemas.openxmlformats.org/drawingml/2006/main">
-            <a:r>
-              <a:rPr b="0" dirty="0"/>
-              <a:t>No alt text provided</a:t>
-            </a:r>
-            <a:endParaRPr dirty="0"/>
-          </a:p>
-          <a:p xmlns:a="http://schemas.openxmlformats.org/drawingml/2006/main">
-            <a:r>
-              <a:rPr b="0" dirty="0"/>
-              <a:t/>
-            </a:r>
-            <a:endParaRPr dirty="0"/>
-          </a:p>
-          <a:p xmlns:a="http://schemas.openxmlformats.org/drawingml/2006/main">
+          <a:p>
+            <a:r>
+              <a:rPr b="0" dirty="0"/>
+              <a:t>No alt text provided</a:t>
+            </a:r>
+            <a:endParaRPr dirty="0"/>
+          </a:p>
+          <a:p>
+            <a:endParaRPr dirty="0"/>
+          </a:p>
+          <a:p>
             <a:r>
               <a:rPr b="1" dirty="0"/>
               <a:t>textbox</a:t>
             </a:r>
             <a:endParaRPr dirty="0"/>
           </a:p>
-          <a:p xmlns:a="http://schemas.openxmlformats.org/drawingml/2006/main">
-            <a:r>
-              <a:rPr b="0" dirty="0"/>
-              <a:t>No alt text provided</a:t>
-            </a:r>
-            <a:endParaRPr dirty="0"/>
-          </a:p>
-          <a:p xmlns:a="http://schemas.openxmlformats.org/drawingml/2006/main">
-            <a:r>
-              <a:rPr b="0" dirty="0"/>
-              <a:t/>
-            </a:r>
-            <a:endParaRPr dirty="0"/>
-          </a:p>
-          <a:p xmlns:a="http://schemas.openxmlformats.org/drawingml/2006/main">
+          <a:p>
+            <a:r>
+              <a:rPr b="0" dirty="0"/>
+              <a:t>No alt text provided</a:t>
+            </a:r>
+            <a:endParaRPr dirty="0"/>
+          </a:p>
+          <a:p>
+            <a:endParaRPr dirty="0"/>
+          </a:p>
+          <a:p>
             <a:r>
               <a:rPr b="1" dirty="0"/>
               <a:t>pageNavigator</a:t>
             </a:r>
             <a:endParaRPr dirty="0"/>
           </a:p>
-          <a:p xmlns:a="http://schemas.openxmlformats.org/drawingml/2006/main">
-            <a:r>
-              <a:rPr b="0" dirty="0"/>
-              <a:t>No alt text provided</a:t>
-            </a:r>
-            <a:endParaRPr dirty="0"/>
-          </a:p>
-          <a:p xmlns:a="http://schemas.openxmlformats.org/drawingml/2006/main">
-            <a:r>
-              <a:rPr b="0" dirty="0"/>
-              <a:t/>
-            </a:r>
-            <a:endParaRPr dirty="0"/>
-          </a:p>
-          <a:p xmlns:a="http://schemas.openxmlformats.org/drawingml/2006/main">
+          <a:p>
+            <a:r>
+              <a:rPr b="0" dirty="0"/>
+              <a:t>No alt text provided</a:t>
+            </a:r>
+            <a:endParaRPr dirty="0"/>
+          </a:p>
+          <a:p>
+            <a:endParaRPr dirty="0"/>
+          </a:p>
+          <a:p>
             <a:r>
               <a:rPr b="1" dirty="0"/>
               <a:t>Reset</a:t>
             </a:r>
             <a:endParaRPr dirty="0"/>
           </a:p>
-          <a:p xmlns:a="http://schemas.openxmlformats.org/drawingml/2006/main">
-            <a:r>
-              <a:rPr b="0" dirty="0"/>
-              <a:t>No alt text provided</a:t>
-            </a:r>
-            <a:endParaRPr dirty="0"/>
-          </a:p>
-          <a:p xmlns:a="http://schemas.openxmlformats.org/drawingml/2006/main">
-            <a:r>
-              <a:rPr b="0" dirty="0"/>
-              <a:t/>
-            </a:r>
-            <a:endParaRPr dirty="0"/>
-          </a:p>
-          <a:p xmlns:a="http://schemas.openxmlformats.org/drawingml/2006/main">
+          <a:p>
+            <a:r>
+              <a:rPr b="0" dirty="0"/>
+              <a:t>No alt text provided</a:t>
+            </a:r>
+            <a:endParaRPr dirty="0"/>
+          </a:p>
+          <a:p>
+            <a:endParaRPr dirty="0"/>
+          </a:p>
+          <a:p>
             <a:r>
               <a:rPr b="1" dirty="0"/>
               <a:t>Catatan</a:t>
             </a:r>
             <a:endParaRPr dirty="0"/>
           </a:p>
-          <a:p xmlns:a="http://schemas.openxmlformats.org/drawingml/2006/main">
-            <a:r>
-              <a:rPr b="0" dirty="0"/>
-              <a:t>No alt text provided</a:t>
-            </a:r>
-            <a:endParaRPr dirty="0"/>
-          </a:p>
-          <a:p xmlns:a="http://schemas.openxmlformats.org/drawingml/2006/main">
-            <a:r>
-              <a:rPr b="0" dirty="0"/>
-              <a:t/>
-            </a:r>
-            <a:endParaRPr dirty="0"/>
-          </a:p>
-          <a:p xmlns:a="http://schemas.openxmlformats.org/drawingml/2006/main">
+          <a:p>
+            <a:r>
+              <a:rPr b="0" dirty="0"/>
+              <a:t>No alt text provided</a:t>
+            </a:r>
+            <a:endParaRPr dirty="0"/>
+          </a:p>
+          <a:p>
+            <a:endParaRPr dirty="0"/>
+          </a:p>
+          <a:p>
             <a:r>
               <a:rPr b="1" dirty="0"/>
               <a:t>cardVisual</a:t>
             </a:r>
             <a:endParaRPr dirty="0"/>
           </a:p>
-          <a:p xmlns:a="http://schemas.openxmlformats.org/drawingml/2006/main">
-            <a:r>
-              <a:rPr b="0" dirty="0"/>
-              <a:t>No alt text provided</a:t>
-            </a:r>
-            <a:endParaRPr dirty="0"/>
-          </a:p>
-          <a:p xmlns:a="http://schemas.openxmlformats.org/drawingml/2006/main">
-            <a:r>
-              <a:rPr b="0" dirty="0"/>
-              <a:t/>
-            </a:r>
-            <a:endParaRPr dirty="0"/>
-          </a:p>
-          <a:p xmlns:a="http://schemas.openxmlformats.org/drawingml/2006/main">
+          <a:p>
+            <a:r>
+              <a:rPr b="0" dirty="0"/>
+              <a:t>No alt text provided</a:t>
+            </a:r>
+            <a:endParaRPr dirty="0"/>
+          </a:p>
+          <a:p>
+            <a:endParaRPr dirty="0"/>
+          </a:p>
+          <a:p>
             <a:r>
               <a:rPr b="1" dirty="0"/>
               <a:t>slicer</a:t>
             </a:r>
             <a:endParaRPr dirty="0"/>
           </a:p>
-          <a:p xmlns:a="http://schemas.openxmlformats.org/drawingml/2006/main">
-            <a:r>
-              <a:rPr b="0" dirty="0"/>
-              <a:t>No alt text provided</a:t>
-            </a:r>
-            <a:endParaRPr dirty="0"/>
-          </a:p>
-          <a:p xmlns:a="http://schemas.openxmlformats.org/drawingml/2006/main">
-            <a:r>
-              <a:rPr b="0" dirty="0"/>
-              <a:t/>
-            </a:r>
-            <a:endParaRPr dirty="0"/>
-          </a:p>
-          <a:p xmlns:a="http://schemas.openxmlformats.org/drawingml/2006/main">
+          <a:p>
+            <a:r>
+              <a:rPr b="0" dirty="0"/>
+              <a:t>No alt text provided</a:t>
+            </a:r>
+            <a:endParaRPr dirty="0"/>
+          </a:p>
+          <a:p>
+            <a:endParaRPr dirty="0"/>
+          </a:p>
+          <a:p>
             <a:r>
               <a:rPr b="1" dirty="0"/>
               <a:t>shape</a:t>
             </a:r>
             <a:endParaRPr dirty="0"/>
           </a:p>
-          <a:p xmlns:a="http://schemas.openxmlformats.org/drawingml/2006/main">
-            <a:r>
-              <a:rPr b="0" dirty="0"/>
-              <a:t>No alt text provided</a:t>
-            </a:r>
-            <a:endParaRPr dirty="0"/>
-          </a:p>
-          <a:p xmlns:a="http://schemas.openxmlformats.org/drawingml/2006/main">
-            <a:r>
-              <a:rPr b="0" dirty="0"/>
-              <a:t/>
-            </a:r>
-            <a:endParaRPr dirty="0"/>
-          </a:p>
-          <a:p xmlns:a="http://schemas.openxmlformats.org/drawingml/2006/main">
+          <a:p>
+            <a:r>
+              <a:rPr b="0" dirty="0"/>
+              <a:t>No alt text provided</a:t>
+            </a:r>
+            <a:endParaRPr dirty="0"/>
+          </a:p>
+          <a:p>
+            <a:endParaRPr dirty="0"/>
+          </a:p>
+          <a:p>
             <a:r>
               <a:rPr b="1" dirty="0"/>
               <a:t>slicer</a:t>
             </a:r>
             <a:endParaRPr dirty="0"/>
           </a:p>
-          <a:p xmlns:a="http://schemas.openxmlformats.org/drawingml/2006/main">
-            <a:r>
-              <a:rPr b="0" dirty="0"/>
-              <a:t>No alt text provided</a:t>
-            </a:r>
-            <a:endParaRPr dirty="0"/>
-          </a:p>
-          <a:p xmlns:a="http://schemas.openxmlformats.org/drawingml/2006/main">
-            <a:r>
-              <a:rPr b="0" dirty="0"/>
-              <a:t/>
-            </a:r>
-            <a:endParaRPr dirty="0"/>
-          </a:p>
-          <a:p xmlns:a="http://schemas.openxmlformats.org/drawingml/2006/main">
+          <a:p>
+            <a:r>
+              <a:rPr b="0" dirty="0"/>
+              <a:t>No alt text provided</a:t>
+            </a:r>
+            <a:endParaRPr dirty="0"/>
+          </a:p>
+          <a:p>
+            <a:endParaRPr dirty="0"/>
+          </a:p>
+          <a:p>
             <a:r>
               <a:rPr b="1" dirty="0"/>
               <a:t>cardVisual</a:t>
             </a:r>
             <a:endParaRPr dirty="0"/>
           </a:p>
-          <a:p xmlns:a="http://schemas.openxmlformats.org/drawingml/2006/main">
-            <a:r>
-              <a:rPr b="0" dirty="0"/>
-              <a:t>No alt text provided</a:t>
-            </a:r>
-            <a:endParaRPr dirty="0"/>
-          </a:p>
-          <a:p xmlns:a="http://schemas.openxmlformats.org/drawingml/2006/main">
-            <a:r>
-              <a:rPr b="0" dirty="0"/>
-              <a:t/>
-            </a:r>
+          <a:p>
+            <a:r>
+              <a:rPr b="0" dirty="0"/>
+              <a:t>No alt text provided</a:t>
+            </a:r>
+            <a:endParaRPr dirty="0"/>
+          </a:p>
+          <a:p>
             <a:endParaRPr dirty="0"/>
           </a:p>
         </p:txBody>
       </p:sp>
     </p:spTree>
-    <p:clrMapOvr>
-      <a:masterClrMapping xmlns:a="http://schemas.openxmlformats.org/drawingml/2006/main"/>
-    </p:clrMapOvr>
   </p:cSld>
+  <p:clrMapOvr>
+    <a:masterClrMapping/>
+  </p:clrMapOvr>
 </p:notes>
 </file>
 
@@ -2516,7 +2544,7 @@
           <a:p>
             <a:fld id="{627ED9C8-F09A-4D9E-BEC0-4725162E21FF}" type="datetimeFigureOut">
               <a:rPr lang="en-US" smtClean="0"/>
-              <a:t>11/25/2020</a:t>
+              <a:t>10/22/2026</a:t>
             </a:fld>
             <a:endParaRPr lang="en-US"/>
           </a:p>
@@ -2684,7 +2712,7 @@
           <a:p>
             <a:fld id="{627ED9C8-F09A-4D9E-BEC0-4725162E21FF}" type="datetimeFigureOut">
               <a:rPr lang="en-US" smtClean="0"/>
-              <a:t>11/25/2020</a:t>
+              <a:t>10/22/2026</a:t>
             </a:fld>
             <a:endParaRPr lang="en-US"/>
           </a:p>
@@ -2862,7 +2890,7 @@
           <a:p>
             <a:fld id="{627ED9C8-F09A-4D9E-BEC0-4725162E21FF}" type="datetimeFigureOut">
               <a:rPr lang="en-US" smtClean="0"/>
-              <a:t>11/25/2020</a:t>
+              <a:t>10/22/2026</a:t>
             </a:fld>
             <a:endParaRPr lang="en-US"/>
           </a:p>
@@ -3030,7 +3058,7 @@
           <a:p>
             <a:fld id="{627ED9C8-F09A-4D9E-BEC0-4725162E21FF}" type="datetimeFigureOut">
               <a:rPr lang="en-US" smtClean="0"/>
-              <a:t>11/25/2020</a:t>
+              <a:t>10/22/2026</a:t>
             </a:fld>
             <a:endParaRPr lang="en-US"/>
           </a:p>
@@ -3275,7 +3303,7 @@
           <a:p>
             <a:fld id="{627ED9C8-F09A-4D9E-BEC0-4725162E21FF}" type="datetimeFigureOut">
               <a:rPr lang="en-US" smtClean="0"/>
-              <a:t>11/25/2020</a:t>
+              <a:t>10/22/2026</a:t>
             </a:fld>
             <a:endParaRPr lang="en-US"/>
           </a:p>
@@ -3504,7 +3532,7 @@
           <a:p>
             <a:fld id="{627ED9C8-F09A-4D9E-BEC0-4725162E21FF}" type="datetimeFigureOut">
               <a:rPr lang="en-US" smtClean="0"/>
-              <a:t>11/25/2020</a:t>
+              <a:t>10/22/2026</a:t>
             </a:fld>
             <a:endParaRPr lang="en-US"/>
           </a:p>
@@ -3868,7 +3896,7 @@
           <a:p>
             <a:fld id="{627ED9C8-F09A-4D9E-BEC0-4725162E21FF}" type="datetimeFigureOut">
               <a:rPr lang="en-US" smtClean="0"/>
-              <a:t>11/25/2020</a:t>
+              <a:t>10/22/2026</a:t>
             </a:fld>
             <a:endParaRPr lang="en-US"/>
           </a:p>
@@ -3985,7 +4013,7 @@
           <a:p>
             <a:fld id="{627ED9C8-F09A-4D9E-BEC0-4725162E21FF}" type="datetimeFigureOut">
               <a:rPr lang="en-US" smtClean="0"/>
-              <a:t>11/25/2020</a:t>
+              <a:t>10/22/2026</a:t>
             </a:fld>
             <a:endParaRPr lang="en-US"/>
           </a:p>
@@ -4080,7 +4108,7 @@
           <a:p>
             <a:fld id="{627ED9C8-F09A-4D9E-BEC0-4725162E21FF}" type="datetimeFigureOut">
               <a:rPr lang="en-US" smtClean="0"/>
-              <a:t>11/25/2020</a:t>
+              <a:t>10/22/2026</a:t>
             </a:fld>
             <a:endParaRPr lang="en-US"/>
           </a:p>
@@ -4355,7 +4383,7 @@
           <a:p>
             <a:fld id="{627ED9C8-F09A-4D9E-BEC0-4725162E21FF}" type="datetimeFigureOut">
               <a:rPr lang="en-US" smtClean="0"/>
-              <a:t>11/25/2020</a:t>
+              <a:t>10/22/2026</a:t>
             </a:fld>
             <a:endParaRPr lang="en-US"/>
           </a:p>
@@ -4607,7 +4635,7 @@
           <a:p>
             <a:fld id="{627ED9C8-F09A-4D9E-BEC0-4725162E21FF}" type="datetimeFigureOut">
               <a:rPr lang="en-US" smtClean="0"/>
-              <a:t>11/25/2020</a:t>
+              <a:t>10/22/2026</a:t>
             </a:fld>
             <a:endParaRPr lang="en-US"/>
           </a:p>
@@ -4669,7 +4697,7 @@
 </file>
 
 <file path=ppt/slideMasters/slideMaster1.xml><?xml version="1.0" encoding="utf-8"?>
-<p:sldMaster xmlns:p14="http://schemas.microsoft.com/office/powerpoint/2010/main" xmlns:a="http://schemas.openxmlformats.org/drawingml/2006/main" xmlns:r="http://schemas.openxmlformats.org/officeDocument/2006/relationships" xmlns:p="http://schemas.openxmlformats.org/presentationml/2006/main" preserve="1">
+<p:sldMaster xmlns:a="http://schemas.openxmlformats.org/drawingml/2006/main" xmlns:r="http://schemas.openxmlformats.org/officeDocument/2006/relationships" xmlns:p="http://schemas.openxmlformats.org/presentationml/2006/main" preserve="1">
   <p:cSld>
     <p:bg>
       <p:bgRef idx="1001">
@@ -4818,7 +4846,7 @@
           <a:p>
             <a:fld id="{627ED9C8-F09A-4D9E-BEC0-4725162E21FF}" type="datetimeFigureOut">
               <a:rPr lang="en-US" smtClean="0"/>
-              <a:t>11/25/2020</a:t>
+              <a:t>10/22/2026</a:t>
             </a:fld>
             <a:endParaRPr lang="en-US"/>
           </a:p>
@@ -5207,16 +5235,8 @@
 </file>
 
 <file path=ppt/slides/slide1.xml><?xml version="1.0" encoding="utf-8"?>
-<p:sld xmlns:adec="http://schemas.microsoft.com/office/drawing/2017/decorative" xmlns:a14="http://schemas.microsoft.com/office/drawing/2010/main" xmlns:p14="http://schemas.microsoft.com/office/powerpoint/2010/main" xmlns:a="http://schemas.openxmlformats.org/drawingml/2006/main" xmlns:r="http://schemas.openxmlformats.org/officeDocument/2006/relationships" xmlns:p="http://schemas.openxmlformats.org/presentationml/2006/main">
+<p:sld xmlns:a="http://schemas.openxmlformats.org/drawingml/2006/main" xmlns:r="http://schemas.openxmlformats.org/officeDocument/2006/relationships" xmlns:p="http://schemas.openxmlformats.org/presentationml/2006/main">
   <p:cSld>
-    <p:bg>
-      <p:bgPr>
-        <a:solidFill>
-          <a:schemeClr val="tx1"/>
-        </a:solidFill>
-        <a:effectLst/>
-      </p:bgPr>
-    </p:bg>
     <p:spTree>
       <p:nvGrpSpPr>
         <p:cNvPr id="1" name=""/>
@@ -5233,12 +5253,8 @@
       </p:grpSpPr>
       <p:pic>
         <p:nvPicPr>
-          <p:cNvPr id="9" name="Picture 8">
-            <a:extLst>
-              <a:ext uri="{C183D7F6-B498-43B3-948B-1728B52AA6E4}">
-                <adec:decorative xmlns:adec="http://schemas.microsoft.com/office/drawing/2017/decorative" val="1"/>
-              </a:ext>
-            </a:extLst>
+          <p:cNvPr id="3" name="Picture" title="This slide contains the following visuals: Customer Aktif ,Total Revenue ,Gross Margin ,textbox ,Pencapaian Target ,advancedSlicerVisual ,pageNavigator ,Top 10 Customer ,Aktual vs Target per Tahun ,Tren Revenue &amp; Order ,Kontribusi Revenue Per Region ,Revenue Per Material. Please refer to the notes on this slide for details">
+            <a:hlinkClick r:id="rId3"/>
           </p:cNvPr>
           <p:cNvPicPr>
             <a:picLocks noChangeAspect="1"/>
@@ -5246,536 +5262,44 @@
           <p:nvPr/>
         </p:nvPicPr>
         <p:blipFill>
-          <a:blip r:embed="rId2">
-            <a:extLst>
-              <a:ext uri="{28A0092B-C50C-407E-A947-70E740481C1C}">
-                <a14:useLocalDpi xmlns:a14="http://schemas.microsoft.com/office/drawing/2010/main" val="0"/>
-              </a:ext>
-            </a:extLst>
-          </a:blip>
+          <a:blip r:embed="rId4"/>
           <a:stretch>
             <a:fillRect/>
           </a:stretch>
         </p:blipFill>
         <p:spPr>
           <a:xfrm>
-            <a:off x="0" y="0"/>
-            <a:ext cx="12192000" cy="6858000"/>
-          </a:xfrm>
-          <a:prstGeom prst="rect">
-            <a:avLst/>
-          </a:prstGeom>
-        </p:spPr>
-      </p:pic>
-      <p:sp>
-        <p:nvSpPr>
-          <p:cNvPr id="12" name="Title 1"/>
-          <p:cNvSpPr txBox="1">
-            <a:spLocks noGrp="1"/>
-          </p:cNvSpPr>
-          <p:nvPr>
-            <p:ph type="title" idx="4294967295"/>
-          </p:nvPr>
-        </p:nvSpPr>
-        <p:spPr>
-          <a:xfrm>
-            <a:off x="810584" y="2982149"/>
-            <a:ext cx="6314017" cy="600075"/>
-          </a:xfrm>
-          <a:prstGeom prst="rect">
-            <a:avLst/>
-          </a:prstGeom>
-          <a:noFill/>
-          <a:ln>
-            <a:noFill/>
-            <a:prstDash/>
-          </a:ln>
-          <a:effectLst/>
-        </p:spPr>
-        <p:txBody>
-          <a:bodyPr rot="0" spcFirstLastPara="0" vertOverflow="overflow" horzOverflow="overflow" vert="horz" wrap="square" lIns="91440" tIns="45720" rIns="91440" bIns="45720" numCol="1" spcCol="0" rtlCol="0" fromWordArt="0" anchor="b" anchorCtr="0" forceAA="0" compatLnSpc="1">
-            <a:prstTxWarp prst="textNoShape">
-              <a:avLst/>
-            </a:prstTxWarp>
-            <a:normAutofit fontScale="90000"/>
-          </a:bodyPr>
-          <a:lstStyle>
-            <a:lvl1pPr algn="ctr" defTabSz="914400" rtl="0" eaLnBrk="1" latinLnBrk="0" hangingPunct="1">
-              <a:lnSpc>
-                <a:spcPct val="90000"/>
-              </a:lnSpc>
-              <a:spcBef>
-                <a:spcPct val="0"/>
-              </a:spcBef>
-              <a:buNone/>
-              <a:defRPr sz="4400" b="0" i="0" kern="1200" baseline="0">
-                <a:solidFill>
-                  <a:schemeClr val="tx1"/>
-                </a:solidFill>
-                <a:latin typeface="Segoe UI Light" charset="0"/>
-                <a:ea typeface="Segoe UI Light" charset="0"/>
-                <a:cs typeface="Segoe UI Light" charset="0"/>
-              </a:defRPr>
-            </a:lvl1pPr>
-          </a:lstStyle>
-          <a:p>
-            <a:pPr marL="0" marR="0" lvl="0" indent="0" algn="l" defTabSz="914400" rtl="0" eaLnBrk="1" fontAlgn="auto" latinLnBrk="0" hangingPunct="1">
-              <a:lnSpc>
-                <a:spcPct val="90000"/>
-              </a:lnSpc>
-              <a:spcBef>
-                <a:spcPct val="0"/>
-              </a:spcBef>
-              <a:spcAft>
-                <a:spcPts val="0"/>
-              </a:spcAft>
-              <a:buClrTx/>
-              <a:buSzTx/>
-              <a:buFontTx/>
-              <a:buNone/>
-              <a:tabLst/>
-              <a:defRPr/>
-            </a:pPr>
-            <a:r>
-              <a:rPr kumimoji="0" lang="en-US" sz="4400" b="0" i="0" u="none" strike="noStrike" kern="1200" cap="none" spc="0" normalizeH="0" baseline="0" noProof="0">
-                <a:ln>
-                  <a:noFill/>
-                </a:ln>
-                <a:solidFill>
-                  <a:srgbClr val="F3C910"/>
-                </a:solidFill>
-                <a:effectLst/>
-                <a:uLnTx/>
-                <a:uFillTx/>
-                <a:latin typeface="Segoe UI Light" charset="0"/>
-                <a:ea typeface="Segoe UI Light" charset="0"/>
-                <a:cs typeface="Segoe UI Light" charset="0"/>
-              </a:rPr>
-              <a:t>Dashboard_Kerinci_Utama</a:t>
-            </a:r>
-            <a:endParaRPr kumimoji="0" lang="en-US" sz="4400" b="0" i="0" u="none" strike="noStrike" kern="1200" cap="none" spc="0" normalizeH="0" baseline="0" noProof="0" dirty="0">
-              <a:ln>
-                <a:noFill/>
-              </a:ln>
-              <a:solidFill>
-                <a:srgbClr val="F3C910"/>
-              </a:solidFill>
-              <a:effectLst/>
-              <a:uLnTx/>
-              <a:uFillTx/>
-              <a:latin typeface="Segoe UI Light" charset="0"/>
-              <a:ea typeface="Segoe UI Light" charset="0"/>
-              <a:cs typeface="Segoe UI Light" charset="0"/>
-            </a:endParaRPr>
-          </a:p>
-        </p:txBody>
-      </p:sp>
-      <p:sp>
-        <p:nvSpPr>
-          <p:cNvPr id="13" name="Text Placeholder 2"/>
-          <p:cNvSpPr txBox="1">
-            <a:spLocks/>
-          </p:cNvSpPr>
-          <p:nvPr/>
-        </p:nvSpPr>
-        <p:spPr>
-          <a:xfrm>
-            <a:off x="853448" y="3658761"/>
-            <a:ext cx="1488017" cy="253470"/>
-          </a:xfrm>
-          <a:prstGeom prst="rect">
-            <a:avLst/>
-          </a:prstGeom>
-        </p:spPr>
-        <p:txBody>
-          <a:bodyPr vert="horz" lIns="91440" tIns="45720" rIns="91440" bIns="45720" rtlCol="0">
-            <a:normAutofit lnSpcReduction="10000"/>
-          </a:bodyPr>
-          <a:lstStyle>
-            <a:lvl1pPr marL="0" indent="0" algn="ctr" defTabSz="914400" rtl="0" eaLnBrk="1" latinLnBrk="0" hangingPunct="1">
-              <a:lnSpc>
-                <a:spcPct val="90000"/>
-              </a:lnSpc>
-              <a:spcBef>
-                <a:spcPts val="1000"/>
-              </a:spcBef>
-              <a:buFont typeface="Arial"/>
-              <a:buNone/>
-              <a:defRPr sz="1200" b="0" i="0" u="sng" kern="1200">
-                <a:solidFill>
-                  <a:schemeClr val="tx1"/>
-                </a:solidFill>
-                <a:latin typeface="Segoe UI" charset="0"/>
-                <a:ea typeface="Segoe UI" charset="0"/>
-                <a:cs typeface="Segoe UI" charset="0"/>
-              </a:defRPr>
-            </a:lvl1pPr>
-            <a:lvl2pPr marL="457200" indent="0" algn="ctr" defTabSz="914400" rtl="0" eaLnBrk="1" latinLnBrk="0" hangingPunct="1">
-              <a:lnSpc>
-                <a:spcPct val="90000"/>
-              </a:lnSpc>
-              <a:spcBef>
-                <a:spcPts val="500"/>
-              </a:spcBef>
-              <a:buFont typeface="Arial"/>
-              <a:buNone/>
-              <a:defRPr sz="2000" kern="1200">
-                <a:solidFill>
-                  <a:schemeClr val="tx1">
-                    <a:tint val="75000"/>
-                  </a:schemeClr>
-                </a:solidFill>
-                <a:latin typeface="+mn-lt"/>
-                <a:ea typeface="+mn-ea"/>
-                <a:cs typeface="+mn-cs"/>
-              </a:defRPr>
-            </a:lvl2pPr>
-            <a:lvl3pPr marL="914400" indent="0" algn="ctr" defTabSz="914400" rtl="0" eaLnBrk="1" latinLnBrk="0" hangingPunct="1">
-              <a:lnSpc>
-                <a:spcPct val="90000"/>
-              </a:lnSpc>
-              <a:spcBef>
-                <a:spcPts val="500"/>
-              </a:spcBef>
-              <a:buFont typeface="Arial"/>
-              <a:buNone/>
-              <a:defRPr sz="1800" kern="1200">
-                <a:solidFill>
-                  <a:schemeClr val="tx1">
-                    <a:tint val="75000"/>
-                  </a:schemeClr>
-                </a:solidFill>
-                <a:latin typeface="+mn-lt"/>
-                <a:ea typeface="+mn-ea"/>
-                <a:cs typeface="+mn-cs"/>
-              </a:defRPr>
-            </a:lvl3pPr>
-            <a:lvl4pPr marL="1371600" indent="0" algn="ctr" defTabSz="914400" rtl="0" eaLnBrk="1" latinLnBrk="0" hangingPunct="1">
-              <a:lnSpc>
-                <a:spcPct val="90000"/>
-              </a:lnSpc>
-              <a:spcBef>
-                <a:spcPts val="500"/>
-              </a:spcBef>
-              <a:buFont typeface="Arial"/>
-              <a:buNone/>
-              <a:defRPr sz="1600" kern="1200">
-                <a:solidFill>
-                  <a:schemeClr val="tx1">
-                    <a:tint val="75000"/>
-                  </a:schemeClr>
-                </a:solidFill>
-                <a:latin typeface="+mn-lt"/>
-                <a:ea typeface="+mn-ea"/>
-                <a:cs typeface="+mn-cs"/>
-              </a:defRPr>
-            </a:lvl4pPr>
-            <a:lvl5pPr marL="1828800" indent="0" algn="ctr" defTabSz="914400" rtl="0" eaLnBrk="1" latinLnBrk="0" hangingPunct="1">
-              <a:lnSpc>
-                <a:spcPct val="90000"/>
-              </a:lnSpc>
-              <a:spcBef>
-                <a:spcPts val="500"/>
-              </a:spcBef>
-              <a:buFont typeface="Arial"/>
-              <a:buNone/>
-              <a:defRPr sz="1600" kern="1200">
-                <a:solidFill>
-                  <a:schemeClr val="tx1">
-                    <a:tint val="75000"/>
-                  </a:schemeClr>
-                </a:solidFill>
-                <a:latin typeface="+mn-lt"/>
-                <a:ea typeface="+mn-ea"/>
-                <a:cs typeface="+mn-cs"/>
-              </a:defRPr>
-            </a:lvl5pPr>
-            <a:lvl6pPr marL="2286000" indent="0" algn="ctr" defTabSz="914400" rtl="0" eaLnBrk="1" latinLnBrk="0" hangingPunct="1">
-              <a:lnSpc>
-                <a:spcPct val="90000"/>
-              </a:lnSpc>
-              <a:spcBef>
-                <a:spcPts val="500"/>
-              </a:spcBef>
-              <a:buFont typeface="Arial"/>
-              <a:buNone/>
-              <a:defRPr sz="1600" kern="1200">
-                <a:solidFill>
-                  <a:schemeClr val="tx1">
-                    <a:tint val="75000"/>
-                  </a:schemeClr>
-                </a:solidFill>
-                <a:latin typeface="+mn-lt"/>
-                <a:ea typeface="+mn-ea"/>
-                <a:cs typeface="+mn-cs"/>
-              </a:defRPr>
-            </a:lvl6pPr>
-            <a:lvl7pPr marL="2743200" indent="0" algn="ctr" defTabSz="914400" rtl="0" eaLnBrk="1" latinLnBrk="0" hangingPunct="1">
-              <a:lnSpc>
-                <a:spcPct val="90000"/>
-              </a:lnSpc>
-              <a:spcBef>
-                <a:spcPts val="500"/>
-              </a:spcBef>
-              <a:buFont typeface="Arial"/>
-              <a:buNone/>
-              <a:defRPr sz="1600" kern="1200">
-                <a:solidFill>
-                  <a:schemeClr val="tx1">
-                    <a:tint val="75000"/>
-                  </a:schemeClr>
-                </a:solidFill>
-                <a:latin typeface="+mn-lt"/>
-                <a:ea typeface="+mn-ea"/>
-                <a:cs typeface="+mn-cs"/>
-              </a:defRPr>
-            </a:lvl7pPr>
-            <a:lvl8pPr marL="3200400" indent="0" algn="ctr" defTabSz="914400" rtl="0" eaLnBrk="1" latinLnBrk="0" hangingPunct="1">
-              <a:lnSpc>
-                <a:spcPct val="90000"/>
-              </a:lnSpc>
-              <a:spcBef>
-                <a:spcPts val="500"/>
-              </a:spcBef>
-              <a:buFont typeface="Arial"/>
-              <a:buNone/>
-              <a:defRPr sz="1600" kern="1200">
-                <a:solidFill>
-                  <a:schemeClr val="tx1">
-                    <a:tint val="75000"/>
-                  </a:schemeClr>
-                </a:solidFill>
-                <a:latin typeface="+mn-lt"/>
-                <a:ea typeface="+mn-ea"/>
-                <a:cs typeface="+mn-cs"/>
-              </a:defRPr>
-            </a:lvl8pPr>
-            <a:lvl9pPr marL="3657600" indent="0" algn="ctr" defTabSz="914400" rtl="0" eaLnBrk="1" latinLnBrk="0" hangingPunct="1">
-              <a:lnSpc>
-                <a:spcPct val="90000"/>
-              </a:lnSpc>
-              <a:spcBef>
-                <a:spcPts val="500"/>
-              </a:spcBef>
-              <a:buFont typeface="Arial"/>
-              <a:buNone/>
-              <a:defRPr sz="1600" kern="1200">
-                <a:solidFill>
-                  <a:schemeClr val="tx1">
-                    <a:tint val="75000"/>
-                  </a:schemeClr>
-                </a:solidFill>
-                <a:latin typeface="+mn-lt"/>
-                <a:ea typeface="+mn-ea"/>
-                <a:cs typeface="+mn-cs"/>
-              </a:defRPr>
-            </a:lvl9pPr>
-          </a:lstStyle>
-          <a:p>
-            <a:pPr algn="l"/>
-            <a:r>
-              <a:rPr lang="en-US" dirty="0">
-                <a:solidFill>
-                  <a:schemeClr val="bg1"/>
-                </a:solidFill>
-                <a:hlinkClick r:id="coverSlideHpLink"/>
-              </a:rPr>
-              <a:t>View in Power BI</a:t>
-            </a:r>
-            <a:endParaRPr lang="en-US" dirty="0">
-              <a:solidFill>
-                <a:schemeClr val="bg1"/>
-              </a:solidFill>
-            </a:endParaRPr>
-          </a:p>
-        </p:txBody>
-      </p:sp>
-      <p:sp>
-        <p:nvSpPr>
-          <p:cNvPr id="17" name="TextBox 16"/>
-          <p:cNvSpPr txBox="1"/>
-          <p:nvPr/>
-        </p:nvSpPr>
-        <p:spPr>
-          <a:xfrm>
-            <a:off x="832315" y="5823544"/>
-            <a:ext cx="2177716" cy="369332"/>
+            <a:off x="76200" y="0"/>
+            <a:ext cx="12020550" cy="6858000"/>
           </a:xfrm>
           <a:prstGeom prst="rect">
             <a:avLst/>
           </a:prstGeom>
           <a:noFill/>
         </p:spPr>
-        <p:txBody>
-          <a:bodyPr wrap="square" rtlCol="0">
-            <a:spAutoFit/>
-          </a:bodyPr>
-          <a:lstStyle/>
-          <a:p>
-            <a:r>
-              <a:rPr lang="en-US" sz="900" b="1" i="0" dirty="0">
-                <a:solidFill>
-                  <a:schemeClr val="bg1"/>
-                </a:solidFill>
-                <a:latin typeface="Segoe UI Semibold" charset="0"/>
-                <a:ea typeface="Segoe UI Semibold" charset="0"/>
-                <a:cs typeface="Segoe UI Semibold" charset="0"/>
-              </a:rPr>
-              <a:t>Downloaded at:</a:t>
-            </a:r>
-          </a:p>
-          <a:p>
-            <a:r>
-              <a:rPr lang="en-US" sz="900" b="0" i="0" dirty="0">
-                <a:solidFill>
-                  <a:schemeClr val="bg1"/>
-                </a:solidFill>
-                <a:latin typeface="Segoe UI" charset="0"/>
-                <a:ea typeface="Segoe UI" charset="0"/>
-                <a:cs typeface="Segoe UI" charset="0"/>
-              </a:rPr>
-              <a:t>10/21/2026 2:08:02 PM UTC</a:t>
-            </a:r>
-          </a:p>
-        </p:txBody>
-      </p:sp>
-      <p:sp>
-        <p:nvSpPr>
-          <p:cNvPr id="10" name="TextBox 9"/>
-          <p:cNvSpPr txBox="1"/>
-          <p:nvPr/>
-        </p:nvSpPr>
-        <p:spPr>
-          <a:xfrm>
-            <a:off x="828512" y="5407903"/>
-            <a:ext cx="2177716" cy="369332"/>
-          </a:xfrm>
-          <a:prstGeom prst="rect">
-            <a:avLst/>
-          </a:prstGeom>
-          <a:noFill/>
-        </p:spPr>
-        <p:txBody>
-          <a:bodyPr wrap="square" rtlCol="0">
-            <a:spAutoFit/>
-          </a:bodyPr>
-          <a:lstStyle/>
-          <a:p>
-            <a:r>
-              <a:rPr lang="en-US" sz="900" b="1" dirty="0">
-                <a:solidFill>
-                  <a:schemeClr val="bg1"/>
-                </a:solidFill>
-                <a:latin typeface="Segoe UI Semibold" charset="0"/>
-                <a:ea typeface="Segoe UI Semibold" charset="0"/>
-                <a:cs typeface="Segoe UI Semibold" charset="0"/>
-              </a:rPr>
-              <a:t>Last data refresh:</a:t>
-            </a:r>
-            <a:endParaRPr lang="en-US" sz="900" b="1" i="0" dirty="0">
-              <a:solidFill>
-                <a:schemeClr val="bg1"/>
-              </a:solidFill>
-              <a:latin typeface="Segoe UI Semibold" charset="0"/>
-              <a:ea typeface="Segoe UI Semibold" charset="0"/>
-              <a:cs typeface="Segoe UI Semibold" charset="0"/>
-            </a:endParaRPr>
-          </a:p>
-          <a:p>
-            <a:r>
-              <a:rPr lang="en-US" sz="900" dirty="0">
-                <a:solidFill>
-                  <a:schemeClr val="bg1"/>
-                </a:solidFill>
-                <a:latin typeface="Segoe UI" charset="0"/>
-                <a:ea typeface="Segoe UI" charset="0"/>
-                <a:cs typeface="Segoe UI" charset="0"/>
-              </a:rPr>
-              <a:t>10/20/2026 5:58:13 AM UTC</a:t>
-            </a:r>
-            <a:endParaRPr lang="en-US" sz="900" b="0" i="0" dirty="0">
-              <a:solidFill>
-                <a:schemeClr val="bg1"/>
-              </a:solidFill>
-              <a:latin typeface="Segoe UI" charset="0"/>
-              <a:ea typeface="Segoe UI" charset="0"/>
-              <a:cs typeface="Segoe UI" charset="0"/>
-            </a:endParaRPr>
-          </a:p>
-        </p:txBody>
-      </p:sp>
-      <p:pic>
-        <p:nvPicPr>
-          <p:cNvPr id="16" name="Picture 15" descr="Microsoft Power BI"/>
-          <p:cNvPicPr>
-            <a:picLocks noChangeAspect="1"/>
-          </p:cNvPicPr>
-          <p:nvPr/>
-        </p:nvPicPr>
-        <p:blipFill>
-          <a:blip r:embed="rId4">
-            <a:extLst>
-              <a:ext uri="{28A0092B-C50C-407E-A947-70E740481C1C}">
-                <a14:useLocalDpi xmlns:a14="http://schemas.microsoft.com/office/drawing/2010/main" val="0"/>
-              </a:ext>
-            </a:extLst>
-          </a:blip>
-          <a:stretch>
-            <a:fillRect/>
-          </a:stretch>
-        </p:blipFill>
-        <p:spPr>
-          <a:xfrm>
-            <a:off x="923544" y="722376"/>
-            <a:ext cx="1490690" cy="245805"/>
-          </a:xfrm>
-          <a:prstGeom prst="rect">
-            <a:avLst/>
-          </a:prstGeom>
-        </p:spPr>
       </p:pic>
-      <p:pic>
-        <p:nvPicPr>
-          <p:cNvPr id="18" name="Picture 17">
-            <a:extLst>
-              <a:ext uri="{C183D7F6-B498-43B3-948B-1728B52AA6E4}">
-                <adec:decorative xmlns:adec="http://schemas.microsoft.com/office/drawing/2017/decorative" val="1"/>
-              </a:ext>
-            </a:extLst>
-          </p:cNvPr>
-          <p:cNvPicPr>
-            <a:picLocks noChangeAspect="1"/>
-          </p:cNvPicPr>
-          <p:nvPr/>
-        </p:nvPicPr>
-        <p:blipFill>
-          <a:blip r:embed="rId5">
-            <a:extLst>
-              <a:ext uri="{28A0092B-C50C-407E-A947-70E740481C1C}">
-                <a14:useLocalDpi xmlns:a14="http://schemas.microsoft.com/office/drawing/2010/main" val="0"/>
-              </a:ext>
-            </a:extLst>
-          </a:blip>
-          <a:stretch>
-            <a:fillRect/>
-          </a:stretch>
-        </p:blipFill>
-        <p:spPr>
-          <a:xfrm>
-            <a:off x="2139696" y="3694176"/>
-            <a:ext cx="162027" cy="153025"/>
-          </a:xfrm>
-          <a:prstGeom prst="rect">
-            <a:avLst/>
-          </a:prstGeom>
-        </p:spPr>
-      </p:pic>
+      <p:sp>
+        <p:nvSpPr>
+          <p:cNvPr id="4" name="Title" hidden="1"/>
+          <p:cNvSpPr>
+            <a:spLocks noGrp="1"/>
+          </p:cNvSpPr>
+          <p:nvPr>
+            <p:ph type="title"/>
+          </p:nvPr>
+        </p:nvSpPr>
+        <p:spPr/>
+        <p:txBody>
+          <a:bodyPr/>
+          <a:lstStyle/>
+          <a:p>
+            <a:r>
+              <a:t>Overview</a:t>
+            </a:r>
+          </a:p>
+        </p:txBody>
+      </p:sp>
     </p:spTree>
-    <p:extLst>
-      <p:ext uri="{BB962C8B-B14F-4D97-AF65-F5344CB8AC3E}">
-        <p14:creationId xmlns:p14="http://schemas.microsoft.com/office/powerpoint/2010/main" val="7630729"/>
-      </p:ext>
-    </p:extLst>
   </p:cSld>
   <p:clrMapOvr>
     <a:masterClrMapping/>
@@ -5784,7 +5308,7 @@
 </file>
 
 <file path=ppt/slides/slide2.xml><?xml version="1.0" encoding="utf-8"?>
-<p:sld xmlns:p="http://schemas.openxmlformats.org/presentationml/2006/main">
+<p:sld xmlns:a="http://schemas.openxmlformats.org/drawingml/2006/main" xmlns:r="http://schemas.openxmlformats.org/officeDocument/2006/relationships" xmlns:p="http://schemas.openxmlformats.org/presentationml/2006/main">
   <p:cSld>
     <p:spTree>
       <p:nvGrpSpPr>
@@ -5792,39 +5316,46 @@
         <p:cNvGrpSpPr/>
         <p:nvPr/>
       </p:nvGrpSpPr>
-      <p:grpSpPr/>
+      <p:grpSpPr>
+        <a:xfrm>
+          <a:off x="0" y="0"/>
+          <a:ext cx="0" cy="0"/>
+          <a:chOff x="0" y="0"/>
+          <a:chExt cx="0" cy="0"/>
+        </a:xfrm>
+      </p:grpSpPr>
       <p:pic>
         <p:nvPicPr>
-          <p:cNvPr id="3" name="Picture" title="This slide contains the following visuals: Customer Aktif ,Total Revenue ,Gross Margin ,textbox ,Pencapaian Target ,advancedSlicerVisual ,pageNavigator ,Top 10 Customer ,Aktual vs Target per Tahun ,Tren Revenue &amp; Order ,Kontribusi Revenue Per Region ,Revenue Per Material. Please refer to the notes on this slide for details">
-            <a:hlinkClick xmlns:r="http://schemas.openxmlformats.org/officeDocument/2006/relationships" xmlns:a="http://schemas.openxmlformats.org/drawingml/2006/main" r:id="RelId0"/>
+          <p:cNvPr id="3" name="Picture" title="This slide contains the following visuals: textbox ,Province Slicer ,shapeMap ,pageNavigator ,level_nav ,slicer ,year_slicer ,Sebaran Penjualan Provinsi ,Layer. Please refer to the notes on this slide for details">
+            <a:hlinkClick r:id="rId3"/>
           </p:cNvPr>
           <p:cNvPicPr>
-            <a:picLocks xmlns:a="http://schemas.openxmlformats.org/drawingml/2006/main" noChangeAspect="1"/>
+            <a:picLocks noChangeAspect="1"/>
           </p:cNvPicPr>
           <p:nvPr/>
         </p:nvPicPr>
         <p:blipFill>
-          <a:blip xmlns:r="http://schemas.openxmlformats.org/officeDocument/2006/relationships" xmlns:a="http://schemas.openxmlformats.org/drawingml/2006/main" r:embed="imgId190815180"/>
-          <a:stretch xmlns:a="http://schemas.openxmlformats.org/drawingml/2006/main">
+          <a:blip r:embed="rId4"/>
+          <a:stretch>
             <a:fillRect/>
           </a:stretch>
         </p:blipFill>
         <p:spPr>
-          <a:xfrm xmlns:a="http://schemas.openxmlformats.org/drawingml/2006/main">
+          <a:xfrm>
             <a:off x="76200" y="0"/>
             <a:ext cx="12020550" cy="6858000"/>
           </a:xfrm>
-          <a:prstGeom xmlns:a="http://schemas.openxmlformats.org/drawingml/2006/main" prst="rect">
+          <a:prstGeom prst="rect">
             <a:avLst/>
           </a:prstGeom>
-          <a:noFill xmlns:a="http://schemas.openxmlformats.org/drawingml/2006/main"/>
+          <a:noFill/>
         </p:spPr>
       </p:pic>
       <p:sp>
         <p:nvSpPr>
           <p:cNvPr id="4" name="Title" hidden="1"/>
           <p:cNvSpPr>
-            <a:spLocks xmlns:a="http://schemas.openxmlformats.org/drawingml/2006/main" noGrp="1"/>
+            <a:spLocks noGrp="1"/>
           </p:cNvSpPr>
           <p:nvPr>
             <p:ph type="title"/>
@@ -5832,25 +5363,25 @@
         </p:nvSpPr>
         <p:spPr/>
         <p:txBody>
-          <a:bodyPr xmlns:a="http://schemas.openxmlformats.org/drawingml/2006/main"/>
-          <a:lstStyle xmlns:a="http://schemas.openxmlformats.org/drawingml/2006/main"/>
-          <a:p xmlns:a="http://schemas.openxmlformats.org/drawingml/2006/main">
-            <a:r>
-              <a:t>Overview</a:t>
+          <a:bodyPr/>
+          <a:lstStyle/>
+          <a:p>
+            <a:r>
+              <a:t>Map</a:t>
             </a:r>
           </a:p>
         </p:txBody>
       </p:sp>
     </p:spTree>
-    <p:clrMapOvr>
-      <a:masterClrMapping xmlns:a="http://schemas.openxmlformats.org/drawingml/2006/main"/>
-    </p:clrMapOvr>
   </p:cSld>
+  <p:clrMapOvr>
+    <a:masterClrMapping/>
+  </p:clrMapOvr>
 </p:sld>
 </file>
 
 <file path=ppt/slides/slide3.xml><?xml version="1.0" encoding="utf-8"?>
-<p:sld xmlns:p="http://schemas.openxmlformats.org/presentationml/2006/main">
+<p:sld xmlns:a="http://schemas.openxmlformats.org/drawingml/2006/main" xmlns:r="http://schemas.openxmlformats.org/officeDocument/2006/relationships" xmlns:p="http://schemas.openxmlformats.org/presentationml/2006/main">
   <p:cSld>
     <p:spTree>
       <p:nvGrpSpPr>
@@ -5858,39 +5389,46 @@
         <p:cNvGrpSpPr/>
         <p:nvPr/>
       </p:nvGrpSpPr>
-      <p:grpSpPr/>
+      <p:grpSpPr>
+        <a:xfrm>
+          <a:off x="0" y="0"/>
+          <a:ext cx="0" cy="0"/>
+          <a:chOff x="0" y="0"/>
+          <a:chExt cx="0" cy="0"/>
+        </a:xfrm>
+      </p:grpSpPr>
       <p:pic>
         <p:nvPicPr>
-          <p:cNvPr id="3" name="Picture" title="This slide contains the following visuals: textbox ,Province Slicer ,shapeMap ,pageNavigator ,level_nav ,slicer ,year_slicer ,Sebaran Penjualan Provinsi ,Layer. Please refer to the notes on this slide for details">
-            <a:hlinkClick xmlns:r="http://schemas.openxmlformats.org/officeDocument/2006/relationships" xmlns:a="http://schemas.openxmlformats.org/drawingml/2006/main" r:id="RelId1"/>
+          <p:cNvPr id="3" name="Picture" title="This slide contains the following visuals: Revenue per Provinsi ,Dimensions slicer ,year_slicer ,pageNavigator ,Revenue vs Margin ,textbox ,pivotTable. Please refer to the notes on this slide for details">
+            <a:hlinkClick r:id="rId3"/>
           </p:cNvPr>
           <p:cNvPicPr>
-            <a:picLocks xmlns:a="http://schemas.openxmlformats.org/drawingml/2006/main" noChangeAspect="1"/>
+            <a:picLocks noChangeAspect="1"/>
           </p:cNvPicPr>
           <p:nvPr/>
         </p:nvPicPr>
         <p:blipFill>
-          <a:blip xmlns:r="http://schemas.openxmlformats.org/officeDocument/2006/relationships" xmlns:a="http://schemas.openxmlformats.org/drawingml/2006/main" r:embed="imgId190815176"/>
-          <a:stretch xmlns:a="http://schemas.openxmlformats.org/drawingml/2006/main">
+          <a:blip r:embed="rId4"/>
+          <a:stretch>
             <a:fillRect/>
           </a:stretch>
         </p:blipFill>
         <p:spPr>
-          <a:xfrm xmlns:a="http://schemas.openxmlformats.org/drawingml/2006/main">
+          <a:xfrm>
             <a:off x="76200" y="0"/>
             <a:ext cx="12020550" cy="6858000"/>
           </a:xfrm>
-          <a:prstGeom xmlns:a="http://schemas.openxmlformats.org/drawingml/2006/main" prst="rect">
+          <a:prstGeom prst="rect">
             <a:avLst/>
           </a:prstGeom>
-          <a:noFill xmlns:a="http://schemas.openxmlformats.org/drawingml/2006/main"/>
+          <a:noFill/>
         </p:spPr>
       </p:pic>
       <p:sp>
         <p:nvSpPr>
           <p:cNvPr id="4" name="Title" hidden="1"/>
           <p:cNvSpPr>
-            <a:spLocks xmlns:a="http://schemas.openxmlformats.org/drawingml/2006/main" noGrp="1"/>
+            <a:spLocks noGrp="1"/>
           </p:cNvSpPr>
           <p:nvPr>
             <p:ph type="title"/>
@@ -5898,25 +5436,25 @@
         </p:nvSpPr>
         <p:spPr/>
         <p:txBody>
-          <a:bodyPr xmlns:a="http://schemas.openxmlformats.org/drawingml/2006/main"/>
-          <a:lstStyle xmlns:a="http://schemas.openxmlformats.org/drawingml/2006/main"/>
-          <a:p xmlns:a="http://schemas.openxmlformats.org/drawingml/2006/main">
-            <a:r>
-              <a:t>Map</a:t>
+          <a:bodyPr/>
+          <a:lstStyle/>
+          <a:p>
+            <a:r>
+              <a:t>Performance</a:t>
             </a:r>
           </a:p>
         </p:txBody>
       </p:sp>
     </p:spTree>
-    <p:clrMapOvr>
-      <a:masterClrMapping xmlns:a="http://schemas.openxmlformats.org/drawingml/2006/main"/>
-    </p:clrMapOvr>
   </p:cSld>
+  <p:clrMapOvr>
+    <a:masterClrMapping/>
+  </p:clrMapOvr>
 </p:sld>
 </file>
 
 <file path=ppt/slides/slide4.xml><?xml version="1.0" encoding="utf-8"?>
-<p:sld xmlns:p="http://schemas.openxmlformats.org/presentationml/2006/main">
+<p:sld xmlns:a="http://schemas.openxmlformats.org/drawingml/2006/main" xmlns:r="http://schemas.openxmlformats.org/officeDocument/2006/relationships" xmlns:p="http://schemas.openxmlformats.org/presentationml/2006/main">
   <p:cSld>
     <p:spTree>
       <p:nvGrpSpPr>
@@ -5924,39 +5462,46 @@
         <p:cNvGrpSpPr/>
         <p:nvPr/>
       </p:nvGrpSpPr>
-      <p:grpSpPr/>
+      <p:grpSpPr>
+        <a:xfrm>
+          <a:off x="0" y="0"/>
+          <a:ext cx="0" cy="0"/>
+          <a:chOff x="0" y="0"/>
+          <a:chExt cx="0" cy="0"/>
+        </a:xfrm>
+      </p:grpSpPr>
       <p:pic>
         <p:nvPicPr>
-          <p:cNvPr id="3" name="Picture" title="This slide contains the following visuals: Revenue per Provinsi ,Dimensions slicer ,year_slicer ,pageNavigator ,Revenue vs Margin ,textbox ,pivotTable. Please refer to the notes on this slide for details">
-            <a:hlinkClick xmlns:r="http://schemas.openxmlformats.org/officeDocument/2006/relationships" xmlns:a="http://schemas.openxmlformats.org/drawingml/2006/main" r:id="RelId2"/>
+          <p:cNvPr id="3" name="Picture" title="This slide contains the following visuals: cardVisual ,year_slicer ,textbox ,Selisih Terhadap Target ,cardVisual ,Jembatan Revenue: Tahun Lalu ke Tahun Ini ,cardVisual ,cardVisual ,Aktual vs Target per Material ,pageNavigator ,Penyebab Perubahan Revenue. Please refer to the notes on this slide for details">
+            <a:hlinkClick r:id="rId3"/>
           </p:cNvPr>
           <p:cNvPicPr>
-            <a:picLocks xmlns:a="http://schemas.openxmlformats.org/drawingml/2006/main" noChangeAspect="1"/>
+            <a:picLocks noChangeAspect="1"/>
           </p:cNvPicPr>
           <p:nvPr/>
         </p:nvPicPr>
         <p:blipFill>
-          <a:blip xmlns:r="http://schemas.openxmlformats.org/officeDocument/2006/relationships" xmlns:a="http://schemas.openxmlformats.org/drawingml/2006/main" r:embed="imgId190815179"/>
-          <a:stretch xmlns:a="http://schemas.openxmlformats.org/drawingml/2006/main">
+          <a:blip r:embed="rId4"/>
+          <a:stretch>
             <a:fillRect/>
           </a:stretch>
         </p:blipFill>
         <p:spPr>
-          <a:xfrm xmlns:a="http://schemas.openxmlformats.org/drawingml/2006/main">
+          <a:xfrm>
             <a:off x="76200" y="0"/>
             <a:ext cx="12020550" cy="6858000"/>
           </a:xfrm>
-          <a:prstGeom xmlns:a="http://schemas.openxmlformats.org/drawingml/2006/main" prst="rect">
+          <a:prstGeom prst="rect">
             <a:avLst/>
           </a:prstGeom>
-          <a:noFill xmlns:a="http://schemas.openxmlformats.org/drawingml/2006/main"/>
+          <a:noFill/>
         </p:spPr>
       </p:pic>
       <p:sp>
         <p:nvSpPr>
           <p:cNvPr id="4" name="Title" hidden="1"/>
           <p:cNvSpPr>
-            <a:spLocks xmlns:a="http://schemas.openxmlformats.org/drawingml/2006/main" noGrp="1"/>
+            <a:spLocks noGrp="1"/>
           </p:cNvSpPr>
           <p:nvPr>
             <p:ph type="title"/>
@@ -5964,25 +5509,25 @@
         </p:nvSpPr>
         <p:spPr/>
         <p:txBody>
-          <a:bodyPr xmlns:a="http://schemas.openxmlformats.org/drawingml/2006/main"/>
-          <a:lstStyle xmlns:a="http://schemas.openxmlformats.org/drawingml/2006/main"/>
-          <a:p xmlns:a="http://schemas.openxmlformats.org/drawingml/2006/main">
-            <a:r>
-              <a:t>Performance</a:t>
+          <a:bodyPr/>
+          <a:lstStyle/>
+          <a:p>
+            <a:r>
+              <a:t>Target</a:t>
             </a:r>
           </a:p>
         </p:txBody>
       </p:sp>
     </p:spTree>
-    <p:clrMapOvr>
-      <a:masterClrMapping xmlns:a="http://schemas.openxmlformats.org/drawingml/2006/main"/>
-    </p:clrMapOvr>
   </p:cSld>
+  <p:clrMapOvr>
+    <a:masterClrMapping/>
+  </p:clrMapOvr>
 </p:sld>
 </file>
 
 <file path=ppt/slides/slide5.xml><?xml version="1.0" encoding="utf-8"?>
-<p:sld xmlns:p="http://schemas.openxmlformats.org/presentationml/2006/main">
+<p:sld xmlns:a="http://schemas.openxmlformats.org/drawingml/2006/main" xmlns:r="http://schemas.openxmlformats.org/officeDocument/2006/relationships" xmlns:p="http://schemas.openxmlformats.org/presentationml/2006/main">
   <p:cSld>
     <p:spTree>
       <p:nvGrpSpPr>
@@ -5990,39 +5535,46 @@
         <p:cNvGrpSpPr/>
         <p:nvPr/>
       </p:nvGrpSpPr>
-      <p:grpSpPr/>
+      <p:grpSpPr>
+        <a:xfrm>
+          <a:off x="0" y="0"/>
+          <a:ext cx="0" cy="0"/>
+          <a:chOff x="0" y="0"/>
+          <a:chExt cx="0" cy="0"/>
+        </a:xfrm>
+      </p:grpSpPr>
       <p:pic>
         <p:nvPicPr>
-          <p:cNvPr id="3" name="Picture" title="This slide contains the following visuals: cardVisual ,year_slicer ,textbox ,Selisih Terhadap Target ,cardVisual ,Jembatan Revenue: Tahun Lalu ke Tahun Ini ,cardVisual ,cardVisual ,Aktual vs Target per Material ,pageNavigator ,Penyebab Perubahan Revenue. Please refer to the notes on this slide for details">
-            <a:hlinkClick xmlns:r="http://schemas.openxmlformats.org/officeDocument/2006/relationships" xmlns:a="http://schemas.openxmlformats.org/drawingml/2006/main" r:id="RelId3"/>
+          <p:cNvPr id="3" name="Picture" title="This slide contains the following visuals: cardVisual ,pageNavigator ,cardVisual ,Peta Customer: Recency vs Nilai Belanja ,Tabel Ringkasan ,year_slicer ,Jumlah Customer per Segmen ,textbox ,cardVisual ,advancedSlicerVisual ,20 Costumer Beresiko Dengan Nilai Tertinggi ,Revenue per Segmen ,cardVisual. Please refer to the notes on this slide for details">
+            <a:hlinkClick r:id="rId3"/>
           </p:cNvPr>
           <p:cNvPicPr>
-            <a:picLocks xmlns:a="http://schemas.openxmlformats.org/drawingml/2006/main" noChangeAspect="1"/>
+            <a:picLocks noChangeAspect="1"/>
           </p:cNvPicPr>
           <p:nvPr/>
         </p:nvPicPr>
         <p:blipFill>
-          <a:blip xmlns:r="http://schemas.openxmlformats.org/officeDocument/2006/relationships" xmlns:a="http://schemas.openxmlformats.org/drawingml/2006/main" r:embed="imgId190815183"/>
-          <a:stretch xmlns:a="http://schemas.openxmlformats.org/drawingml/2006/main">
+          <a:blip r:embed="rId4"/>
+          <a:stretch>
             <a:fillRect/>
           </a:stretch>
         </p:blipFill>
         <p:spPr>
-          <a:xfrm xmlns:a="http://schemas.openxmlformats.org/drawingml/2006/main">
+          <a:xfrm>
             <a:off x="76200" y="0"/>
             <a:ext cx="12020550" cy="6858000"/>
           </a:xfrm>
-          <a:prstGeom xmlns:a="http://schemas.openxmlformats.org/drawingml/2006/main" prst="rect">
+          <a:prstGeom prst="rect">
             <a:avLst/>
           </a:prstGeom>
-          <a:noFill xmlns:a="http://schemas.openxmlformats.org/drawingml/2006/main"/>
+          <a:noFill/>
         </p:spPr>
       </p:pic>
       <p:sp>
         <p:nvSpPr>
           <p:cNvPr id="4" name="Title" hidden="1"/>
           <p:cNvSpPr>
-            <a:spLocks xmlns:a="http://schemas.openxmlformats.org/drawingml/2006/main" noGrp="1"/>
+            <a:spLocks noGrp="1"/>
           </p:cNvSpPr>
           <p:nvPr>
             <p:ph type="title"/>
@@ -6030,25 +5582,25 @@
         </p:nvSpPr>
         <p:spPr/>
         <p:txBody>
-          <a:bodyPr xmlns:a="http://schemas.openxmlformats.org/drawingml/2006/main"/>
-          <a:lstStyle xmlns:a="http://schemas.openxmlformats.org/drawingml/2006/main"/>
-          <a:p xmlns:a="http://schemas.openxmlformats.org/drawingml/2006/main">
-            <a:r>
-              <a:t>Target</a:t>
+          <a:bodyPr/>
+          <a:lstStyle/>
+          <a:p>
+            <a:r>
+              <a:t>Segmentation</a:t>
             </a:r>
           </a:p>
         </p:txBody>
       </p:sp>
     </p:spTree>
-    <p:clrMapOvr>
-      <a:masterClrMapping xmlns:a="http://schemas.openxmlformats.org/drawingml/2006/main"/>
-    </p:clrMapOvr>
   </p:cSld>
+  <p:clrMapOvr>
+    <a:masterClrMapping/>
+  </p:clrMapOvr>
 </p:sld>
 </file>
 
 <file path=ppt/slides/slide6.xml><?xml version="1.0" encoding="utf-8"?>
-<p:sld xmlns:p="http://schemas.openxmlformats.org/presentationml/2006/main">
+<p:sld xmlns:a="http://schemas.openxmlformats.org/drawingml/2006/main" xmlns:r="http://schemas.openxmlformats.org/officeDocument/2006/relationships" xmlns:p="http://schemas.openxmlformats.org/presentationml/2006/main">
   <p:cSld>
     <p:spTree>
       <p:nvGrpSpPr>
@@ -6056,39 +5608,46 @@
         <p:cNvGrpSpPr/>
         <p:nvPr/>
       </p:nvGrpSpPr>
-      <p:grpSpPr/>
+      <p:grpSpPr>
+        <a:xfrm>
+          <a:off x="0" y="0"/>
+          <a:ext cx="0" cy="0"/>
+          <a:chOff x="0" y="0"/>
+          <a:chExt cx="0" cy="0"/>
+        </a:xfrm>
+      </p:grpSpPr>
       <p:pic>
         <p:nvPicPr>
-          <p:cNvPr id="3" name="Picture" title="This slide contains the following visuals: cardVisual ,pageNavigator ,cardVisual ,Peta Customer: Recency vs Nilai Belanja ,Tabel Ringkasan ,year_slicer ,Jumlah Customer per Segmen ,textbox ,cardVisual ,advancedSlicerVisual ,20 Costumer Beresiko Dengan Nilai Tertinggi ,Revenue per Segmen ,cardVisual. Please refer to the notes on this slide for details">
-            <a:hlinkClick xmlns:r="http://schemas.openxmlformats.org/officeDocument/2006/relationships" xmlns:a="http://schemas.openxmlformats.org/drawingml/2006/main" r:id="RelId4"/>
+          <p:cNvPr id="3" name="Picture" title="This slide contains the following visuals: pageNavigator ,Retensi Customer per Cohort ,cardVisual ,textbox ,Ringkasan cohort ,Customer Baru per Tahun ,cardVisual ,Kurva Retensi per Cohort ,textbox ,cardVisual ,cardVisual ,Revenue per Cohort per Tahun. Please refer to the notes on this slide for details">
+            <a:hlinkClick r:id="rId3"/>
           </p:cNvPr>
           <p:cNvPicPr>
-            <a:picLocks xmlns:a="http://schemas.openxmlformats.org/drawingml/2006/main" noChangeAspect="1"/>
+            <a:picLocks noChangeAspect="1"/>
           </p:cNvPicPr>
           <p:nvPr/>
         </p:nvPicPr>
         <p:blipFill>
-          <a:blip xmlns:r="http://schemas.openxmlformats.org/officeDocument/2006/relationships" xmlns:a="http://schemas.openxmlformats.org/drawingml/2006/main" r:embed="imgId190815177"/>
-          <a:stretch xmlns:a="http://schemas.openxmlformats.org/drawingml/2006/main">
+          <a:blip r:embed="rId4"/>
+          <a:stretch>
             <a:fillRect/>
           </a:stretch>
         </p:blipFill>
         <p:spPr>
-          <a:xfrm xmlns:a="http://schemas.openxmlformats.org/drawingml/2006/main">
+          <a:xfrm>
             <a:off x="76200" y="0"/>
             <a:ext cx="12020550" cy="6858000"/>
           </a:xfrm>
-          <a:prstGeom xmlns:a="http://schemas.openxmlformats.org/drawingml/2006/main" prst="rect">
+          <a:prstGeom prst="rect">
             <a:avLst/>
           </a:prstGeom>
-          <a:noFill xmlns:a="http://schemas.openxmlformats.org/drawingml/2006/main"/>
+          <a:noFill/>
         </p:spPr>
       </p:pic>
       <p:sp>
         <p:nvSpPr>
           <p:cNvPr id="4" name="Title" hidden="1"/>
           <p:cNvSpPr>
-            <a:spLocks xmlns:a="http://schemas.openxmlformats.org/drawingml/2006/main" noGrp="1"/>
+            <a:spLocks noGrp="1"/>
           </p:cNvSpPr>
           <p:nvPr>
             <p:ph type="title"/>
@@ -6096,25 +5655,25 @@
         </p:nvSpPr>
         <p:spPr/>
         <p:txBody>
-          <a:bodyPr xmlns:a="http://schemas.openxmlformats.org/drawingml/2006/main"/>
-          <a:lstStyle xmlns:a="http://schemas.openxmlformats.org/drawingml/2006/main"/>
-          <a:p xmlns:a="http://schemas.openxmlformats.org/drawingml/2006/main">
-            <a:r>
-              <a:t>Segmentation</a:t>
+          <a:bodyPr/>
+          <a:lstStyle/>
+          <a:p>
+            <a:r>
+              <a:t>Cohort</a:t>
             </a:r>
           </a:p>
         </p:txBody>
       </p:sp>
     </p:spTree>
-    <p:clrMapOvr>
-      <a:masterClrMapping xmlns:a="http://schemas.openxmlformats.org/drawingml/2006/main"/>
-    </p:clrMapOvr>
   </p:cSld>
+  <p:clrMapOvr>
+    <a:masterClrMapping/>
+  </p:clrMapOvr>
 </p:sld>
 </file>
 
 <file path=ppt/slides/slide7.xml><?xml version="1.0" encoding="utf-8"?>
-<p:sld xmlns:p="http://schemas.openxmlformats.org/presentationml/2006/main">
+<p:sld xmlns:a="http://schemas.openxmlformats.org/drawingml/2006/main" xmlns:r="http://schemas.openxmlformats.org/officeDocument/2006/relationships" xmlns:p="http://schemas.openxmlformats.org/presentationml/2006/main">
   <p:cSld>
     <p:spTree>
       <p:nvGrpSpPr>
@@ -6122,39 +5681,46 @@
         <p:cNvGrpSpPr/>
         <p:nvPr/>
       </p:nvGrpSpPr>
-      <p:grpSpPr/>
+      <p:grpSpPr>
+        <a:xfrm>
+          <a:off x="0" y="0"/>
+          <a:ext cx="0" cy="0"/>
+          <a:chOff x="0" y="0"/>
+          <a:chExt cx="0" cy="0"/>
+        </a:xfrm>
+      </p:grpSpPr>
       <p:pic>
         <p:nvPicPr>
-          <p:cNvPr id="3" name="Picture" title="This slide contains the following visuals: pageNavigator ,Retensi Customer per Cohort ,cardVisual ,textbox ,Ringkasan cohort ,Customer Baru per Tahun ,cardVisual ,Kurva Retensi per Cohort ,textbox ,cardVisual ,cardVisual ,Revenue per Cohort per Tahun. Please refer to the notes on this slide for details">
-            <a:hlinkClick xmlns:r="http://schemas.openxmlformats.org/officeDocument/2006/relationships" xmlns:a="http://schemas.openxmlformats.org/drawingml/2006/main" r:id="RelId5"/>
+          <p:cNvPr id="3" name="Picture" title="This slide contains the following visuals: Proyeksi 2020 vs Target ,textbox ,cardVisual ,cardVisual ,Pembanding: Forecast Bawaan Power BI ,Revenue Bulanan dan Proyeksi Sampai Des 2020 (rentang 80%) ,Catatan Metode ,cardVisual ,cardVisual ,Proyeksi Bulanan Mar-Des 2020 ,pageNavigator. Please refer to the notes on this slide for details">
+            <a:hlinkClick r:id="rId3"/>
           </p:cNvPr>
           <p:cNvPicPr>
-            <a:picLocks xmlns:a="http://schemas.openxmlformats.org/drawingml/2006/main" noChangeAspect="1"/>
+            <a:picLocks noChangeAspect="1"/>
           </p:cNvPicPr>
           <p:nvPr/>
         </p:nvPicPr>
         <p:blipFill>
-          <a:blip xmlns:r="http://schemas.openxmlformats.org/officeDocument/2006/relationships" xmlns:a="http://schemas.openxmlformats.org/drawingml/2006/main" r:embed="imgId190815182"/>
-          <a:stretch xmlns:a="http://schemas.openxmlformats.org/drawingml/2006/main">
+          <a:blip r:embed="rId4"/>
+          <a:stretch>
             <a:fillRect/>
           </a:stretch>
         </p:blipFill>
         <p:spPr>
-          <a:xfrm xmlns:a="http://schemas.openxmlformats.org/drawingml/2006/main">
+          <a:xfrm>
             <a:off x="76200" y="0"/>
             <a:ext cx="12020550" cy="6858000"/>
           </a:xfrm>
-          <a:prstGeom xmlns:a="http://schemas.openxmlformats.org/drawingml/2006/main" prst="rect">
+          <a:prstGeom prst="rect">
             <a:avLst/>
           </a:prstGeom>
-          <a:noFill xmlns:a="http://schemas.openxmlformats.org/drawingml/2006/main"/>
+          <a:noFill/>
         </p:spPr>
       </p:pic>
       <p:sp>
         <p:nvSpPr>
           <p:cNvPr id="4" name="Title" hidden="1"/>
           <p:cNvSpPr>
-            <a:spLocks xmlns:a="http://schemas.openxmlformats.org/drawingml/2006/main" noGrp="1"/>
+            <a:spLocks noGrp="1"/>
           </p:cNvSpPr>
           <p:nvPr>
             <p:ph type="title"/>
@@ -6162,25 +5728,25 @@
         </p:nvSpPr>
         <p:spPr/>
         <p:txBody>
-          <a:bodyPr xmlns:a="http://schemas.openxmlformats.org/drawingml/2006/main"/>
-          <a:lstStyle xmlns:a="http://schemas.openxmlformats.org/drawingml/2006/main"/>
-          <a:p xmlns:a="http://schemas.openxmlformats.org/drawingml/2006/main">
-            <a:r>
-              <a:t>Cohort</a:t>
+          <a:bodyPr/>
+          <a:lstStyle/>
+          <a:p>
+            <a:r>
+              <a:t>Forecast</a:t>
             </a:r>
           </a:p>
         </p:txBody>
       </p:sp>
     </p:spTree>
-    <p:clrMapOvr>
-      <a:masterClrMapping xmlns:a="http://schemas.openxmlformats.org/drawingml/2006/main"/>
-    </p:clrMapOvr>
   </p:cSld>
+  <p:clrMapOvr>
+    <a:masterClrMapping/>
+  </p:clrMapOvr>
 </p:sld>
 </file>
 
 <file path=ppt/slides/slide8.xml><?xml version="1.0" encoding="utf-8"?>
-<p:sld xmlns:p="http://schemas.openxmlformats.org/presentationml/2006/main">
+<p:sld xmlns:a="http://schemas.openxmlformats.org/drawingml/2006/main" xmlns:r="http://schemas.openxmlformats.org/officeDocument/2006/relationships" xmlns:p="http://schemas.openxmlformats.org/presentationml/2006/main">
   <p:cSld>
     <p:spTree>
       <p:nvGrpSpPr>
@@ -6188,39 +5754,46 @@
         <p:cNvGrpSpPr/>
         <p:nvPr/>
       </p:nvGrpSpPr>
-      <p:grpSpPr/>
+      <p:grpSpPr>
+        <a:xfrm>
+          <a:off x="0" y="0"/>
+          <a:ext cx="0" cy="0"/>
+          <a:chOff x="0" y="0"/>
+          <a:chExt cx="0" cy="0"/>
+        </a:xfrm>
+      </p:grpSpPr>
       <p:pic>
         <p:nvPicPr>
-          <p:cNvPr id="3" name="Picture" title="This slide contains the following visuals: Proyeksi 2020 vs Target ,textbox ,cardVisual ,cardVisual ,Pembanding: Forecast Bawaan Power BI ,Revenue Bulanan dan Proyeksi Sampai Des 2020 (rentang 80%) ,Catatan Metode ,cardVisual ,cardVisual ,Proyeksi Bulanan Mar-Des 2020 ,pageNavigator. Please refer to the notes on this slide for details">
-            <a:hlinkClick xmlns:r="http://schemas.openxmlformats.org/officeDocument/2006/relationships" xmlns:a="http://schemas.openxmlformats.org/drawingml/2006/main" r:id="RelId6"/>
+          <p:cNvPr id="3" name="Picture" title="This slide contains the following visuals: cardVisual ,Baseline Sisa Tahun ,slicer ,Dampak Tiap Tuas (Revenue Tambahan) ,cardVisual ,Jembatan Skenario Revenue 2020 ,slicer ,Rekomendasi per Segmen ,cardVisual ,slicer ,textbox ,textbox ,pageNavigator ,Reset ,Catatan ,cardVisual ,slicer ,shape ,slicer ,cardVisual. Please refer to the notes on this slide for details">
+            <a:hlinkClick r:id="rId3"/>
           </p:cNvPr>
           <p:cNvPicPr>
-            <a:picLocks xmlns:a="http://schemas.openxmlformats.org/drawingml/2006/main" noChangeAspect="1"/>
+            <a:picLocks noChangeAspect="1"/>
           </p:cNvPicPr>
           <p:nvPr/>
         </p:nvPicPr>
         <p:blipFill>
-          <a:blip xmlns:r="http://schemas.openxmlformats.org/officeDocument/2006/relationships" xmlns:a="http://schemas.openxmlformats.org/drawingml/2006/main" r:embed="imgId190815185"/>
-          <a:stretch xmlns:a="http://schemas.openxmlformats.org/drawingml/2006/main">
+          <a:blip r:embed="rId4"/>
+          <a:stretch>
             <a:fillRect/>
           </a:stretch>
         </p:blipFill>
         <p:spPr>
-          <a:xfrm xmlns:a="http://schemas.openxmlformats.org/drawingml/2006/main">
+          <a:xfrm>
             <a:off x="76200" y="0"/>
             <a:ext cx="12020550" cy="6858000"/>
           </a:xfrm>
-          <a:prstGeom xmlns:a="http://schemas.openxmlformats.org/drawingml/2006/main" prst="rect">
+          <a:prstGeom prst="rect">
             <a:avLst/>
           </a:prstGeom>
-          <a:noFill xmlns:a="http://schemas.openxmlformats.org/drawingml/2006/main"/>
+          <a:noFill/>
         </p:spPr>
       </p:pic>
       <p:sp>
         <p:nvSpPr>
           <p:cNvPr id="4" name="Title" hidden="1"/>
           <p:cNvSpPr>
-            <a:spLocks xmlns:a="http://schemas.openxmlformats.org/drawingml/2006/main" noGrp="1"/>
+            <a:spLocks noGrp="1"/>
           </p:cNvSpPr>
           <p:nvPr>
             <p:ph type="title"/>
@@ -6228,86 +5801,20 @@
         </p:nvSpPr>
         <p:spPr/>
         <p:txBody>
-          <a:bodyPr xmlns:a="http://schemas.openxmlformats.org/drawingml/2006/main"/>
-          <a:lstStyle xmlns:a="http://schemas.openxmlformats.org/drawingml/2006/main"/>
-          <a:p xmlns:a="http://schemas.openxmlformats.org/drawingml/2006/main">
-            <a:r>
-              <a:t>Forecast</a:t>
+          <a:bodyPr/>
+          <a:lstStyle/>
+          <a:p>
+            <a:r>
+              <a:t>What If</a:t>
             </a:r>
           </a:p>
         </p:txBody>
       </p:sp>
     </p:spTree>
-    <p:clrMapOvr>
-      <a:masterClrMapping xmlns:a="http://schemas.openxmlformats.org/drawingml/2006/main"/>
-    </p:clrMapOvr>
   </p:cSld>
-</p:sld>
-</file>
-
-<file path=ppt/slides/slide9.xml><?xml version="1.0" encoding="utf-8"?>
-<p:sld xmlns:p="http://schemas.openxmlformats.org/presentationml/2006/main">
-  <p:cSld>
-    <p:spTree>
-      <p:nvGrpSpPr>
-        <p:cNvPr id="1" name=""/>
-        <p:cNvGrpSpPr/>
-        <p:nvPr/>
-      </p:nvGrpSpPr>
-      <p:grpSpPr/>
-      <p:pic>
-        <p:nvPicPr>
-          <p:cNvPr id="3" name="Picture" title="This slide contains the following visuals: cardVisual ,Baseline Sisa Tahun ,slicer ,Dampak Tiap Tuas (Revenue Tambahan) ,cardVisual ,Jembatan Skenario Revenue 2020 ,slicer ,Rekomendasi per Segmen ,cardVisual ,slicer ,textbox ,textbox ,pageNavigator ,Reset ,Catatan ,cardVisual ,slicer ,shape ,slicer ,cardVisual. Please refer to the notes on this slide for details">
-            <a:hlinkClick xmlns:r="http://schemas.openxmlformats.org/officeDocument/2006/relationships" xmlns:a="http://schemas.openxmlformats.org/drawingml/2006/main" r:id="RelId7"/>
-          </p:cNvPr>
-          <p:cNvPicPr>
-            <a:picLocks xmlns:a="http://schemas.openxmlformats.org/drawingml/2006/main" noChangeAspect="1"/>
-          </p:cNvPicPr>
-          <p:nvPr/>
-        </p:nvPicPr>
-        <p:blipFill>
-          <a:blip xmlns:r="http://schemas.openxmlformats.org/officeDocument/2006/relationships" xmlns:a="http://schemas.openxmlformats.org/drawingml/2006/main" r:embed="imgId190815178"/>
-          <a:stretch xmlns:a="http://schemas.openxmlformats.org/drawingml/2006/main">
-            <a:fillRect/>
-          </a:stretch>
-        </p:blipFill>
-        <p:spPr>
-          <a:xfrm xmlns:a="http://schemas.openxmlformats.org/drawingml/2006/main">
-            <a:off x="76200" y="0"/>
-            <a:ext cx="12020550" cy="6858000"/>
-          </a:xfrm>
-          <a:prstGeom xmlns:a="http://schemas.openxmlformats.org/drawingml/2006/main" prst="rect">
-            <a:avLst/>
-          </a:prstGeom>
-          <a:noFill xmlns:a="http://schemas.openxmlformats.org/drawingml/2006/main"/>
-        </p:spPr>
-      </p:pic>
-      <p:sp>
-        <p:nvSpPr>
-          <p:cNvPr id="4" name="Title" hidden="1"/>
-          <p:cNvSpPr>
-            <a:spLocks xmlns:a="http://schemas.openxmlformats.org/drawingml/2006/main" noGrp="1"/>
-          </p:cNvSpPr>
-          <p:nvPr>
-            <p:ph type="title"/>
-          </p:nvPr>
-        </p:nvSpPr>
-        <p:spPr/>
-        <p:txBody>
-          <a:bodyPr xmlns:a="http://schemas.openxmlformats.org/drawingml/2006/main"/>
-          <a:lstStyle xmlns:a="http://schemas.openxmlformats.org/drawingml/2006/main"/>
-          <a:p xmlns:a="http://schemas.openxmlformats.org/drawingml/2006/main">
-            <a:r>
-              <a:t>What If</a:t>
-            </a:r>
-          </a:p>
-        </p:txBody>
-      </p:sp>
-    </p:spTree>
-    <p:clrMapOvr>
-      <a:masterClrMapping xmlns:a="http://schemas.openxmlformats.org/drawingml/2006/main"/>
-    </p:clrMapOvr>
-  </p:cSld>
+  <p:clrMapOvr>
+    <a:masterClrMapping/>
+  </p:clrMapOvr>
 </p:sld>
 </file>
 
@@ -6570,4 +6077,299 @@
     </a:ext>
   </a:extLst>
 </a:theme>
+</file>
+
+<file path=ppt/theme/theme2.xml><?xml version="1.0" encoding="utf-8"?>
+<a:theme xmlns:a="http://schemas.openxmlformats.org/drawingml/2006/main" name="Office Theme">
+  <a:themeElements>
+    <a:clrScheme name="Office">
+      <a:dk1>
+        <a:sysClr val="windowText" lastClr="000000"/>
+      </a:dk1>
+      <a:lt1>
+        <a:sysClr val="window" lastClr="FFFFFF"/>
+      </a:lt1>
+      <a:dk2>
+        <a:srgbClr val="44546A"/>
+      </a:dk2>
+      <a:lt2>
+        <a:srgbClr val="E7E6E6"/>
+      </a:lt2>
+      <a:accent1>
+        <a:srgbClr val="4472C4"/>
+      </a:accent1>
+      <a:accent2>
+        <a:srgbClr val="ED7D31"/>
+      </a:accent2>
+      <a:accent3>
+        <a:srgbClr val="A5A5A5"/>
+      </a:accent3>
+      <a:accent4>
+        <a:srgbClr val="FFC000"/>
+      </a:accent4>
+      <a:accent5>
+        <a:srgbClr val="5B9BD5"/>
+      </a:accent5>
+      <a:accent6>
+        <a:srgbClr val="70AD47"/>
+      </a:accent6>
+      <a:hlink>
+        <a:srgbClr val="0563C1"/>
+      </a:hlink>
+      <a:folHlink>
+        <a:srgbClr val="954F72"/>
+      </a:folHlink>
+    </a:clrScheme>
+    <a:fontScheme name="Office">
+      <a:majorFont>
+        <a:latin typeface="Calibri Light" panose="020F0302020204030204"/>
+        <a:ea typeface=""/>
+        <a:cs typeface=""/>
+        <a:font script="Jpan" typeface="游ゴシック Light"/>
+        <a:font script="Hang" typeface="맑은 고딕"/>
+        <a:font script="Hans" typeface="等线 Light"/>
+        <a:font script="Hant" typeface="新細明體"/>
+        <a:font script="Arab" typeface="Times New Roman"/>
+        <a:font script="Hebr" typeface="Times New Roman"/>
+        <a:font script="Thai" typeface="Angsana New"/>
+        <a:font script="Ethi" typeface="Nyala"/>
+        <a:font script="Beng" typeface="Vrinda"/>
+        <a:font script="Gujr" typeface="Shruti"/>
+        <a:font script="Khmr" typeface="MoolBoran"/>
+        <a:font script="Knda" typeface="Tunga"/>
+        <a:font script="Guru" typeface="Raavi"/>
+        <a:font script="Cans" typeface="Euphemia"/>
+        <a:font script="Cher" typeface="Plantagenet Cherokee"/>
+        <a:font script="Yiii" typeface="Microsoft Yi Baiti"/>
+        <a:font script="Tibt" typeface="Microsoft Himalaya"/>
+        <a:font script="Thaa" typeface="MV Boli"/>
+        <a:font script="Deva" typeface="Mangal"/>
+        <a:font script="Telu" typeface="Gautami"/>
+        <a:font script="Taml" typeface="Latha"/>
+        <a:font script="Syrc" typeface="Estrangelo Edessa"/>
+        <a:font script="Orya" typeface="Kalinga"/>
+        <a:font script="Mlym" typeface="Kartika"/>
+        <a:font script="Laoo" typeface="DokChampa"/>
+        <a:font script="Sinh" typeface="Iskoola Pota"/>
+        <a:font script="Mong" typeface="Mongolian Baiti"/>
+        <a:font script="Viet" typeface="Times New Roman"/>
+        <a:font script="Uigh" typeface="Microsoft Uighur"/>
+        <a:font script="Geor" typeface="Sylfaen"/>
+        <a:font script="Armn" typeface="Arial"/>
+        <a:font script="Bugi" typeface="Leelawadee UI"/>
+        <a:font script="Bopo" typeface="Microsoft JhengHei"/>
+        <a:font script="Java" typeface="Javanese Text"/>
+        <a:font script="Lisu" typeface="Segoe UI"/>
+        <a:font script="Mymr" typeface="Myanmar Text"/>
+        <a:font script="Nkoo" typeface="Ebrima"/>
+        <a:font script="Olck" typeface="Nirmala UI"/>
+        <a:font script="Osma" typeface="Ebrima"/>
+        <a:font script="Phag" typeface="Phagspa"/>
+        <a:font script="Syrn" typeface="Estrangelo Edessa"/>
+        <a:font script="Syrj" typeface="Estrangelo Edessa"/>
+        <a:font script="Syre" typeface="Estrangelo Edessa"/>
+        <a:font script="Sora" typeface="Nirmala UI"/>
+        <a:font script="Tale" typeface="Microsoft Tai Le"/>
+        <a:font script="Talu" typeface="Microsoft New Tai Lue"/>
+        <a:font script="Tfng" typeface="Ebrima"/>
+      </a:majorFont>
+      <a:minorFont>
+        <a:latin typeface="Calibri" panose="020F0502020204030204"/>
+        <a:ea typeface=""/>
+        <a:cs typeface=""/>
+        <a:font script="Jpan" typeface="游ゴシック"/>
+        <a:font script="Hang" typeface="맑은 고딕"/>
+        <a:font script="Hans" typeface="等线"/>
+        <a:font script="Hant" typeface="新細明體"/>
+        <a:font script="Arab" typeface="Arial"/>
+        <a:font script="Hebr" typeface="Arial"/>
+        <a:font script="Thai" typeface="Cordia New"/>
+        <a:font script="Ethi" typeface="Nyala"/>
+        <a:font script="Beng" typeface="Vrinda"/>
+        <a:font script="Gujr" typeface="Shruti"/>
+        <a:font script="Khmr" typeface="DaunPenh"/>
+        <a:font script="Knda" typeface="Tunga"/>
+        <a:font script="Guru" typeface="Raavi"/>
+        <a:font script="Cans" typeface="Euphemia"/>
+        <a:font script="Cher" typeface="Plantagenet Cherokee"/>
+        <a:font script="Yiii" typeface="Microsoft Yi Baiti"/>
+        <a:font script="Tibt" typeface="Microsoft Himalaya"/>
+        <a:font script="Thaa" typeface="MV Boli"/>
+        <a:font script="Deva" typeface="Mangal"/>
+        <a:font script="Telu" typeface="Gautami"/>
+        <a:font script="Taml" typeface="Latha"/>
+        <a:font script="Syrc" typeface="Estrangelo Edessa"/>
+        <a:font script="Orya" typeface="Kalinga"/>
+        <a:font script="Mlym" typeface="Kartika"/>
+        <a:font script="Laoo" typeface="DokChampa"/>
+        <a:font script="Sinh" typeface="Iskoola Pota"/>
+        <a:font script="Mong" typeface="Mongolian Baiti"/>
+        <a:font script="Viet" typeface="Arial"/>
+        <a:font script="Uigh" typeface="Microsoft Uighur"/>
+        <a:font script="Geor" typeface="Sylfaen"/>
+        <a:font script="Armn" typeface="Arial"/>
+        <a:font script="Bugi" typeface="Leelawadee UI"/>
+        <a:font script="Bopo" typeface="Microsoft JhengHei"/>
+        <a:font script="Java" typeface="Javanese Text"/>
+        <a:font script="Lisu" typeface="Segoe UI"/>
+        <a:font script="Mymr" typeface="Myanmar Text"/>
+        <a:font script="Nkoo" typeface="Ebrima"/>
+        <a:font script="Olck" typeface="Nirmala UI"/>
+        <a:font script="Osma" typeface="Ebrima"/>
+        <a:font script="Phag" typeface="Phagspa"/>
+        <a:font script="Syrn" typeface="Estrangelo Edessa"/>
+        <a:font script="Syrj" typeface="Estrangelo Edessa"/>
+        <a:font script="Syre" typeface="Estrangelo Edessa"/>
+        <a:font script="Sora" typeface="Nirmala UI"/>
+        <a:font script="Tale" typeface="Microsoft Tai Le"/>
+        <a:font script="Talu" typeface="Microsoft New Tai Lue"/>
+        <a:font script="Tfng" typeface="Ebrima"/>
+      </a:minorFont>
+    </a:fontScheme>
+    <a:fmtScheme name="Office">
+      <a:fillStyleLst>
+        <a:solidFill>
+          <a:schemeClr val="phClr"/>
+        </a:solidFill>
+        <a:gradFill rotWithShape="1">
+          <a:gsLst>
+            <a:gs pos="0">
+              <a:schemeClr val="phClr">
+                <a:lumMod val="110000"/>
+                <a:satMod val="105000"/>
+                <a:tint val="67000"/>
+              </a:schemeClr>
+            </a:gs>
+            <a:gs pos="50000">
+              <a:schemeClr val="phClr">
+                <a:lumMod val="105000"/>
+                <a:satMod val="103000"/>
+                <a:tint val="73000"/>
+              </a:schemeClr>
+            </a:gs>
+            <a:gs pos="100000">
+              <a:schemeClr val="phClr">
+                <a:lumMod val="105000"/>
+                <a:satMod val="109000"/>
+                <a:tint val="81000"/>
+              </a:schemeClr>
+            </a:gs>
+          </a:gsLst>
+          <a:lin ang="5400000" scaled="0"/>
+        </a:gradFill>
+        <a:gradFill rotWithShape="1">
+          <a:gsLst>
+            <a:gs pos="0">
+              <a:schemeClr val="phClr">
+                <a:satMod val="103000"/>
+                <a:lumMod val="102000"/>
+                <a:tint val="94000"/>
+              </a:schemeClr>
+            </a:gs>
+            <a:gs pos="50000">
+              <a:schemeClr val="phClr">
+                <a:satMod val="110000"/>
+                <a:lumMod val="100000"/>
+                <a:shade val="100000"/>
+              </a:schemeClr>
+            </a:gs>
+            <a:gs pos="100000">
+              <a:schemeClr val="phClr">
+                <a:lumMod val="99000"/>
+                <a:satMod val="120000"/>
+                <a:shade val="78000"/>
+              </a:schemeClr>
+            </a:gs>
+          </a:gsLst>
+          <a:lin ang="5400000" scaled="0"/>
+        </a:gradFill>
+      </a:fillStyleLst>
+      <a:lnStyleLst>
+        <a:ln w="6350" cap="flat" cmpd="sng" algn="ctr">
+          <a:solidFill>
+            <a:schemeClr val="phClr"/>
+          </a:solidFill>
+          <a:prstDash val="solid"/>
+          <a:miter lim="800000"/>
+        </a:ln>
+        <a:ln w="12700" cap="flat" cmpd="sng" algn="ctr">
+          <a:solidFill>
+            <a:schemeClr val="phClr"/>
+          </a:solidFill>
+          <a:prstDash val="solid"/>
+          <a:miter lim="800000"/>
+        </a:ln>
+        <a:ln w="19050" cap="flat" cmpd="sng" algn="ctr">
+          <a:solidFill>
+            <a:schemeClr val="phClr"/>
+          </a:solidFill>
+          <a:prstDash val="solid"/>
+          <a:miter lim="800000"/>
+        </a:ln>
+      </a:lnStyleLst>
+      <a:effectStyleLst>
+        <a:effectStyle>
+          <a:effectLst/>
+        </a:effectStyle>
+        <a:effectStyle>
+          <a:effectLst/>
+        </a:effectStyle>
+        <a:effectStyle>
+          <a:effectLst>
+            <a:outerShdw blurRad="57150" dist="19050" dir="5400000" algn="ctr" rotWithShape="0">
+              <a:srgbClr val="000000">
+                <a:alpha val="63000"/>
+              </a:srgbClr>
+            </a:outerShdw>
+          </a:effectLst>
+        </a:effectStyle>
+      </a:effectStyleLst>
+      <a:bgFillStyleLst>
+        <a:solidFill>
+          <a:schemeClr val="phClr"/>
+        </a:solidFill>
+        <a:solidFill>
+          <a:schemeClr val="phClr">
+            <a:tint val="95000"/>
+            <a:satMod val="170000"/>
+          </a:schemeClr>
+        </a:solidFill>
+        <a:gradFill rotWithShape="1">
+          <a:gsLst>
+            <a:gs pos="0">
+              <a:schemeClr val="phClr">
+                <a:tint val="93000"/>
+                <a:satMod val="150000"/>
+                <a:shade val="98000"/>
+                <a:lumMod val="102000"/>
+              </a:schemeClr>
+            </a:gs>
+            <a:gs pos="50000">
+              <a:schemeClr val="phClr">
+                <a:tint val="98000"/>
+                <a:satMod val="130000"/>
+                <a:shade val="90000"/>
+                <a:lumMod val="103000"/>
+              </a:schemeClr>
+            </a:gs>
+            <a:gs pos="100000">
+              <a:schemeClr val="phClr">
+                <a:shade val="63000"/>
+                <a:satMod val="120000"/>
+              </a:schemeClr>
+            </a:gs>
+          </a:gsLst>
+          <a:lin ang="5400000" scaled="0"/>
+        </a:gradFill>
+      </a:bgFillStyleLst>
+    </a:fmtScheme>
+  </a:themeElements>
+  <a:objectDefaults/>
+  <a:extraClrSchemeLst/>
+  <a:extLst>
+    <a:ext uri="{05A4C25C-085E-4340-85A3-A5531E510DB2}">
+      <thm15:themeFamily xmlns:thm15="http://schemas.microsoft.com/office/thememl/2012/main" name="Office Theme" id="{62F939B6-93AF-4DB8-9C6B-D6C7DFDC589F}" vid="{4A3C46E8-61CC-4603-A589-7422A47A8E4A}"/>
+    </a:ext>
+  </a:extLst>
+</a:theme>
 </file>